--- a/agent-observability-course/10-graphics/slides/section-10.pptx
+++ b/agent-observability-course/10-graphics/slides/section-10.pptx
@@ -35,6 +35,12 @@
     <p:sldId id="283" r:id="rId35"/>
     <p:sldId id="284" r:id="rId36"/>
     <p:sldId id="285" r:id="rId37"/>
+    <p:sldId id="286" r:id="rId38"/>
+    <p:sldId id="287" r:id="rId39"/>
+    <p:sldId id="288" r:id="rId40"/>
+    <p:sldId id="289" r:id="rId41"/>
+    <p:sldId id="290" r:id="rId42"/>
+    <p:sldId id="291" r:id="rId43"/>
   </p:sldIdLst>
   <p:sldSz cx="12191695" cy="6858000" type="screen4x3"/>
   <p:notesSz cx="6858000" cy="9144000"/>
@@ -601,7 +607,7 @@
           <a:lstStyle/>
           <a:p>
             <a:r>
-              <a:t>One table, one row per data class. Raw production traces, masked, thirty days. Dev and staging, seven, because nobody debugs last month's dev run. Scores and aggregates carry no PII, just ids and numbers, so thirteen months for year-over-year comparison. Datasets are your tests, so they stay, with a quarterly review. Logs match traces. Prometheus, forty-five days, a thirty-day SLO window plus margin. And the local store on your laptop: synthetic only in offline mode, purged on clean, never committed. Where do you set these? Langfuse has a project-level data retention setting; the exact screen depends on your plan and version, so verify. Prometheus takes a retention flag in the compose file. Logs are your log platform's setting. Write all of them in the checklist, with a date.</a:t>
+              <a:t>Title card (K2). Retention, access and tenant separation.</a:t>
             </a:r>
           </a:p>
         </p:txBody>
@@ -671,7 +677,13 @@
           <a:lstStyle/>
           <a:p>
             <a:r>
-              <a:t>Projects. One per environment, with different keys and different retention. Roles, least privilege: two owners, the on-call rotation as admins, the engineers who work on Atlas as members, and stakeholders as viewers. The role names vary by Langfuse version; the shape doesn't. API keys belong to services, not people, so a departure doesn't mean a rotation of every key. And the judge and the dataset job run with a key that can write scores and items, and can't delete a project. The question to ask about every reader is: what's the worst thing this role can do at three in the morning?</a:t>
+              <a:t>One table, one row per data class. Raw production traces, masked, thirty days. Dev and staging, seven, because nobody debugs last month's dev run. Scores and aggregates carry no PII, just ids and numbers, so thirteen months for year-over-year comparison. Datasets are your tests, so they stay, with a quarterly review. Logs match traces. Prometheus, forty-five days, the twenty-eight-day SLO window plus margin. And the local store on your laptop: synthetic only in offline mode, purged on clean, never committed.</a:t>
+            </a:r>
+          </a:p>
+          <a:p/>
+          <a:p>
+            <a:r>
+              <a:t>[SCREEN: three files side by side. `deploy/docker-compose.observability.yml` with `--storage.tsdb.retention.time=45d` highlighted; the `M...]</a:t>
             </a:r>
           </a:p>
         </p:txBody>
@@ -741,7 +753,7 @@
           <a:lstStyle/>
           <a:p>
             <a:r>
-              <a:t>Tags or projects for tenants. Three questions. May an engineer supporting one tenant see another's traces? If not, separate projects. Are the tenants different legal entities, or in different jurisdictions? If so, separate projects, possibly separate regions. And do you need cross-tenant dashboards, like the showback? If so, tags, or aggregate outside Langfuse. Northwind is four departments of one company with one support team and a showback report: tags in one project, which is what we've done since Section 4. If Atlas were a product sold to external customers, the answer flips: a project per customer, and the cross-customer numbers live in Prometheus, which has no PII to begin with.</a:t>
+              <a:t>Projects. One per environment, with different keys and different retention. Roles, least privilege: two owners, the on-call rotation as admins, the engineers who work on Atlas as members, and stakeholders as viewers. The role names vary by Langfuse version; the shape doesn't. API keys belong to services, not people, so a departure doesn't mean a rotation of every key. And the judge and the dataset job run with a key that can write scores and items, and can't delete a project. The question to ask about every reader is: what's the worst thing this role can do at three in the morning?</a:t>
             </a:r>
           </a:p>
         </p:txBody>
@@ -811,7 +823,7 @@
           <a:lstStyle/>
           <a:p>
             <a:r>
-              <a:t>And the other destinations. The collector's secrets come from the environment, never the YAML in git. Logs get the same retention as traces, and because masking happened at the source, their wide audience is acceptable. Grafana gets viewer accounts, and the compose admin password is for the lab, not for anything with a public IP. The judge provider: read the data terms, prefer zero-retention endpoints, and remember it only ever sees masked inputs anyway. And laptops: offline mode is synthetic. If someone needs a real-data export to debug something, that's a ticket, with a deletion date on it.</a:t>
+              <a:t>Tags or projects for tenants. Three questions. May an engineer supporting one tenant see another's traces? If not, separate projects. Are the tenants different legal entities, or in different jurisdictions? If so, separate projects, possibly separate regions. And do you need cross-tenant dashboards, like the showback? If so, tags, or aggregate outside Langfuse. Northwind is four departments of one company with one support team and a showback report: tags in one project, which is what we've done since Section 4. If Atlas were a product sold to external customers, the answer flips: a project per customer, and the cross-customer numbers live in Prometheus, which has no PII to begin with.</a:t>
             </a:r>
           </a:p>
         </p:txBody>
@@ -881,7 +893,7 @@
           <a:lstStyle/>
           <a:p>
             <a:r>
-              <a:t>All of this is in the governance checklist in the resources folder. Retention table, project and role map, the tenant decision with the three answers, and every destination with its owner and where the setting lives. Fill it once, date it, review it quarterly. It's the document your security team will ask for. Having it before they ask is the difference between a review and an audit.</a:t>
+              <a:t>And the other destinations. The collector's secrets come from the environment, never the YAML in git. Logs get the same retention as traces, and because masking happened at the source, their wide audience is acceptable. Grafana gets viewer accounts, and the compose admin password is for the lab, not for anything with a public IP. The judge provider: read the data terms, prefer zero-retention endpoints, and remember it only ever sees masked inputs anyway. And laptops: offline mode is synthetic. If someone needs a real-data export to debug something, that's a ticket, with a deletion date on it.</a:t>
             </a:r>
           </a:p>
         </p:txBody>
@@ -951,7 +963,7 @@
           <a:lstStyle/>
           <a:p>
             <a:r>
-              <a:t>Title card (K2). Regulatory logging obligations (not legal advice).</a:t>
+              <a:t>All of this is in the governance checklist in the resources folder. Retention table, project and role map, the tenant decision with the three answers, and every destination with its owner and where the setting lives. Fill it once, date it, review it quarterly. It's the document your security team will ask for. Having it before they ask is the difference between a review and an audit.</a:t>
             </a:r>
           </a:p>
         </p:txBody>
@@ -1021,7 +1033,7 @@
           <a:lstStyle/>
           <a:p>
             <a:r>
-              <a:t>So far this section has said: collect less, keep it shorter, restrict access. Some regulations say the opposite for specific records: keep a trail, for a minimum period. Both are right, because they're talking about different data. A small, deliberate audit trail with a long retention. And short-lived, masked debugging telemetry. The mistake is treating them as one dataset with one retention setting. Then you either keep everything for years, or delete the thing an auditor asks for.</a:t>
+              <a:t>Title card (K2). Regulatory logging obligations (not legal advice).</a:t>
             </a:r>
           </a:p>
         </p:txBody>
@@ -1091,13 +1103,7 @@
           <a:lstStyle/>
           <a:p>
             <a:r>
-              <a:t>The EU AI Act works in tiers, and the strict record-keeping rules target systems it classifies as high-risk, in an annex of use cases. Employment is on that list: recruitment, promotion, termination, task allocation, monitoring workers. Atlas today answers policy questions, opens tickets and resets passwords. It's probably not making employment decisions. Atlas next year, wired into leave approvals or asked to flag underperformers, might be. Have that conversation with counsel before the feature ships.</a:t>
-            </a:r>
-          </a:p>
-          <a:p/>
-          <a:p>
-            <a:r>
-              <a:t>For high-risk systems, the obligations include automatic logging of events over the system's lifetime, kept for a minimum period the Act sets in months, verify the current number, plus human oversight and documentation. Separately, transparency duties: users should know they're talking to an AI. Atlas says so in its greeting. Keep it that way.</a:t>
+              <a:t>So far this section has said: collect less, keep it shorter, restrict access. Some regulations say the opposite for specific records: keep a trail, for a minimum period. Both are right, about different data. A small, deliberate audit trail with a long retention. And short-lived, masked debugging telemetry. The mistake is treating them as one dataset with one retention setting. Then you either keep everything for years, or delete the thing an auditor asks for.</a:t>
             </a:r>
           </a:p>
         </p:txBody>
@@ -1167,7 +1173,13 @@
           <a:lstStyle/>
           <a:p>
             <a:r>
-              <a:t>(continued) The EU AI Act works in tiers, and the strict record-keeping rules target systems it classifies as high-risk, in an annex of use cases. Employment is on that list: recruitment, promotion, termination, </a:t>
+              <a:t>The EU AI Act works in tiers, and the strict record-keeping rules target systems it classifies as high-risk, in an annex of use cases. Employment is on that list: recruitment, promotion, termination, task allocation, monitoring workers. Atlas today answers policy questions, opens tickets and resets passwords. It's probably not making employment decisions. Atlas next year, wired into leave approvals or asked to flag underperformers, might be. Have that conversation with counsel before the feature ships.</a:t>
+            </a:r>
+          </a:p>
+          <a:p/>
+          <a:p>
+            <a:r>
+              <a:t>For high-risk systems, the obligations include automatic logging of events over the system's lifetime, kept for a minimum period the Act sets in months, verify the current number, plus human oversight and documentation. Separately, transparency duties: users should know they're talking to an AI. Say so in the interface where people meet Atlas, and keep it that way.</a:t>
             </a:r>
           </a:p>
         </p:txBody>
@@ -1237,7 +1249,7 @@
           <a:lstStyle/>
           <a:p>
             <a:r>
-              <a:t>Beyond the AI Act. Data protection law: traces are personal data, so lawful basis, minimisation and subject rights apply. An erasure request reaches your tracing backend, and the keyed hash from 10.2 is how you find one person's traces. Sector rules for health and finance. Card data: the six numbers from the replayed day are a PCI problem if stored raw, and a non-event because they were masked before export. Assurance frameworks expect an access log for the telemetry itself. And contracts on both sides set terms. None of this is exotic. It's the rules your production database already lives under, applied to a copy of its data you forgot you were making.</a:t>
+              <a:t>(continued) The EU AI Act works in tiers, and the strict record-keeping rules target systems it classifies as high-risk, in an annex of use cases. Employment is on that list: recruitment, promotion, termination, </a:t>
             </a:r>
           </a:p>
         </p:txBody>
@@ -1307,7 +1319,7 @@
           <a:lstStyle/>
           <a:p>
             <a:r>
-              <a:t>Everything. The input, which is whatever the employee typed, including the password they pasted by mistake. Tool results, which are records from ticketing, HR and shipping systems that have their own access controls. The output, which echoes the above. The retrieval context. And then the copies: the judge sees all of it, and feedback comments are free text. Your agent's memory is also your telemetry's memory, and telemetry remembers longer.</a:t>
+              <a:t>Everything. Identifiers, starting with the user id on every single request. The input, which is whatever the employee typed, including the password they pasted by mistake. Tool results, which are records from systems that have their own access controls. The output, which echoes the above. The retrieval context. And then the copies: the judge sees the question and the answer, and feedback comments are free text. Your agent's memory is also your telemetry's memory, and telemetry remembers longer.</a:t>
             </a:r>
           </a:p>
         </p:txBody>
@@ -1377,7 +1389,7 @@
           <a:lstStyle/>
           <a:p>
             <a:r>
-              <a:t>So what's the audit trail? Per request: when, the trace id, the hashed user, the tenant, which prompt version and model actually answered, which tools were called, with arguments hashed or summarised, what decisions were taken, guardrail outcomes, and a hash of the final answer. Not the raw prompt. Not the raw tool results. Not the retrieval chunks. Every field is already a span attribute from Sections 3 to 5. A small exporter writes one line per request to an append-only store with long retention and narrow access. It answers "what did the system do, and could a human have intervened" without containing anyone's phone number.</a:t>
+              <a:t>Beyond the AI Act. Data protection law: traces are personal data, so lawful basis, minimisation and subject rights apply. An erasure request reaches your tracing backend, and the hash from 10.2, keyed in production, is how you find one person's traces. Sector rules for health and finance: a card number stored raw is a PCI problem; masked before export, it's a non-event. Assurance frameworks expect an access log for the telemetry itself. And contracts on both sides set terms. None of this is exotic. It's the rules your production database already lives under, applied to a copy of its data you forgot you were making.</a:t>
             </a:r>
           </a:p>
         </p:txBody>
@@ -1447,7 +1459,25 @@
           <a:lstStyle/>
           <a:p>
             <a:r>
-              <a:t>And the list of things that go nowhere. Credentials, including the answers to the verification questions in the password reset flow: `reset_password` takes them, checks them, and never puts them on a span. Full card and bank numbers. Special-category data, like health, if the helpdesk ever sees it. Raw injection payloads beyond what security needs. And anything your vendor's agreement says can't go to that vendor. Build this list into the source-level masking from 10.2, and the CI test, so it's enforced rather than remembered.</a:t>
+              <a:t>So what's the audit trail? Per request: when, the trace id, the hashed user, the tenant, which prompt version and model actually answered, which tools were called, with arguments hashed or summarised, what decisions were taken, guardrail outcomes, and a hash of the final answer. Not the raw prompt. Not the raw tool results. Not the retrieval chunks. Every field is already a span attribute from Sections 3 to 5. Here's one line, built from a real span in the replayed day's store.</a:t>
+            </a:r>
+          </a:p>
+          <a:p/>
+          <a:p>
+            <a:r>
+              <a:t>[SCREEN: terminal]</a:t>
+            </a:r>
+          </a:p>
+          <a:p/>
+          <a:p>
+            <a:r>
+              <a:t>[DEMO: output (the replay is deterministic, so yours matches):]</a:t>
+            </a:r>
+          </a:p>
+          <a:p/>
+          <a:p>
+            <a:r>
+              <a:t>When, which trace, which user as a hash, which department, which prompt and model, which tools, what happened, and a fingerprint of the answer. No question text, no answer text, no phone number. A job writes one of these per request to an append-only store with long retention and narrow access. It answers "what did the system do, and could a human have intervened" without containing anyone's data. And remember 10.2: for an audit trail, the user hash should be a keyed HMAC, not this demo's salted hash.</a:t>
             </a:r>
           </a:p>
         </p:txBody>
@@ -1517,13 +1547,7 @@
           <a:lstStyle/>
           <a:p>
             <a:r>
-              <a:t>Six questions for the meeting, on the slide. Bring the checklist from 10.3 and the retention table. Counsel will change some numbers. That's the point. What you're bringing is the engineering: masked telemetry, a separate audit trail, and a hash that finds one person's data. Those don't change.</a:t>
-            </a:r>
-          </a:p>
-          <a:p/>
-          <a:p>
-            <a:r>
-              <a:t>Last word. This is a map, not the territory. Laws differ, they change, and your use case is yours. Get it checked. But don't wait for the lawyer to start masking. That part is right under every regime I've seen.</a:t>
+              <a:t>And the list of things that go nowhere. Credentials, including one-time codes and verification answers: Atlas's `reset_password` takes only an employee ID and a verified flag, and the code goes to the employee's phone, never through Atlas. Keep it that way. Full card and bank numbers. Special-category data, like health, if the helpdesk ever sees it. Raw injection payloads beyond what security needs. And anything your vendor's agreement says can't go to that vendor. Build this list into the source-level masking from 10.2, and the CI test, so it's enforced rather than remembered.</a:t>
             </a:r>
           </a:p>
         </p:txBody>
@@ -1593,7 +1617,13 @@
           <a:lstStyle/>
           <a:p>
             <a:r>
-              <a:t>(continued) Six questions for the meeting, on the slide. Bring the checklist from 10.3 and the retention table. Counsel will change some numbers. That's the point. What you're bringing is the engineering: masked </a:t>
+              <a:t>Six questions for the meeting, on the slide. Bring the checklist from 10.3 and the retention table. Counsel will change some numbers. That's the point. What you're bringing is the engineering: masked telemetry, a separate audit trail, and a hash that finds one person's data. Those don't change.</a:t>
+            </a:r>
+          </a:p>
+          <a:p/>
+          <a:p>
+            <a:r>
+              <a:t>Last word. This is a map, not the territory. Laws differ, they change, and your use case is yours. Get it checked. But don't wait for the lawyer to start masking. That part is right under every regime I've seen.</a:t>
             </a:r>
           </a:p>
         </p:txBody>
@@ -1663,7 +1693,7 @@
           <a:lstStyle/>
           <a:p>
             <a:r>
-              <a:t>Title card (K2). Quiz: Governance.</a:t>
+              <a:t>(continued) Six questions for the meeting, on the slide. Bring the checklist from 10.3 and the retention table. Counsel will change some numbers. That's the point. What you're bringing is the engineering: masked </a:t>
             </a:r>
           </a:p>
         </p:txBody>
@@ -1733,6 +1763,76 @@
           <a:lstStyle/>
           <a:p>
             <a:r>
+              <a:t>Title card (K2). Quiz: Governance.</a:t>
+            </a:r>
+          </a:p>
+        </p:txBody>
+      </p:sp>
+      <p:sp>
+        <p:nvSpPr>
+          <p:cNvPr id="4" name="Slide Number Placeholder 3"/>
+          <p:cNvSpPr>
+            <a:spLocks noGrp="1"/>
+          </p:cNvSpPr>
+          <p:nvPr>
+            <p:ph type="sldNum" idx="5" sz="quarter"/>
+          </p:nvPr>
+        </p:nvSpPr>
+        <p:spPr/>
+      </p:sp>
+    </p:spTree>
+  </p:cSld>
+  <p:clrMapOvr>
+    <a:masterClrMapping/>
+  </p:clrMapOvr>
+</p:notes>
+</file>
+
+<file path=ppt/notesSlides/notesSlide26.xml><?xml version="1.0" encoding="utf-8"?>
+<p:notes xmlns:a="http://schemas.openxmlformats.org/drawingml/2006/main" xmlns:p="http://schemas.openxmlformats.org/presentationml/2006/main" xmlns:r="http://schemas.openxmlformats.org/officeDocument/2006/relationships">
+  <p:cSld>
+    <p:spTree>
+      <p:nvGrpSpPr>
+        <p:cNvPr id="1" name=""/>
+        <p:cNvGrpSpPr/>
+        <p:nvPr/>
+      </p:nvGrpSpPr>
+      <p:grpSpPr>
+        <a:xfrm>
+          <a:off x="0" y="0"/>
+          <a:ext cx="0" cy="0"/>
+          <a:chOff x="0" y="0"/>
+          <a:chExt cx="0" cy="0"/>
+        </a:xfrm>
+      </p:grpSpPr>
+      <p:sp>
+        <p:nvSpPr>
+          <p:cNvPr id="2" name="Slide Image Placeholder 1"/>
+          <p:cNvSpPr>
+            <a:spLocks noGrp="1"/>
+          </p:cNvSpPr>
+          <p:nvPr>
+            <p:ph type="sldImg" idx="2"/>
+          </p:nvPr>
+        </p:nvSpPr>
+        <p:spPr/>
+      </p:sp>
+      <p:sp>
+        <p:nvSpPr>
+          <p:cNvPr id="3" name="Notes Placeholder 2"/>
+          <p:cNvSpPr>
+            <a:spLocks noGrp="1"/>
+          </p:cNvSpPr>
+          <p:nvPr>
+            <p:ph type="body" idx="3" sz="quarter"/>
+          </p:nvPr>
+        </p:nvSpPr>
+        <p:spPr/>
+        <p:txBody>
+          <a:bodyPr/>
+          <a:lstStyle/>
+          <a:p>
+            <a:r>
               <a:t>A tip: for any field, ask two questions in order. Do I need to join on it later? If yes, hash. Do I need it at all? If no, don't collect it.</a:t>
             </a:r>
           </a:p>
@@ -1803,7 +1903,7 @@
           <a:lstStyle/>
           <a:p>
             <a:r>
-              <a:t>(continued) Everything. The input, which is whatever the employee typed, including the password they pasted by mistake. Tool results, which are records from ticketing, HR and shipping systems that have their own </a:t>
+              <a:t>(continued) Everything. Identifiers, starting with the user id on every single request. The input, which is whatever the employee typed, including the password they pasted by mistake. Tool results, which are reco</a:t>
             </a:r>
           </a:p>
         </p:txBody>
@@ -1873,13 +1973,7 @@
           <a:lstStyle/>
           <a:p>
             <a:r>
-              <a:t>[B-ROLL: the diagram builds: Atlas in the centre, six arrows out, each destination with a small "who can read" badge.]</a:t>
-            </a:r>
-          </a:p>
-          <a:p/>
-          <a:p>
-            <a:r>
-              <a:t>Six destinations. Langfuse, where every project member can read every trace. The collector, which fans out to whatever backends you configure. The local span store on your laptop, which has no retention at all. Logs, which in most companies have the widest audience of any system. The judge provider, which sees the full trace under its own data terms. And Prometheus, which is the one place PII shouldn't be, because we never put ids in labels. Count how many of those had a security review at your company. In most places the answer is one, and it's Prometheus.</a:t>
+              <a:t>Six destinations. Langfuse, where every project member can read every trace. The collector, which fans out to whatever backends you configure; Atlas's sends to Langfuse and Phoenix. The local span store on your laptop, which keeps everything until you run `make clean`. Logs, which in most companies have the widest audience of any system. The judge provider, which sees what you send it under its own data terms. And Prometheus, the one place ids shouldn't be, because the label allow-list keeps them out. Count how many of those had a security review at your company. In most places the answer is one, and it's the database the data came from.</a:t>
             </a:r>
           </a:p>
         </p:txBody>
@@ -1949,7 +2043,7 @@
           <a:lstStyle/>
           <a:p>
             <a:r>
-              <a:t>Here's the scale, from the replayed day. Twelve hundred emails. Three hundred phone numbers. An employee ID in essentially every request. Six card numbers, from people asking about declined expense cards. Most of it, sixty-two percent, arrived in tool results, which is the part nobody looks at in the UI. Thirty days of retention, four destinations: about a million and a half personal data values at rest, for a helpdesk. And the cost of masking every one of them before they leave the process is four tenths of a millisecond per span. No tokens. No dollars. This is the cheapest security control you will ever ship.</a:t>
+              <a:t>Here's the scale on the replayed day. An employee ID on every one of ten thousand requests. Every question and every answer, in plain text. Six hundred seventy-eight answers flagged by the PII detector from 8.4. Multiply by a month of retention and a few destinations, and a helpdesk is holding over a million identifiers at rest. Masking a value before it leaves the process costs a fraction of a millisecond. No tokens. No dollars. This is the cheapest security control you will ever ship.</a:t>
             </a:r>
           </a:p>
         </p:txBody>
@@ -2025,7 +2119,13 @@
           <a:p/>
           <a:p>
             <a:r>
-              <a:t>One principle for the whole section. The safest data is the data you never collected. Every control we add downstream, retention, access, encryption, is a mitigation for a value that shouldn't have been there. So the order is: don't capture it; if you must, mask it before it leaves the process; if you must keep it raw, keep it short and keep it locked. Let's start with the code.</a:t>
+              <a:t>[B-ROLL: D10 build 2, the same flow with shields: SDK `mask=`, the collector's attributes processor, retention, RBAC, "judge: send it mas...]</a:t>
+            </a:r>
+          </a:p>
+          <a:p/>
+          <a:p>
+            <a:r>
+              <a:t>One principle for the whole section. The safest data is the data you never collected. Every control downstream, retention, access, encryption, is a mitigation for a value that shouldn't have been there. So the order is: don't capture it; if you must, mask it before it leaves the process; if you must keep it raw, keep it short and keep it locked.</a:t>
             </a:r>
           </a:p>
         </p:txBody>
@@ -2165,7 +2265,91 @@
           <a:lstStyle/>
           <a:p>
             <a:r>
-              <a:t>Rules. Mask before export, never with a cleanup job, because a cleanup job runs after the leak. Hash what you need for joins, placeholder the rest. Luhn-check cards so you don't blind yourself. The collector is the net, not the plan. And one test in CI that fails on any raw value.</a:t>
+              <a:t>[SCREEN: VS Code, `telemetry/genai_attrs.py`: `_safe`, then `set_tool` calling it for `gen_ai.tool.call.arguments` and `gen_ai.tool.call....]</a:t>
+            </a:r>
+          </a:p>
+          <a:p/>
+          <a:p>
+            <a:r>
+              <a:t>Layer one is the one that does most of the work. Every helper that puts content on a span calls `_safe` first: mask, then clip to four thousand characters. Tool results are where most of the sensitive data arrives, and this is the line that catches it before the span exists. One deliberate gap: `user.id` goes on the span as-is, because the local store needs the real id for the user showback in 6.3. The collector hashes it on the way out. If you export straight to Langfuse without the collector, hash it yourself before it becomes an attribute.</a:t>
+            </a:r>
+          </a:p>
+          <a:p/>
+          <a:p>
+            <a:r>
+              <a:t>Layer two: the SDK.</a:t>
+            </a:r>
+          </a:p>
+          <a:p/>
+          <a:p>
+            <a:r>
+              <a:t>[CODE: `telemetry/langfuse_setup.py` (excerpt from `init_langfuse`)]</a:t>
+            </a:r>
+          </a:p>
+          <a:p/>
+          <a:p>
+            <a:r>
+              <a:t>One argument, `mask=langfuse_mask`, and every input, output and metadata value the Langfuse SDK records passes through it before export. That's the layer that protects the Langfuse-native `@observe` code from Section 4, which never calls `_safe`.</a:t>
+            </a:r>
+          </a:p>
+          <a:p/>
+          <a:p>
+            <a:r>
+              <a:t>Layer three: the collector.</a:t>
+            </a:r>
+          </a:p>
+          <a:p/>
+          <a:p>
+            <a:r>
+              <a:t>[SCREEN: `deploy/otel-collector.yaml`]</a:t>
+            </a:r>
+          </a:p>
+          <a:p/>
+          <a:p>
+            <a:r>
+              <a:t>[CODE: `deploy/otel-collector.yaml` (excerpt; verify processor options against the collector-contrib docs)]</a:t>
+            </a:r>
+          </a:p>
+          <a:p/>
+          <a:p>
+            <a:r>
+              <a:t>Four processors, in order: `memory_limiter`, `attributes/redact`, `tail_sampling`, `batch`. The redaction step deletes outright what a backend never needs: tool results, message bodies, the system instructions, and the Langfuse input and output copies. It hashes what you still want to group by: tool arguments, `user.id` and `enduser.id`.</a:t>
+            </a:r>
+          </a:p>
+          <a:p/>
+          <a:p>
+            <a:r>
+              <a:t>[SCREEN: zoom on the `delete` and `hash` actions]</a:t>
+            </a:r>
+          </a:p>
+          <a:p/>
+          <a:p>
+            <a:r>
+              <a:t>Now the test that makes this permanent.</a:t>
+            </a:r>
+          </a:p>
+          <a:p/>
+          <a:p>
+            <a:r>
+              <a:t>[SCREEN: `tests/integration/test_spans.py`, then terminal]</a:t>
+            </a:r>
+          </a:p>
+          <a:p/>
+          <a:p>
+            <a:r>
+              <a:t>[CODE: `tests/integration/test_spans.py::test_no_raw_pii_reaches_any_span`]</a:t>
+            </a:r>
+          </a:p>
+          <a:p/>
+          <a:p>
+            <a:r>
+              <a:t>Send a question containing all four kinds of PII through the real `/chat` endpoint with an in-memory exporter. Serialise every span's attributes. Assert none of the raw values is anywhere in the blob, and that the placeholders are. This test runs on every pull request. If anyone adds a tool that copies a record into a span without `_safe`, it goes red. That's the control that lasts after you've stopped paying attention.</a:t>
+            </a:r>
+          </a:p>
+          <a:p/>
+          <a:p>
+            <a:r>
+              <a:t>[DEMO: `34 passed`]</a:t>
             </a:r>
           </a:p>
         </p:txBody>
@@ -2235,7 +2419,7 @@
           <a:lstStyle/>
           <a:p>
             <a:r>
-              <a:t>Title card (K2). Retention, access and tenant separation.</a:t>
+              <a:t>Rules. Mask before export, never with a cleanup job, because a cleanup job runs after the leak. Delete what nobody needs, hash what you join on, placeholder the rest. Key your hashes for anything with a small value space. Luhn-check cards so you don't blind yourself. And one test in CI that fails on any raw value.</a:t>
             </a:r>
           </a:p>
         </p:txBody>
@@ -5540,42 +5724,8 @@
         </p:nvSpPr>
         <p:spPr>
           <a:xfrm>
-            <a:off x="2377440" y="2286000"/>
-            <a:ext cx="1097280" cy="1097280"/>
-          </a:xfrm>
-          <a:prstGeom prst="rect">
-            <a:avLst/>
-          </a:prstGeom>
-          <a:noFill/>
-        </p:spPr>
-        <p:txBody>
-          <a:bodyPr wrap="square" lIns="45720" rIns="45720" tIns="27432" bIns="27432" anchor="ctr">
-            <a:spAutoFit/>
-          </a:bodyPr>
-          <a:lstStyle/>
-          <a:p>
-            <a:r>
-              <a:rPr sz="5400" b="1">
-                <a:solidFill>
-                  <a:srgbClr val="00D4AA"/>
-                </a:solidFill>
-                <a:latin typeface="Inter"/>
-              </a:rPr>
-              <a:t>→</a:t>
-            </a:r>
-          </a:p>
-        </p:txBody>
-      </p:sp>
-      <p:sp>
-        <p:nvSpPr>
-          <p:cNvPr id="4" name="TextBox 3"/>
-          <p:cNvSpPr txBox="1"/>
-          <p:nvPr/>
-        </p:nvSpPr>
-        <p:spPr>
-          <a:xfrm>
-            <a:off x="3566160" y="2148840"/>
-            <a:ext cx="7315200" cy="457200"/>
+            <a:off x="457200" y="411480"/>
+            <a:ext cx="11247120" cy="868680"/>
           </a:xfrm>
           <a:prstGeom prst="rect">
             <a:avLst/>
@@ -5588,16 +5738,81 @@
           </a:bodyPr>
           <a:lstStyle/>
           <a:p>
-            <a:r>
-              <a:rPr sz="1400" b="0">
-                <a:solidFill>
-                  <a:srgbClr val="94A3B8"/>
-                </a:solidFill>
-                <a:latin typeface="Inter"/>
-              </a:rPr>
-              <a:t>Next up:</a:t>
-            </a:r>
-          </a:p>
+            <a:pPr>
+              <a:lnSpc>
+                <a:spcPct val="110000"/>
+              </a:lnSpc>
+            </a:pPr>
+            <a:r>
+              <a:rPr sz="2600" b="1">
+                <a:solidFill>
+                  <a:srgbClr val="FFFFFF"/>
+                </a:solidFill>
+                <a:latin typeface="Inter"/>
+              </a:rPr>
+              <a:t>Layer one: at the source (</a:t>
+            </a:r>
+            <a:r>
+              <a:rPr sz="2392" b="0">
+                <a:solidFill>
+                  <a:srgbClr val="00D4AA"/>
+                </a:solidFill>
+                <a:latin typeface="JetBrains Mono"/>
+              </a:rPr>
+              <a:t>telemetry/genai_attrs.py</a:t>
+            </a:r>
+            <a:r>
+              <a:rPr sz="2600" b="1">
+                <a:solidFill>
+                  <a:srgbClr val="FFFFFF"/>
+                </a:solidFill>
+                <a:latin typeface="Inter"/>
+              </a:rPr>
+              <a:t>)</a:t>
+            </a:r>
+          </a:p>
+        </p:txBody>
+      </p:sp>
+      <p:sp>
+        <p:nvSpPr>
+          <p:cNvPr id="4" name="Rectangle 3"/>
+          <p:cNvSpPr/>
+          <p:nvPr/>
+        </p:nvSpPr>
+        <p:spPr>
+          <a:xfrm>
+            <a:off x="502920" y="1024128"/>
+            <a:ext cx="822960" cy="54864"/>
+          </a:xfrm>
+          <a:prstGeom prst="rect">
+            <a:avLst/>
+          </a:prstGeom>
+          <a:solidFill>
+            <a:srgbClr val="00D4AA"/>
+          </a:solidFill>
+          <a:ln>
+            <a:noFill/>
+          </a:ln>
+          <a:effectLst/>
+        </p:spPr>
+        <p:style>
+          <a:lnRef idx="1">
+            <a:schemeClr val="accent1"/>
+          </a:lnRef>
+          <a:fillRef idx="3">
+            <a:schemeClr val="accent1"/>
+          </a:fillRef>
+          <a:effectRef idx="2">
+            <a:schemeClr val="accent1"/>
+          </a:effectRef>
+          <a:fontRef idx="minor">
+            <a:schemeClr val="lt1"/>
+          </a:fontRef>
+        </p:style>
+        <p:txBody>
+          <a:bodyPr rtlCol="0" anchor="ctr"/>
+          <a:lstStyle/>
+          <a:p/>
         </p:txBody>
       </p:sp>
       <p:sp>
@@ -5608,8 +5823,8 @@
         </p:nvSpPr>
         <p:spPr>
           <a:xfrm>
-            <a:off x="3566160" y="2560320"/>
-            <a:ext cx="7315200" cy="1097280"/>
+            <a:off x="640080" y="1417320"/>
+            <a:ext cx="10881360" cy="4892040"/>
           </a:xfrm>
           <a:prstGeom prst="rect">
             <a:avLst/>
@@ -5622,48 +5837,186 @@
           </a:bodyPr>
           <a:lstStyle/>
           <a:p>
-            <a:r>
-              <a:rPr sz="2600" b="1">
+            <a:pPr marL="292608" indent="-292608">
+              <a:lnSpc>
+                <a:spcPct val="120000"/>
+              </a:lnSpc>
+              <a:spcAft>
+                <a:spcPts val="1260"/>
+              </a:spcAft>
+              <a:buClr>
+                <a:srgbClr val="00D4AA"/>
+              </a:buClr>
+              <a:buFont typeface="Inter"/>
+              <a:buChar char="•"/>
+            </a:pPr>
+            <a:r>
+              <a:rPr sz="1800" b="0">
                 <a:solidFill>
                   <a:srgbClr val="FFFFFF"/>
                 </a:solidFill>
                 <a:latin typeface="Inter"/>
               </a:rPr>
-              <a:t>Retention, access and tenant separation</a:t>
-            </a:r>
-          </a:p>
-        </p:txBody>
-      </p:sp>
-      <p:sp>
-        <p:nvSpPr>
-          <p:cNvPr id="6" name="TextBox 5"/>
-          <p:cNvSpPr txBox="1"/>
-          <p:nvPr/>
-        </p:nvSpPr>
-        <p:spPr>
-          <a:xfrm>
-            <a:off x="3566160" y="3703320"/>
-            <a:ext cx="7315200" cy="1097280"/>
-          </a:xfrm>
-          <a:prstGeom prst="rect">
-            <a:avLst/>
-          </a:prstGeom>
-          <a:noFill/>
-        </p:spPr>
-        <p:txBody>
-          <a:bodyPr wrap="square" lIns="45720" rIns="45720" tIns="27432" bIns="27432" anchor="t">
-            <a:spAutoFit/>
-          </a:bodyPr>
-          <a:lstStyle/>
-          <a:p>
-            <a:r>
-              <a:rPr sz="1400" b="0">
-                <a:solidFill>
-                  <a:srgbClr val="94A3B8"/>
-                </a:solidFill>
-                <a:latin typeface="Inter"/>
-              </a:rPr>
-              <a:t>Masking limits what gets in.</a:t>
+              <a:t>Every content attribute goes through </a:t>
+            </a:r>
+            <a:r>
+              <a:rPr sz="1656" b="0">
+                <a:solidFill>
+                  <a:srgbClr val="00D4AA"/>
+                </a:solidFill>
+                <a:latin typeface="JetBrains Mono"/>
+              </a:rPr>
+              <a:t>_safe(value, redact=True)</a:t>
+            </a:r>
+            <a:r>
+              <a:rPr sz="1800" b="0">
+                <a:solidFill>
+                  <a:srgbClr val="FFFFFF"/>
+                </a:solidFill>
+                <a:latin typeface="Inter"/>
+              </a:rPr>
+              <a:t>: </a:t>
+            </a:r>
+            <a:r>
+              <a:rPr sz="1656" b="0">
+                <a:solidFill>
+                  <a:srgbClr val="00D4AA"/>
+                </a:solidFill>
+                <a:latin typeface="JetBrains Mono"/>
+              </a:rPr>
+              <a:t>mask_value(..., hash_ids=True)</a:t>
+            </a:r>
+            <a:r>
+              <a:rPr sz="1800" b="0">
+                <a:solidFill>
+                  <a:srgbClr val="FFFFFF"/>
+                </a:solidFill>
+                <a:latin typeface="Inter"/>
+              </a:rPr>
+              <a:t>, then clipped to 4,000 characters</a:t>
+            </a:r>
+          </a:p>
+          <a:p>
+            <a:pPr marL="292608" indent="-292608">
+              <a:lnSpc>
+                <a:spcPct val="120000"/>
+              </a:lnSpc>
+              <a:spcAft>
+                <a:spcPts val="1260"/>
+              </a:spcAft>
+              <a:buClr>
+                <a:srgbClr val="00D4AA"/>
+              </a:buClr>
+              <a:buFont typeface="Inter"/>
+              <a:buChar char="•"/>
+            </a:pPr>
+            <a:r>
+              <a:rPr sz="1800" b="0">
+                <a:solidFill>
+                  <a:srgbClr val="FFFFFF"/>
+                </a:solidFill>
+                <a:latin typeface="Inter"/>
+              </a:rPr>
+              <a:t>That covers message bodies, tool arguments and results, retrieval queries, and Langfuse input/output</a:t>
+            </a:r>
+          </a:p>
+          <a:p>
+            <a:pPr marL="292608" indent="-292608">
+              <a:lnSpc>
+                <a:spcPct val="120000"/>
+              </a:lnSpc>
+              <a:spcAft>
+                <a:spcPts val="1260"/>
+              </a:spcAft>
+              <a:buClr>
+                <a:srgbClr val="00D4AA"/>
+              </a:buClr>
+              <a:buFont typeface="Inter"/>
+              <a:buChar char="•"/>
+            </a:pPr>
+            <a:r>
+              <a:rPr sz="1800" b="0">
+                <a:solidFill>
+                  <a:srgbClr val="FFFFFF"/>
+                </a:solidFill>
+                <a:latin typeface="Inter"/>
+              </a:rPr>
+              <a:t>Masked before the span exists, so the local store and every exporter get the masked text</a:t>
+            </a:r>
+          </a:p>
+          <a:p>
+            <a:pPr marL="292608" indent="-292608">
+              <a:lnSpc>
+                <a:spcPct val="120000"/>
+              </a:lnSpc>
+              <a:spcAft>
+                <a:spcPts val="1260"/>
+              </a:spcAft>
+              <a:buClr>
+                <a:srgbClr val="00D4AA"/>
+              </a:buClr>
+              <a:buFont typeface="Inter"/>
+              <a:buChar char="•"/>
+            </a:pPr>
+            <a:r>
+              <a:rPr sz="1656" b="0">
+                <a:solidFill>
+                  <a:srgbClr val="00D4AA"/>
+                </a:solidFill>
+                <a:latin typeface="JetBrains Mono"/>
+              </a:rPr>
+              <a:t>user.id</a:t>
+            </a:r>
+            <a:r>
+              <a:rPr sz="1800" b="0">
+                <a:solidFill>
+                  <a:srgbClr val="FFFFFF"/>
+                </a:solidFill>
+                <a:latin typeface="Inter"/>
+              </a:rPr>
+              <a:t> is set as-is in-process: the local store needs it for the showback; the collector hashes it on export</a:t>
+            </a:r>
+          </a:p>
+          <a:p>
+            <a:pPr marL="292608" indent="-292608">
+              <a:lnSpc>
+                <a:spcPct val="120000"/>
+              </a:lnSpc>
+              <a:spcAft>
+                <a:spcPts val="1260"/>
+              </a:spcAft>
+              <a:buClr>
+                <a:srgbClr val="00D4AA"/>
+              </a:buClr>
+              <a:buFont typeface="Inter"/>
+              <a:buChar char="•"/>
+            </a:pPr>
+            <a:r>
+              <a:rPr sz="1800" b="0">
+                <a:solidFill>
+                  <a:srgbClr val="FFFFFF"/>
+                </a:solidFill>
+                <a:latin typeface="Inter"/>
+              </a:rPr>
+              <a:t>Exporting straight to Langfuse, without the collector? Hash </a:t>
+            </a:r>
+            <a:r>
+              <a:rPr sz="1656" b="0">
+                <a:solidFill>
+                  <a:srgbClr val="00D4AA"/>
+                </a:solidFill>
+                <a:latin typeface="JetBrains Mono"/>
+              </a:rPr>
+              <a:t>user.id</a:t>
+            </a:r>
+            <a:r>
+              <a:rPr sz="1800" b="0">
+                <a:solidFill>
+                  <a:srgbClr val="FFFFFF"/>
+                </a:solidFill>
+                <a:latin typeface="Inter"/>
+              </a:rPr>
+              <a:t> yourself first</a:t>
             </a:r>
           </a:p>
         </p:txBody>
@@ -5723,7 +6076,7 @@
                 </a:solidFill>
                 <a:latin typeface="Inter"/>
               </a:rPr>
-              <a:t>AI Agent Observability &amp; Cost Control · Section 10 · Lecture 10.3</a:t>
+              <a:t>AI Agent Observability &amp; Cost Control · Section 10 · Lecture 10.2</a:t>
             </a:r>
           </a:p>
         </p:txBody>
@@ -5736,77 +6089,8 @@
         </p:nvSpPr>
         <p:spPr>
           <a:xfrm>
-            <a:off x="6675120" y="320040"/>
-            <a:ext cx="5074920" cy="548640"/>
-          </a:xfrm>
-          <a:prstGeom prst="rect">
-            <a:avLst/>
-          </a:prstGeom>
-          <a:noFill/>
-        </p:spPr>
-        <p:txBody>
-          <a:bodyPr wrap="square" lIns="45720" rIns="45720" tIns="27432" bIns="27432" anchor="t">
-            <a:spAutoFit/>
-          </a:bodyPr>
-          <a:lstStyle/>
-          <a:p>
-            <a:pPr algn="r"/>
-            <a:r>
-              <a:rPr sz="1000" b="0">
-                <a:solidFill>
-                  <a:srgbClr val="94A3B8"/>
-                </a:solidFill>
-                <a:latin typeface="Inter"/>
-              </a:rPr>
-              <a:t>SECTION 10 · PRIVACY, SECURITY AND GOVERNANCE OF TELEMETRY</a:t>
-            </a:r>
-          </a:p>
-        </p:txBody>
-      </p:sp>
-      <p:sp>
-        <p:nvSpPr>
-          <p:cNvPr id="4" name="TextBox 3"/>
-          <p:cNvSpPr txBox="1"/>
-          <p:nvPr/>
-        </p:nvSpPr>
-        <p:spPr>
-          <a:xfrm>
-            <a:off x="914400" y="1417320"/>
-            <a:ext cx="10332720" cy="457200"/>
-          </a:xfrm>
-          <a:prstGeom prst="rect">
-            <a:avLst/>
-          </a:prstGeom>
-          <a:noFill/>
-        </p:spPr>
-        <p:txBody>
-          <a:bodyPr wrap="square" lIns="45720" rIns="45720" tIns="27432" bIns="27432" anchor="t">
-            <a:spAutoFit/>
-          </a:bodyPr>
-          <a:lstStyle/>
-          <a:p>
-            <a:r>
-              <a:rPr sz="1200" b="1">
-                <a:solidFill>
-                  <a:srgbClr val="00D4AA"/>
-                </a:solidFill>
-                <a:latin typeface="Inter"/>
-              </a:rPr>
-              <a:t>LECTURE 10.3</a:t>
-            </a:r>
-          </a:p>
-        </p:txBody>
-      </p:sp>
-      <p:sp>
-        <p:nvSpPr>
-          <p:cNvPr id="5" name="TextBox 4"/>
-          <p:cNvSpPr txBox="1"/>
-          <p:nvPr/>
-        </p:nvSpPr>
-        <p:spPr>
-          <a:xfrm>
-            <a:off x="914400" y="1874519"/>
-            <a:ext cx="10332720" cy="1645920"/>
+            <a:off x="457200" y="411480"/>
+            <a:ext cx="11247120" cy="868680"/>
           </a:xfrm>
           <a:prstGeom prst="rect">
             <a:avLst/>
@@ -5825,27 +6109,27 @@
               </a:lnSpc>
             </a:pPr>
             <a:r>
-              <a:rPr sz="3000" b="1">
+              <a:rPr sz="2600" b="1">
                 <a:solidFill>
                   <a:srgbClr val="FFFFFF"/>
                 </a:solidFill>
                 <a:latin typeface="Inter"/>
               </a:rPr>
-              <a:t>Retention, access and tenant separation</a:t>
-            </a:r>
-          </a:p>
-        </p:txBody>
-      </p:sp>
-      <p:sp>
-        <p:nvSpPr>
-          <p:cNvPr id="6" name="Rectangle 5"/>
+              <a:t>Masking rules</a:t>
+            </a:r>
+          </a:p>
+        </p:txBody>
+      </p:sp>
+      <p:sp>
+        <p:nvSpPr>
+          <p:cNvPr id="4" name="Rectangle 3"/>
           <p:cNvSpPr/>
           <p:nvPr/>
         </p:nvSpPr>
         <p:spPr>
           <a:xfrm>
-            <a:off x="914400" y="3794760"/>
-            <a:ext cx="64008" cy="1143000"/>
+            <a:off x="502920" y="1024128"/>
+            <a:ext cx="822960" cy="54864"/>
           </a:xfrm>
           <a:prstGeom prst="rect">
             <a:avLst/>
@@ -5880,14 +6164,14 @@
       </p:sp>
       <p:sp>
         <p:nvSpPr>
-          <p:cNvPr id="7" name="TextBox 6"/>
+          <p:cNvPr id="5" name="TextBox 4"/>
           <p:cNvSpPr txBox="1"/>
           <p:nvPr/>
         </p:nvSpPr>
         <p:spPr>
           <a:xfrm>
-            <a:off x="1188720" y="3749039"/>
-            <a:ext cx="9692640" cy="1280160"/>
+            <a:off x="457200" y="1325880"/>
+            <a:ext cx="4343400" cy="4983480"/>
           </a:xfrm>
           <a:prstGeom prst="rect">
             <a:avLst/>
@@ -5895,28 +6179,161 @@
           <a:noFill/>
         </p:spPr>
         <p:txBody>
-          <a:bodyPr wrap="square" lIns="45720" rIns="45720" tIns="27432" bIns="27432" anchor="ctr">
+          <a:bodyPr wrap="square" lIns="45720" rIns="45720" tIns="27432" bIns="27432" anchor="t">
             <a:spAutoFit/>
           </a:bodyPr>
           <a:lstStyle/>
           <a:p>
-            <a:pPr>
+            <a:pPr marL="292608" indent="-292608">
               <a:lnSpc>
-                <a:spcPct val="130000"/>
+                <a:spcPct val="120000"/>
               </a:lnSpc>
+              <a:spcAft>
+                <a:spcPts val="1120"/>
+              </a:spcAft>
+              <a:buClr>
+                <a:srgbClr val="00D4AA"/>
+              </a:buClr>
+              <a:buFont typeface="Inter"/>
+              <a:buChar char="•"/>
             </a:pPr>
             <a:r>
               <a:rPr sz="1600" b="0">
                 <a:solidFill>
-                  <a:srgbClr val="CBD5E1"/>
-                </a:solidFill>
-                <a:latin typeface="Inter"/>
-              </a:rPr>
-              <a:t>Set a retention window per data class, one project per environment with roles, and decide tenant tags versus separate projects by who…</a:t>
-            </a:r>
-          </a:p>
-        </p:txBody>
-      </p:sp>
+                  <a:srgbClr val="FFFFFF"/>
+                </a:solidFill>
+                <a:latin typeface="Inter"/>
+              </a:rPr>
+              <a:t>Mask before export, never after: at the source and in the SDK, not a cleanup job</a:t>
+            </a:r>
+          </a:p>
+          <a:p>
+            <a:pPr marL="292608" indent="-292608">
+              <a:lnSpc>
+                <a:spcPct val="120000"/>
+              </a:lnSpc>
+              <a:spcAft>
+                <a:spcPts val="1120"/>
+              </a:spcAft>
+              <a:buClr>
+                <a:srgbClr val="00D4AA"/>
+              </a:buClr>
+              <a:buFont typeface="Inter"/>
+              <a:buChar char="•"/>
+            </a:pPr>
+            <a:r>
+              <a:rPr sz="1600" b="0">
+                <a:solidFill>
+                  <a:srgbClr val="FFFFFF"/>
+                </a:solidFill>
+                <a:latin typeface="Inter"/>
+              </a:rPr>
+              <a:t>Delete what nobody needs; hash what you join on; placeholder the rest</a:t>
+            </a:r>
+          </a:p>
+          <a:p>
+            <a:pPr marL="292608" indent="-292608">
+              <a:lnSpc>
+                <a:spcPct val="120000"/>
+              </a:lnSpc>
+              <a:spcAft>
+                <a:spcPts val="1120"/>
+              </a:spcAft>
+              <a:buClr>
+                <a:srgbClr val="00D4AA"/>
+              </a:buClr>
+              <a:buFont typeface="Inter"/>
+              <a:buChar char="•"/>
+            </a:pPr>
+            <a:r>
+              <a:rPr sz="1600" b="0">
+                <a:solidFill>
+                  <a:srgbClr val="FFFFFF"/>
+                </a:solidFill>
+                <a:latin typeface="Inter"/>
+              </a:rPr>
+              <a:t>Low-entropy ids need a keyed HMAC, not a salted hash</a:t>
+            </a:r>
+          </a:p>
+          <a:p>
+            <a:pPr marL="292608" indent="-292608">
+              <a:lnSpc>
+                <a:spcPct val="120000"/>
+              </a:lnSpc>
+              <a:spcAft>
+                <a:spcPts val="1120"/>
+              </a:spcAft>
+              <a:buClr>
+                <a:srgbClr val="00D4AA"/>
+              </a:buClr>
+              <a:buFont typeface="Inter"/>
+              <a:buChar char="•"/>
+            </a:pPr>
+            <a:r>
+              <a:rPr sz="1600" b="0">
+                <a:solidFill>
+                  <a:srgbClr val="FFFFFF"/>
+                </a:solidFill>
+                <a:latin typeface="Inter"/>
+              </a:rPr>
+              <a:t>Luhn-check card candidates; protect ticket and shipment ids</a:t>
+            </a:r>
+          </a:p>
+          <a:p>
+            <a:pPr marL="292608" indent="-292608">
+              <a:lnSpc>
+                <a:spcPct val="120000"/>
+              </a:lnSpc>
+              <a:spcAft>
+                <a:spcPts val="1120"/>
+              </a:spcAft>
+              <a:buClr>
+                <a:srgbClr val="00D4AA"/>
+              </a:buClr>
+              <a:buFont typeface="Inter"/>
+              <a:buChar char="•"/>
+            </a:pPr>
+            <a:r>
+              <a:rPr sz="1600" b="0">
+                <a:solidFill>
+                  <a:srgbClr val="FFFFFF"/>
+                </a:solidFill>
+                <a:latin typeface="Inter"/>
+              </a:rPr>
+              <a:t>One test, in CI, that fails on any raw value</a:t>
+            </a:r>
+          </a:p>
+        </p:txBody>
+      </p:sp>
+      <p:pic>
+        <p:nvPicPr>
+          <p:cNvPr id="6" name="Picture 5" descr="D10-telemetry-threat-model-notitle.png"/>
+          <p:cNvPicPr>
+            <a:picLocks noChangeAspect="1"/>
+          </p:cNvPicPr>
+          <p:nvPr/>
+        </p:nvPicPr>
+        <p:blipFill>
+          <a:blip r:embed="rId3"/>
+          <a:stretch>
+            <a:fillRect/>
+          </a:stretch>
+        </p:blipFill>
+        <p:spPr>
+          <a:xfrm>
+            <a:off x="4983480" y="2231707"/>
+            <a:ext cx="6766560" cy="3171825"/>
+          </a:xfrm>
+          <a:prstGeom prst="rect">
+            <a:avLst/>
+          </a:prstGeom>
+          <a:ln>
+            <a:solidFill>
+              <a:srgbClr val="1A2742"/>
+            </a:solidFill>
+          </a:ln>
+        </p:spPr>
+      </p:pic>
     </p:spTree>
   </p:cSld>
   <p:clrMapOvr>
@@ -5926,6 +6343,917 @@
 </file>
 
 <file path=ppt/slides/slide12.xml><?xml version="1.0" encoding="utf-8"?>
+<p:sld xmlns:a="http://schemas.openxmlformats.org/drawingml/2006/main" xmlns:p="http://schemas.openxmlformats.org/presentationml/2006/main" xmlns:r="http://schemas.openxmlformats.org/officeDocument/2006/relationships">
+  <p:cSld>
+    <p:bg>
+      <p:bgPr>
+        <a:solidFill>
+          <a:srgbClr val="0A1628"/>
+        </a:solidFill>
+        <a:effectLst/>
+      </p:bgPr>
+    </p:bg>
+    <p:spTree>
+      <p:nvGrpSpPr>
+        <p:cNvPr id="1" name=""/>
+        <p:cNvGrpSpPr/>
+        <p:nvPr/>
+      </p:nvGrpSpPr>
+      <p:grpSpPr/>
+      <p:sp>
+        <p:nvSpPr>
+          <p:cNvPr id="2" name="TextBox 1"/>
+          <p:cNvSpPr txBox="1"/>
+          <p:nvPr/>
+        </p:nvSpPr>
+        <p:spPr>
+          <a:xfrm>
+            <a:off x="457200" y="6419088"/>
+            <a:ext cx="8686800" cy="320040"/>
+          </a:xfrm>
+          <a:prstGeom prst="rect">
+            <a:avLst/>
+          </a:prstGeom>
+          <a:noFill/>
+        </p:spPr>
+        <p:txBody>
+          <a:bodyPr wrap="square" lIns="45720" rIns="45720" tIns="27432" bIns="27432" anchor="t">
+            <a:spAutoFit/>
+          </a:bodyPr>
+          <a:lstStyle/>
+          <a:p>
+            <a:r>
+              <a:rPr sz="900" b="0">
+                <a:solidFill>
+                  <a:srgbClr val="64748B"/>
+                </a:solidFill>
+                <a:latin typeface="Inter"/>
+              </a:rPr>
+              <a:t>AI Agent Observability &amp; Cost Control · Section 10 · Lecture 10.2</a:t>
+            </a:r>
+          </a:p>
+        </p:txBody>
+      </p:sp>
+      <p:sp>
+        <p:nvSpPr>
+          <p:cNvPr id="3" name="TextBox 2"/>
+          <p:cNvSpPr txBox="1"/>
+          <p:nvPr/>
+        </p:nvSpPr>
+        <p:spPr>
+          <a:xfrm>
+            <a:off x="1371600" y="822960"/>
+            <a:ext cx="9418320" cy="457200"/>
+          </a:xfrm>
+          <a:prstGeom prst="rect">
+            <a:avLst/>
+          </a:prstGeom>
+          <a:noFill/>
+        </p:spPr>
+        <p:txBody>
+          <a:bodyPr wrap="square" lIns="45720" rIns="45720" tIns="27432" bIns="27432" anchor="t">
+            <a:spAutoFit/>
+          </a:bodyPr>
+          <a:lstStyle/>
+          <a:p>
+            <a:pPr algn="ctr"/>
+            <a:r>
+              <a:rPr sz="1200" b="1">
+                <a:solidFill>
+                  <a:srgbClr val="00D4AA"/>
+                </a:solidFill>
+                <a:latin typeface="Inter"/>
+              </a:rPr>
+              <a:t>RECAP</a:t>
+            </a:r>
+          </a:p>
+        </p:txBody>
+      </p:sp>
+      <p:sp>
+        <p:nvSpPr>
+          <p:cNvPr id="4" name="TextBox 3"/>
+          <p:cNvSpPr txBox="1"/>
+          <p:nvPr/>
+        </p:nvSpPr>
+        <p:spPr>
+          <a:xfrm>
+            <a:off x="1371600" y="1234440"/>
+            <a:ext cx="9418320" cy="822960"/>
+          </a:xfrm>
+          <a:prstGeom prst="rect">
+            <a:avLst/>
+          </a:prstGeom>
+          <a:noFill/>
+        </p:spPr>
+        <p:txBody>
+          <a:bodyPr wrap="square" lIns="45720" rIns="45720" tIns="27432" bIns="27432" anchor="t">
+            <a:spAutoFit/>
+          </a:bodyPr>
+          <a:lstStyle/>
+          <a:p>
+            <a:pPr algn="ctr"/>
+            <a:r>
+              <a:rPr sz="2600" b="1">
+                <a:solidFill>
+                  <a:srgbClr val="FFFFFF"/>
+                </a:solidFill>
+                <a:latin typeface="Inter"/>
+              </a:rPr>
+              <a:t>Key takeaways</a:t>
+            </a:r>
+          </a:p>
+        </p:txBody>
+      </p:sp>
+      <p:sp>
+        <p:nvSpPr>
+          <p:cNvPr id="5" name="Rounded Rectangle 4"/>
+          <p:cNvSpPr/>
+          <p:nvPr/>
+        </p:nvSpPr>
+        <p:spPr>
+          <a:xfrm>
+            <a:off x="2011680" y="2514600"/>
+            <a:ext cx="8138160" cy="777240"/>
+          </a:xfrm>
+          <a:prstGeom prst="roundRect">
+            <a:avLst>
+              <a:gd name="adj" fmla="val 6588"/>
+            </a:avLst>
+          </a:prstGeom>
+          <a:solidFill>
+            <a:srgbClr val="1A2742"/>
+          </a:solidFill>
+          <a:ln>
+            <a:noFill/>
+          </a:ln>
+          <a:effectLst/>
+        </p:spPr>
+        <p:style>
+          <a:lnRef idx="1">
+            <a:schemeClr val="accent1"/>
+          </a:lnRef>
+          <a:fillRef idx="3">
+            <a:schemeClr val="accent1"/>
+          </a:fillRef>
+          <a:effectRef idx="2">
+            <a:schemeClr val="accent1"/>
+          </a:effectRef>
+          <a:fontRef idx="minor">
+            <a:schemeClr val="lt1"/>
+          </a:fontRef>
+        </p:style>
+        <p:txBody>
+          <a:bodyPr rtlCol="0" anchor="ctr"/>
+          <a:lstStyle/>
+          <a:p/>
+        </p:txBody>
+      </p:sp>
+      <p:sp>
+        <p:nvSpPr>
+          <p:cNvPr id="6" name="TextBox 5"/>
+          <p:cNvSpPr txBox="1"/>
+          <p:nvPr/>
+        </p:nvSpPr>
+        <p:spPr>
+          <a:xfrm>
+            <a:off x="2194560" y="2514600"/>
+            <a:ext cx="548640" cy="777240"/>
+          </a:xfrm>
+          <a:prstGeom prst="rect">
+            <a:avLst/>
+          </a:prstGeom>
+          <a:noFill/>
+        </p:spPr>
+        <p:txBody>
+          <a:bodyPr wrap="square" lIns="45720" rIns="45720" tIns="27432" bIns="27432" anchor="ctr">
+            <a:spAutoFit/>
+          </a:bodyPr>
+          <a:lstStyle/>
+          <a:p>
+            <a:r>
+              <a:rPr sz="2200" b="1">
+                <a:solidFill>
+                  <a:srgbClr val="00D4AA"/>
+                </a:solidFill>
+                <a:latin typeface="Inter"/>
+              </a:rPr>
+              <a:t>✓</a:t>
+            </a:r>
+          </a:p>
+        </p:txBody>
+      </p:sp>
+      <p:sp>
+        <p:nvSpPr>
+          <p:cNvPr id="7" name="TextBox 6"/>
+          <p:cNvSpPr txBox="1"/>
+          <p:nvPr/>
+        </p:nvSpPr>
+        <p:spPr>
+          <a:xfrm>
+            <a:off x="2788920" y="2514600"/>
+            <a:ext cx="7223760" cy="777240"/>
+          </a:xfrm>
+          <a:prstGeom prst="rect">
+            <a:avLst/>
+          </a:prstGeom>
+          <a:noFill/>
+        </p:spPr>
+        <p:txBody>
+          <a:bodyPr wrap="square" lIns="45720" rIns="45720" tIns="27432" bIns="27432" anchor="ctr">
+            <a:spAutoFit/>
+          </a:bodyPr>
+          <a:lstStyle/>
+          <a:p>
+            <a:r>
+              <a:rPr sz="1800" b="1">
+                <a:solidFill>
+                  <a:srgbClr val="FFFFFF"/>
+                </a:solidFill>
+                <a:latin typeface="Inter"/>
+              </a:rPr>
+              <a:t>Three layers: source, SDK, collector</a:t>
+            </a:r>
+          </a:p>
+        </p:txBody>
+      </p:sp>
+      <p:sp>
+        <p:nvSpPr>
+          <p:cNvPr id="8" name="Rounded Rectangle 7"/>
+          <p:cNvSpPr/>
+          <p:nvPr/>
+        </p:nvSpPr>
+        <p:spPr>
+          <a:xfrm>
+            <a:off x="2011680" y="3474720"/>
+            <a:ext cx="8138160" cy="777240"/>
+          </a:xfrm>
+          <a:prstGeom prst="roundRect">
+            <a:avLst>
+              <a:gd name="adj" fmla="val 6588"/>
+            </a:avLst>
+          </a:prstGeom>
+          <a:solidFill>
+            <a:srgbClr val="1A2742"/>
+          </a:solidFill>
+          <a:ln>
+            <a:noFill/>
+          </a:ln>
+          <a:effectLst/>
+        </p:spPr>
+        <p:style>
+          <a:lnRef idx="1">
+            <a:schemeClr val="accent1"/>
+          </a:lnRef>
+          <a:fillRef idx="3">
+            <a:schemeClr val="accent1"/>
+          </a:fillRef>
+          <a:effectRef idx="2">
+            <a:schemeClr val="accent1"/>
+          </a:effectRef>
+          <a:fontRef idx="minor">
+            <a:schemeClr val="lt1"/>
+          </a:fontRef>
+        </p:style>
+        <p:txBody>
+          <a:bodyPr rtlCol="0" anchor="ctr"/>
+          <a:lstStyle/>
+          <a:p/>
+        </p:txBody>
+      </p:sp>
+      <p:sp>
+        <p:nvSpPr>
+          <p:cNvPr id="9" name="TextBox 8"/>
+          <p:cNvSpPr txBox="1"/>
+          <p:nvPr/>
+        </p:nvSpPr>
+        <p:spPr>
+          <a:xfrm>
+            <a:off x="2194560" y="3474720"/>
+            <a:ext cx="548640" cy="777240"/>
+          </a:xfrm>
+          <a:prstGeom prst="rect">
+            <a:avLst/>
+          </a:prstGeom>
+          <a:noFill/>
+        </p:spPr>
+        <p:txBody>
+          <a:bodyPr wrap="square" lIns="45720" rIns="45720" tIns="27432" bIns="27432" anchor="ctr">
+            <a:spAutoFit/>
+          </a:bodyPr>
+          <a:lstStyle/>
+          <a:p>
+            <a:r>
+              <a:rPr sz="2200" b="1">
+                <a:solidFill>
+                  <a:srgbClr val="00D4AA"/>
+                </a:solidFill>
+                <a:latin typeface="Inter"/>
+              </a:rPr>
+              <a:t>✓</a:t>
+            </a:r>
+          </a:p>
+        </p:txBody>
+      </p:sp>
+      <p:sp>
+        <p:nvSpPr>
+          <p:cNvPr id="10" name="TextBox 9"/>
+          <p:cNvSpPr txBox="1"/>
+          <p:nvPr/>
+        </p:nvSpPr>
+        <p:spPr>
+          <a:xfrm>
+            <a:off x="2788920" y="3474720"/>
+            <a:ext cx="7223760" cy="777240"/>
+          </a:xfrm>
+          <a:prstGeom prst="rect">
+            <a:avLst/>
+          </a:prstGeom>
+          <a:noFill/>
+        </p:spPr>
+        <p:txBody>
+          <a:bodyPr wrap="square" lIns="45720" rIns="45720" tIns="27432" bIns="27432" anchor="ctr">
+            <a:spAutoFit/>
+          </a:bodyPr>
+          <a:lstStyle/>
+          <a:p>
+            <a:r>
+              <a:rPr sz="1800" b="1">
+                <a:solidFill>
+                  <a:srgbClr val="FFFFFF"/>
+                </a:solidFill>
+                <a:latin typeface="Inter"/>
+              </a:rPr>
+              <a:t>Delete, hash or placeholder each field</a:t>
+            </a:r>
+          </a:p>
+        </p:txBody>
+      </p:sp>
+      <p:sp>
+        <p:nvSpPr>
+          <p:cNvPr id="11" name="Rounded Rectangle 10"/>
+          <p:cNvSpPr/>
+          <p:nvPr/>
+        </p:nvSpPr>
+        <p:spPr>
+          <a:xfrm>
+            <a:off x="2011680" y="4434840"/>
+            <a:ext cx="8138160" cy="777240"/>
+          </a:xfrm>
+          <a:prstGeom prst="roundRect">
+            <a:avLst>
+              <a:gd name="adj" fmla="val 6588"/>
+            </a:avLst>
+          </a:prstGeom>
+          <a:solidFill>
+            <a:srgbClr val="1A2742"/>
+          </a:solidFill>
+          <a:ln>
+            <a:noFill/>
+          </a:ln>
+          <a:effectLst/>
+        </p:spPr>
+        <p:style>
+          <a:lnRef idx="1">
+            <a:schemeClr val="accent1"/>
+          </a:lnRef>
+          <a:fillRef idx="3">
+            <a:schemeClr val="accent1"/>
+          </a:fillRef>
+          <a:effectRef idx="2">
+            <a:schemeClr val="accent1"/>
+          </a:effectRef>
+          <a:fontRef idx="minor">
+            <a:schemeClr val="lt1"/>
+          </a:fontRef>
+        </p:style>
+        <p:txBody>
+          <a:bodyPr rtlCol="0" anchor="ctr"/>
+          <a:lstStyle/>
+          <a:p/>
+        </p:txBody>
+      </p:sp>
+      <p:sp>
+        <p:nvSpPr>
+          <p:cNvPr id="12" name="TextBox 11"/>
+          <p:cNvSpPr txBox="1"/>
+          <p:nvPr/>
+        </p:nvSpPr>
+        <p:spPr>
+          <a:xfrm>
+            <a:off x="2194560" y="4434840"/>
+            <a:ext cx="548640" cy="777240"/>
+          </a:xfrm>
+          <a:prstGeom prst="rect">
+            <a:avLst/>
+          </a:prstGeom>
+          <a:noFill/>
+        </p:spPr>
+        <p:txBody>
+          <a:bodyPr wrap="square" lIns="45720" rIns="45720" tIns="27432" bIns="27432" anchor="ctr">
+            <a:spAutoFit/>
+          </a:bodyPr>
+          <a:lstStyle/>
+          <a:p>
+            <a:r>
+              <a:rPr sz="2200" b="1">
+                <a:solidFill>
+                  <a:srgbClr val="00D4AA"/>
+                </a:solidFill>
+                <a:latin typeface="Inter"/>
+              </a:rPr>
+              <a:t>✓</a:t>
+            </a:r>
+          </a:p>
+        </p:txBody>
+      </p:sp>
+      <p:sp>
+        <p:nvSpPr>
+          <p:cNvPr id="13" name="TextBox 12"/>
+          <p:cNvSpPr txBox="1"/>
+          <p:nvPr/>
+        </p:nvSpPr>
+        <p:spPr>
+          <a:xfrm>
+            <a:off x="2788920" y="4434840"/>
+            <a:ext cx="7223760" cy="777240"/>
+          </a:xfrm>
+          <a:prstGeom prst="rect">
+            <a:avLst/>
+          </a:prstGeom>
+          <a:noFill/>
+        </p:spPr>
+        <p:txBody>
+          <a:bodyPr wrap="square" lIns="45720" rIns="45720" tIns="27432" bIns="27432" anchor="ctr">
+            <a:spAutoFit/>
+          </a:bodyPr>
+          <a:lstStyle/>
+          <a:p>
+            <a:r>
+              <a:rPr sz="1800" b="1">
+                <a:solidFill>
+                  <a:srgbClr val="FFFFFF"/>
+                </a:solidFill>
+                <a:latin typeface="Inter"/>
+              </a:rPr>
+              <a:t>A CI test fails on any raw value</a:t>
+            </a:r>
+          </a:p>
+        </p:txBody>
+      </p:sp>
+    </p:spTree>
+  </p:cSld>
+  <p:clrMapOvr>
+    <a:masterClrMapping/>
+  </p:clrMapOvr>
+</p:sld>
+</file>
+
+<file path=ppt/slides/slide13.xml><?xml version="1.0" encoding="utf-8"?>
+<p:sld xmlns:a="http://schemas.openxmlformats.org/drawingml/2006/main" xmlns:p="http://schemas.openxmlformats.org/presentationml/2006/main" xmlns:r="http://schemas.openxmlformats.org/officeDocument/2006/relationships">
+  <p:cSld>
+    <p:bg>
+      <p:bgPr>
+        <a:solidFill>
+          <a:srgbClr val="0A1628"/>
+        </a:solidFill>
+        <a:effectLst/>
+      </p:bgPr>
+    </p:bg>
+    <p:spTree>
+      <p:nvGrpSpPr>
+        <p:cNvPr id="1" name=""/>
+        <p:cNvGrpSpPr/>
+        <p:nvPr/>
+      </p:nvGrpSpPr>
+      <p:grpSpPr/>
+      <p:sp>
+        <p:nvSpPr>
+          <p:cNvPr id="2" name="TextBox 1"/>
+          <p:cNvSpPr txBox="1"/>
+          <p:nvPr/>
+        </p:nvSpPr>
+        <p:spPr>
+          <a:xfrm>
+            <a:off x="457200" y="6419088"/>
+            <a:ext cx="8686800" cy="320040"/>
+          </a:xfrm>
+          <a:prstGeom prst="rect">
+            <a:avLst/>
+          </a:prstGeom>
+          <a:noFill/>
+        </p:spPr>
+        <p:txBody>
+          <a:bodyPr wrap="square" lIns="45720" rIns="45720" tIns="27432" bIns="27432" anchor="t">
+            <a:spAutoFit/>
+          </a:bodyPr>
+          <a:lstStyle/>
+          <a:p>
+            <a:r>
+              <a:rPr sz="900" b="0">
+                <a:solidFill>
+                  <a:srgbClr val="64748B"/>
+                </a:solidFill>
+                <a:latin typeface="Inter"/>
+              </a:rPr>
+              <a:t>AI Agent Observability &amp; Cost Control · Section 10 · Lecture 10.2</a:t>
+            </a:r>
+          </a:p>
+        </p:txBody>
+      </p:sp>
+      <p:sp>
+        <p:nvSpPr>
+          <p:cNvPr id="3" name="TextBox 2"/>
+          <p:cNvSpPr txBox="1"/>
+          <p:nvPr/>
+        </p:nvSpPr>
+        <p:spPr>
+          <a:xfrm>
+            <a:off x="2377440" y="2286000"/>
+            <a:ext cx="1097280" cy="1097280"/>
+          </a:xfrm>
+          <a:prstGeom prst="rect">
+            <a:avLst/>
+          </a:prstGeom>
+          <a:noFill/>
+        </p:spPr>
+        <p:txBody>
+          <a:bodyPr wrap="square" lIns="45720" rIns="45720" tIns="27432" bIns="27432" anchor="ctr">
+            <a:spAutoFit/>
+          </a:bodyPr>
+          <a:lstStyle/>
+          <a:p>
+            <a:r>
+              <a:rPr sz="5400" b="1">
+                <a:solidFill>
+                  <a:srgbClr val="00D4AA"/>
+                </a:solidFill>
+                <a:latin typeface="Inter"/>
+              </a:rPr>
+              <a:t>→</a:t>
+            </a:r>
+          </a:p>
+        </p:txBody>
+      </p:sp>
+      <p:sp>
+        <p:nvSpPr>
+          <p:cNvPr id="4" name="TextBox 3"/>
+          <p:cNvSpPr txBox="1"/>
+          <p:nvPr/>
+        </p:nvSpPr>
+        <p:spPr>
+          <a:xfrm>
+            <a:off x="3566160" y="2148840"/>
+            <a:ext cx="7315200" cy="457200"/>
+          </a:xfrm>
+          <a:prstGeom prst="rect">
+            <a:avLst/>
+          </a:prstGeom>
+          <a:noFill/>
+        </p:spPr>
+        <p:txBody>
+          <a:bodyPr wrap="square" lIns="45720" rIns="45720" tIns="27432" bIns="27432" anchor="t">
+            <a:spAutoFit/>
+          </a:bodyPr>
+          <a:lstStyle/>
+          <a:p>
+            <a:r>
+              <a:rPr sz="1400" b="0">
+                <a:solidFill>
+                  <a:srgbClr val="94A3B8"/>
+                </a:solidFill>
+                <a:latin typeface="Inter"/>
+              </a:rPr>
+              <a:t>Next up:</a:t>
+            </a:r>
+          </a:p>
+        </p:txBody>
+      </p:sp>
+      <p:sp>
+        <p:nvSpPr>
+          <p:cNvPr id="5" name="TextBox 4"/>
+          <p:cNvSpPr txBox="1"/>
+          <p:nvPr/>
+        </p:nvSpPr>
+        <p:spPr>
+          <a:xfrm>
+            <a:off x="3566160" y="2560320"/>
+            <a:ext cx="7315200" cy="1097280"/>
+          </a:xfrm>
+          <a:prstGeom prst="rect">
+            <a:avLst/>
+          </a:prstGeom>
+          <a:noFill/>
+        </p:spPr>
+        <p:txBody>
+          <a:bodyPr wrap="square" lIns="45720" rIns="45720" tIns="27432" bIns="27432" anchor="t">
+            <a:spAutoFit/>
+          </a:bodyPr>
+          <a:lstStyle/>
+          <a:p>
+            <a:r>
+              <a:rPr sz="2600" b="1">
+                <a:solidFill>
+                  <a:srgbClr val="FFFFFF"/>
+                </a:solidFill>
+                <a:latin typeface="Inter"/>
+              </a:rPr>
+              <a:t>Retention, access and tenant separation</a:t>
+            </a:r>
+          </a:p>
+        </p:txBody>
+      </p:sp>
+      <p:sp>
+        <p:nvSpPr>
+          <p:cNvPr id="6" name="TextBox 5"/>
+          <p:cNvSpPr txBox="1"/>
+          <p:nvPr/>
+        </p:nvSpPr>
+        <p:spPr>
+          <a:xfrm>
+            <a:off x="3566160" y="3703320"/>
+            <a:ext cx="7315200" cy="1097280"/>
+          </a:xfrm>
+          <a:prstGeom prst="rect">
+            <a:avLst/>
+          </a:prstGeom>
+          <a:noFill/>
+        </p:spPr>
+        <p:txBody>
+          <a:bodyPr wrap="square" lIns="45720" rIns="45720" tIns="27432" bIns="27432" anchor="t">
+            <a:spAutoFit/>
+          </a:bodyPr>
+          <a:lstStyle/>
+          <a:p>
+            <a:r>
+              <a:rPr sz="1400" b="0">
+                <a:solidFill>
+                  <a:srgbClr val="94A3B8"/>
+                </a:solidFill>
+                <a:latin typeface="Inter"/>
+              </a:rPr>
+              <a:t>Masking limits what gets in.</a:t>
+            </a:r>
+          </a:p>
+        </p:txBody>
+      </p:sp>
+    </p:spTree>
+  </p:cSld>
+  <p:clrMapOvr>
+    <a:masterClrMapping/>
+  </p:clrMapOvr>
+</p:sld>
+</file>
+
+<file path=ppt/slides/slide14.xml><?xml version="1.0" encoding="utf-8"?>
+<p:sld xmlns:a="http://schemas.openxmlformats.org/drawingml/2006/main" xmlns:p="http://schemas.openxmlformats.org/presentationml/2006/main" xmlns:r="http://schemas.openxmlformats.org/officeDocument/2006/relationships">
+  <p:cSld>
+    <p:bg>
+      <p:bgPr>
+        <a:solidFill>
+          <a:srgbClr val="0A1628"/>
+        </a:solidFill>
+        <a:effectLst/>
+      </p:bgPr>
+    </p:bg>
+    <p:spTree>
+      <p:nvGrpSpPr>
+        <p:cNvPr id="1" name=""/>
+        <p:cNvGrpSpPr/>
+        <p:nvPr/>
+      </p:nvGrpSpPr>
+      <p:grpSpPr/>
+      <p:sp>
+        <p:nvSpPr>
+          <p:cNvPr id="2" name="TextBox 1"/>
+          <p:cNvSpPr txBox="1"/>
+          <p:nvPr/>
+        </p:nvSpPr>
+        <p:spPr>
+          <a:xfrm>
+            <a:off x="457200" y="6419088"/>
+            <a:ext cx="8686800" cy="320040"/>
+          </a:xfrm>
+          <a:prstGeom prst="rect">
+            <a:avLst/>
+          </a:prstGeom>
+          <a:noFill/>
+        </p:spPr>
+        <p:txBody>
+          <a:bodyPr wrap="square" lIns="45720" rIns="45720" tIns="27432" bIns="27432" anchor="t">
+            <a:spAutoFit/>
+          </a:bodyPr>
+          <a:lstStyle/>
+          <a:p>
+            <a:r>
+              <a:rPr sz="900" b="0">
+                <a:solidFill>
+                  <a:srgbClr val="64748B"/>
+                </a:solidFill>
+                <a:latin typeface="Inter"/>
+              </a:rPr>
+              <a:t>AI Agent Observability &amp; Cost Control · Section 10 · Lecture 10.3</a:t>
+            </a:r>
+          </a:p>
+        </p:txBody>
+      </p:sp>
+      <p:sp>
+        <p:nvSpPr>
+          <p:cNvPr id="3" name="TextBox 2"/>
+          <p:cNvSpPr txBox="1"/>
+          <p:nvPr/>
+        </p:nvSpPr>
+        <p:spPr>
+          <a:xfrm>
+            <a:off x="6675120" y="320040"/>
+            <a:ext cx="5074920" cy="548640"/>
+          </a:xfrm>
+          <a:prstGeom prst="rect">
+            <a:avLst/>
+          </a:prstGeom>
+          <a:noFill/>
+        </p:spPr>
+        <p:txBody>
+          <a:bodyPr wrap="square" lIns="45720" rIns="45720" tIns="27432" bIns="27432" anchor="t">
+            <a:spAutoFit/>
+          </a:bodyPr>
+          <a:lstStyle/>
+          <a:p>
+            <a:pPr algn="r"/>
+            <a:r>
+              <a:rPr sz="1000" b="0">
+                <a:solidFill>
+                  <a:srgbClr val="94A3B8"/>
+                </a:solidFill>
+                <a:latin typeface="Inter"/>
+              </a:rPr>
+              <a:t>SECTION 10 · PRIVACY, SECURITY AND GOVERNANCE OF TELEMETRY</a:t>
+            </a:r>
+          </a:p>
+        </p:txBody>
+      </p:sp>
+      <p:sp>
+        <p:nvSpPr>
+          <p:cNvPr id="4" name="TextBox 3"/>
+          <p:cNvSpPr txBox="1"/>
+          <p:nvPr/>
+        </p:nvSpPr>
+        <p:spPr>
+          <a:xfrm>
+            <a:off x="914400" y="1417320"/>
+            <a:ext cx="10332720" cy="457200"/>
+          </a:xfrm>
+          <a:prstGeom prst="rect">
+            <a:avLst/>
+          </a:prstGeom>
+          <a:noFill/>
+        </p:spPr>
+        <p:txBody>
+          <a:bodyPr wrap="square" lIns="45720" rIns="45720" tIns="27432" bIns="27432" anchor="t">
+            <a:spAutoFit/>
+          </a:bodyPr>
+          <a:lstStyle/>
+          <a:p>
+            <a:r>
+              <a:rPr sz="1200" b="1">
+                <a:solidFill>
+                  <a:srgbClr val="00D4AA"/>
+                </a:solidFill>
+                <a:latin typeface="Inter"/>
+              </a:rPr>
+              <a:t>LECTURE 10.3</a:t>
+            </a:r>
+          </a:p>
+        </p:txBody>
+      </p:sp>
+      <p:sp>
+        <p:nvSpPr>
+          <p:cNvPr id="5" name="TextBox 4"/>
+          <p:cNvSpPr txBox="1"/>
+          <p:nvPr/>
+        </p:nvSpPr>
+        <p:spPr>
+          <a:xfrm>
+            <a:off x="914400" y="1874519"/>
+            <a:ext cx="10332720" cy="1645920"/>
+          </a:xfrm>
+          <a:prstGeom prst="rect">
+            <a:avLst/>
+          </a:prstGeom>
+          <a:noFill/>
+        </p:spPr>
+        <p:txBody>
+          <a:bodyPr wrap="square" lIns="45720" rIns="45720" tIns="27432" bIns="27432" anchor="t">
+            <a:spAutoFit/>
+          </a:bodyPr>
+          <a:lstStyle/>
+          <a:p>
+            <a:pPr>
+              <a:lnSpc>
+                <a:spcPct val="110000"/>
+              </a:lnSpc>
+            </a:pPr>
+            <a:r>
+              <a:rPr sz="3000" b="1">
+                <a:solidFill>
+                  <a:srgbClr val="FFFFFF"/>
+                </a:solidFill>
+                <a:latin typeface="Inter"/>
+              </a:rPr>
+              <a:t>Retention, access and tenant separation</a:t>
+            </a:r>
+          </a:p>
+        </p:txBody>
+      </p:sp>
+      <p:sp>
+        <p:nvSpPr>
+          <p:cNvPr id="6" name="Rectangle 5"/>
+          <p:cNvSpPr/>
+          <p:nvPr/>
+        </p:nvSpPr>
+        <p:spPr>
+          <a:xfrm>
+            <a:off x="914400" y="3794760"/>
+            <a:ext cx="64008" cy="1143000"/>
+          </a:xfrm>
+          <a:prstGeom prst="rect">
+            <a:avLst/>
+          </a:prstGeom>
+          <a:solidFill>
+            <a:srgbClr val="00D4AA"/>
+          </a:solidFill>
+          <a:ln>
+            <a:noFill/>
+          </a:ln>
+          <a:effectLst/>
+        </p:spPr>
+        <p:style>
+          <a:lnRef idx="1">
+            <a:schemeClr val="accent1"/>
+          </a:lnRef>
+          <a:fillRef idx="3">
+            <a:schemeClr val="accent1"/>
+          </a:fillRef>
+          <a:effectRef idx="2">
+            <a:schemeClr val="accent1"/>
+          </a:effectRef>
+          <a:fontRef idx="minor">
+            <a:schemeClr val="lt1"/>
+          </a:fontRef>
+        </p:style>
+        <p:txBody>
+          <a:bodyPr rtlCol="0" anchor="ctr"/>
+          <a:lstStyle/>
+          <a:p/>
+        </p:txBody>
+      </p:sp>
+      <p:sp>
+        <p:nvSpPr>
+          <p:cNvPr id="7" name="TextBox 6"/>
+          <p:cNvSpPr txBox="1"/>
+          <p:nvPr/>
+        </p:nvSpPr>
+        <p:spPr>
+          <a:xfrm>
+            <a:off x="1188720" y="3749039"/>
+            <a:ext cx="9692640" cy="1280160"/>
+          </a:xfrm>
+          <a:prstGeom prst="rect">
+            <a:avLst/>
+          </a:prstGeom>
+          <a:noFill/>
+        </p:spPr>
+        <p:txBody>
+          <a:bodyPr wrap="square" lIns="45720" rIns="45720" tIns="27432" bIns="27432" anchor="ctr">
+            <a:spAutoFit/>
+          </a:bodyPr>
+          <a:lstStyle/>
+          <a:p>
+            <a:pPr>
+              <a:lnSpc>
+                <a:spcPct val="130000"/>
+              </a:lnSpc>
+            </a:pPr>
+            <a:r>
+              <a:rPr sz="1600" b="0">
+                <a:solidFill>
+                  <a:srgbClr val="CBD5E1"/>
+                </a:solidFill>
+                <a:latin typeface="Inter"/>
+              </a:rPr>
+              <a:t>Set a retention window per data class, one project per environment with roles, and decide tenant tags versus separate projects by who…</a:t>
+            </a:r>
+          </a:p>
+        </p:txBody>
+      </p:sp>
+    </p:spTree>
+  </p:cSld>
+  <p:clrMapOvr>
+    <a:masterClrMapping/>
+  </p:clrMapOvr>
+</p:sld>
+</file>
+
+<file path=ppt/slides/slide15.xml><?xml version="1.0" encoding="utf-8"?>
 <p:sld xmlns:a="http://schemas.openxmlformats.org/drawingml/2006/main" xmlns:p="http://schemas.openxmlformats.org/presentationml/2006/main" xmlns:r="http://schemas.openxmlformats.org/officeDocument/2006/relationships">
   <p:cSld>
     <p:bg>
@@ -6809,7 +8137,7 @@
                           </a:solidFill>
                           <a:latin typeface="Inter"/>
                         </a:rPr>
-                        <a:t>30-day SLO window plus margin</a:t>
+                        <a:t>28-day SLO window plus margin</a:t>
                       </a:r>
                     </a:p>
                   </a:txBody>
@@ -6940,948 +8268,6 @@
 </p:sld>
 </file>
 
-<file path=ppt/slides/slide13.xml><?xml version="1.0" encoding="utf-8"?>
-<p:sld xmlns:a="http://schemas.openxmlformats.org/drawingml/2006/main" xmlns:p="http://schemas.openxmlformats.org/presentationml/2006/main" xmlns:r="http://schemas.openxmlformats.org/officeDocument/2006/relationships">
-  <p:cSld>
-    <p:bg>
-      <p:bgPr>
-        <a:solidFill>
-          <a:srgbClr val="0A1628"/>
-        </a:solidFill>
-        <a:effectLst/>
-      </p:bgPr>
-    </p:bg>
-    <p:spTree>
-      <p:nvGrpSpPr>
-        <p:cNvPr id="1" name=""/>
-        <p:cNvGrpSpPr/>
-        <p:nvPr/>
-      </p:nvGrpSpPr>
-      <p:grpSpPr/>
-      <p:sp>
-        <p:nvSpPr>
-          <p:cNvPr id="2" name="TextBox 1"/>
-          <p:cNvSpPr txBox="1"/>
-          <p:nvPr/>
-        </p:nvSpPr>
-        <p:spPr>
-          <a:xfrm>
-            <a:off x="457200" y="6419088"/>
-            <a:ext cx="8686800" cy="320040"/>
-          </a:xfrm>
-          <a:prstGeom prst="rect">
-            <a:avLst/>
-          </a:prstGeom>
-          <a:noFill/>
-        </p:spPr>
-        <p:txBody>
-          <a:bodyPr wrap="square" lIns="45720" rIns="45720" tIns="27432" bIns="27432" anchor="t">
-            <a:spAutoFit/>
-          </a:bodyPr>
-          <a:lstStyle/>
-          <a:p>
-            <a:r>
-              <a:rPr sz="900" b="0">
-                <a:solidFill>
-                  <a:srgbClr val="64748B"/>
-                </a:solidFill>
-                <a:latin typeface="Inter"/>
-              </a:rPr>
-              <a:t>AI Agent Observability &amp; Cost Control · Section 10 · Lecture 10.3</a:t>
-            </a:r>
-          </a:p>
-        </p:txBody>
-      </p:sp>
-      <p:sp>
-        <p:nvSpPr>
-          <p:cNvPr id="3" name="TextBox 2"/>
-          <p:cNvSpPr txBox="1"/>
-          <p:nvPr/>
-        </p:nvSpPr>
-        <p:spPr>
-          <a:xfrm>
-            <a:off x="457200" y="411480"/>
-            <a:ext cx="11247120" cy="868680"/>
-          </a:xfrm>
-          <a:prstGeom prst="rect">
-            <a:avLst/>
-          </a:prstGeom>
-          <a:noFill/>
-        </p:spPr>
-        <p:txBody>
-          <a:bodyPr wrap="square" lIns="45720" rIns="45720" tIns="27432" bIns="27432" anchor="t">
-            <a:spAutoFit/>
-          </a:bodyPr>
-          <a:lstStyle/>
-          <a:p>
-            <a:pPr>
-              <a:lnSpc>
-                <a:spcPct val="110000"/>
-              </a:lnSpc>
-            </a:pPr>
-            <a:r>
-              <a:rPr sz="2600" b="1">
-                <a:solidFill>
-                  <a:srgbClr val="FFFFFF"/>
-                </a:solidFill>
-                <a:latin typeface="Inter"/>
-              </a:rPr>
-              <a:t>Projects and roles</a:t>
-            </a:r>
-          </a:p>
-        </p:txBody>
-      </p:sp>
-      <p:sp>
-        <p:nvSpPr>
-          <p:cNvPr id="4" name="Rectangle 3"/>
-          <p:cNvSpPr/>
-          <p:nvPr/>
-        </p:nvSpPr>
-        <p:spPr>
-          <a:xfrm>
-            <a:off x="502920" y="1024128"/>
-            <a:ext cx="822960" cy="54864"/>
-          </a:xfrm>
-          <a:prstGeom prst="rect">
-            <a:avLst/>
-          </a:prstGeom>
-          <a:solidFill>
-            <a:srgbClr val="00D4AA"/>
-          </a:solidFill>
-          <a:ln>
-            <a:noFill/>
-          </a:ln>
-          <a:effectLst/>
-        </p:spPr>
-        <p:style>
-          <a:lnRef idx="1">
-            <a:schemeClr val="accent1"/>
-          </a:lnRef>
-          <a:fillRef idx="3">
-            <a:schemeClr val="accent1"/>
-          </a:fillRef>
-          <a:effectRef idx="2">
-            <a:schemeClr val="accent1"/>
-          </a:effectRef>
-          <a:fontRef idx="minor">
-            <a:schemeClr val="lt1"/>
-          </a:fontRef>
-        </p:style>
-        <p:txBody>
-          <a:bodyPr rtlCol="0" anchor="ctr"/>
-          <a:lstStyle/>
-          <a:p/>
-        </p:txBody>
-      </p:sp>
-      <p:sp>
-        <p:nvSpPr>
-          <p:cNvPr id="5" name="TextBox 4"/>
-          <p:cNvSpPr txBox="1"/>
-          <p:nvPr/>
-        </p:nvSpPr>
-        <p:spPr>
-          <a:xfrm>
-            <a:off x="640080" y="1417320"/>
-            <a:ext cx="10881360" cy="4892040"/>
-          </a:xfrm>
-          <a:prstGeom prst="rect">
-            <a:avLst/>
-          </a:prstGeom>
-          <a:noFill/>
-        </p:spPr>
-        <p:txBody>
-          <a:bodyPr wrap="square" lIns="45720" rIns="45720" tIns="27432" bIns="27432" anchor="t">
-            <a:spAutoFit/>
-          </a:bodyPr>
-          <a:lstStyle/>
-          <a:p>
-            <a:pPr marL="292608" indent="-292608">
-              <a:lnSpc>
-                <a:spcPct val="120000"/>
-              </a:lnSpc>
-              <a:spcAft>
-                <a:spcPts val="1260"/>
-              </a:spcAft>
-              <a:buClr>
-                <a:srgbClr val="00D4AA"/>
-              </a:buClr>
-              <a:buFont typeface="Inter"/>
-              <a:buChar char="•"/>
-            </a:pPr>
-            <a:r>
-              <a:rPr sz="1800" b="0">
-                <a:solidFill>
-                  <a:srgbClr val="FFFFFF"/>
-                </a:solidFill>
-                <a:latin typeface="Inter"/>
-              </a:rPr>
-              <a:t>One Langfuse project per environment: </a:t>
-            </a:r>
-            <a:r>
-              <a:rPr sz="1656" b="0">
-                <a:solidFill>
-                  <a:srgbClr val="00D4AA"/>
-                </a:solidFill>
-                <a:latin typeface="JetBrains Mono"/>
-              </a:rPr>
-              <a:t>atlas-dev</a:t>
-            </a:r>
-            <a:r>
-              <a:rPr sz="1800" b="0">
-                <a:solidFill>
-                  <a:srgbClr val="FFFFFF"/>
-                </a:solidFill>
-                <a:latin typeface="Inter"/>
-              </a:rPr>
-              <a:t>, </a:t>
-            </a:r>
-            <a:r>
-              <a:rPr sz="1656" b="0">
-                <a:solidFill>
-                  <a:srgbClr val="00D4AA"/>
-                </a:solidFill>
-                <a:latin typeface="JetBrains Mono"/>
-              </a:rPr>
-              <a:t>atlas-staging</a:t>
-            </a:r>
-            <a:r>
-              <a:rPr sz="1800" b="0">
-                <a:solidFill>
-                  <a:srgbClr val="FFFFFF"/>
-                </a:solidFill>
-                <a:latin typeface="Inter"/>
-              </a:rPr>
-              <a:t>, </a:t>
-            </a:r>
-            <a:r>
-              <a:rPr sz="1656" b="0">
-                <a:solidFill>
-                  <a:srgbClr val="00D4AA"/>
-                </a:solidFill>
-                <a:latin typeface="JetBrains Mono"/>
-              </a:rPr>
-              <a:t>atlas-prod</a:t>
-            </a:r>
-            <a:r>
-              <a:rPr sz="1800" b="0">
-                <a:solidFill>
-                  <a:srgbClr val="FFFFFF"/>
-                </a:solidFill>
-                <a:latin typeface="Inter"/>
-              </a:rPr>
-              <a:t>; keys differ, retention differs</a:t>
-            </a:r>
-          </a:p>
-          <a:p>
-            <a:pPr marL="292608" indent="-292608">
-              <a:lnSpc>
-                <a:spcPct val="120000"/>
-              </a:lnSpc>
-              <a:spcAft>
-                <a:spcPts val="1260"/>
-              </a:spcAft>
-              <a:buClr>
-                <a:srgbClr val="00D4AA"/>
-              </a:buClr>
-              <a:buFont typeface="Inter"/>
-              <a:buChar char="•"/>
-            </a:pPr>
-            <a:r>
-              <a:rPr sz="1800" b="0">
-                <a:solidFill>
-                  <a:srgbClr val="FFFFFF"/>
-                </a:solidFill>
-                <a:latin typeface="Inter"/>
-              </a:rPr>
-              <a:t>Roles: Owner (2 people), Admin (the on-call rotation), Member (engineers on Atlas), Viewer (stakeholders, 9.4)</a:t>
-            </a:r>
-          </a:p>
-          <a:p>
-            <a:pPr marL="292608" indent="-292608">
-              <a:lnSpc>
-                <a:spcPct val="120000"/>
-              </a:lnSpc>
-              <a:spcAft>
-                <a:spcPts val="1260"/>
-              </a:spcAft>
-              <a:buClr>
-                <a:srgbClr val="00D4AA"/>
-              </a:buClr>
-              <a:buFont typeface="Inter"/>
-              <a:buChar char="•"/>
-            </a:pPr>
-            <a:r>
-              <a:rPr sz="1800" b="0">
-                <a:solidFill>
-                  <a:srgbClr val="FFFFFF"/>
-                </a:solidFill>
-                <a:latin typeface="Inter"/>
-              </a:rPr>
-              <a:t>Prod traces: Members and above; dev traces: anyone on the team</a:t>
-            </a:r>
-          </a:p>
-          <a:p>
-            <a:pPr marL="292608" indent="-292608">
-              <a:lnSpc>
-                <a:spcPct val="120000"/>
-              </a:lnSpc>
-              <a:spcAft>
-                <a:spcPts val="1260"/>
-              </a:spcAft>
-              <a:buClr>
-                <a:srgbClr val="00D4AA"/>
-              </a:buClr>
-              <a:buFont typeface="Inter"/>
-              <a:buChar char="•"/>
-            </a:pPr>
-            <a:r>
-              <a:rPr sz="1800" b="0">
-                <a:solidFill>
-                  <a:srgbClr val="FFFFFF"/>
-                </a:solidFill>
-                <a:latin typeface="Inter"/>
-              </a:rPr>
-              <a:t>API keys per service, never per person; rotate on departure</a:t>
-            </a:r>
-          </a:p>
-          <a:p>
-            <a:pPr marL="292608" indent="-292608">
-              <a:lnSpc>
-                <a:spcPct val="120000"/>
-              </a:lnSpc>
-              <a:spcAft>
-                <a:spcPts val="1260"/>
-              </a:spcAft>
-              <a:buClr>
-                <a:srgbClr val="00D4AA"/>
-              </a:buClr>
-              <a:buFont typeface="Inter"/>
-              <a:buChar char="•"/>
-            </a:pPr>
-            <a:r>
-              <a:rPr sz="1800" b="0">
-                <a:solidFill>
-                  <a:srgbClr val="FFFFFF"/>
-                </a:solidFill>
-                <a:latin typeface="Inter"/>
-              </a:rPr>
-              <a:t>Judge and </a:t>
-            </a:r>
-            <a:r>
-              <a:rPr sz="1656" b="0">
-                <a:solidFill>
-                  <a:srgbClr val="00D4AA"/>
-                </a:solidFill>
-                <a:latin typeface="JetBrains Mono"/>
-              </a:rPr>
-              <a:t>to_dataset</a:t>
-            </a:r>
-            <a:r>
-              <a:rPr sz="1800" b="0">
-                <a:solidFill>
-                  <a:srgbClr val="FFFFFF"/>
-                </a:solidFill>
-                <a:latin typeface="Inter"/>
-              </a:rPr>
-              <a:t> jobs run with a scoped key that can write scores and dataset items, not delete</a:t>
-            </a:r>
-          </a:p>
-        </p:txBody>
-      </p:sp>
-    </p:spTree>
-  </p:cSld>
-  <p:clrMapOvr>
-    <a:masterClrMapping/>
-  </p:clrMapOvr>
-</p:sld>
-</file>
-
-<file path=ppt/slides/slide14.xml><?xml version="1.0" encoding="utf-8"?>
-<p:sld xmlns:a="http://schemas.openxmlformats.org/drawingml/2006/main" xmlns:p="http://schemas.openxmlformats.org/presentationml/2006/main" xmlns:r="http://schemas.openxmlformats.org/officeDocument/2006/relationships">
-  <p:cSld>
-    <p:bg>
-      <p:bgPr>
-        <a:solidFill>
-          <a:srgbClr val="0A1628"/>
-        </a:solidFill>
-        <a:effectLst/>
-      </p:bgPr>
-    </p:bg>
-    <p:spTree>
-      <p:nvGrpSpPr>
-        <p:cNvPr id="1" name=""/>
-        <p:cNvGrpSpPr/>
-        <p:nvPr/>
-      </p:nvGrpSpPr>
-      <p:grpSpPr/>
-      <p:sp>
-        <p:nvSpPr>
-          <p:cNvPr id="2" name="TextBox 1"/>
-          <p:cNvSpPr txBox="1"/>
-          <p:nvPr/>
-        </p:nvSpPr>
-        <p:spPr>
-          <a:xfrm>
-            <a:off x="457200" y="6419088"/>
-            <a:ext cx="8686800" cy="320040"/>
-          </a:xfrm>
-          <a:prstGeom prst="rect">
-            <a:avLst/>
-          </a:prstGeom>
-          <a:noFill/>
-        </p:spPr>
-        <p:txBody>
-          <a:bodyPr wrap="square" lIns="45720" rIns="45720" tIns="27432" bIns="27432" anchor="t">
-            <a:spAutoFit/>
-          </a:bodyPr>
-          <a:lstStyle/>
-          <a:p>
-            <a:r>
-              <a:rPr sz="900" b="0">
-                <a:solidFill>
-                  <a:srgbClr val="64748B"/>
-                </a:solidFill>
-                <a:latin typeface="Inter"/>
-              </a:rPr>
-              <a:t>AI Agent Observability &amp; Cost Control · Section 10 · Lecture 10.3</a:t>
-            </a:r>
-          </a:p>
-        </p:txBody>
-      </p:sp>
-      <p:sp>
-        <p:nvSpPr>
-          <p:cNvPr id="3" name="TextBox 2"/>
-          <p:cNvSpPr txBox="1"/>
-          <p:nvPr/>
-        </p:nvSpPr>
-        <p:spPr>
-          <a:xfrm>
-            <a:off x="457200" y="411480"/>
-            <a:ext cx="11247120" cy="868680"/>
-          </a:xfrm>
-          <a:prstGeom prst="rect">
-            <a:avLst/>
-          </a:prstGeom>
-          <a:noFill/>
-        </p:spPr>
-        <p:txBody>
-          <a:bodyPr wrap="square" lIns="45720" rIns="45720" tIns="27432" bIns="27432" anchor="t">
-            <a:spAutoFit/>
-          </a:bodyPr>
-          <a:lstStyle/>
-          <a:p>
-            <a:pPr>
-              <a:lnSpc>
-                <a:spcPct val="110000"/>
-              </a:lnSpc>
-            </a:pPr>
-            <a:r>
-              <a:rPr sz="2600" b="1">
-                <a:solidFill>
-                  <a:srgbClr val="FFFFFF"/>
-                </a:solidFill>
-                <a:latin typeface="Inter"/>
-              </a:rPr>
-              <a:t>Tenant tags or separate projects? Three questions</a:t>
-            </a:r>
-          </a:p>
-        </p:txBody>
-      </p:sp>
-      <p:sp>
-        <p:nvSpPr>
-          <p:cNvPr id="4" name="Rectangle 3"/>
-          <p:cNvSpPr/>
-          <p:nvPr/>
-        </p:nvSpPr>
-        <p:spPr>
-          <a:xfrm>
-            <a:off x="502920" y="1024128"/>
-            <a:ext cx="822960" cy="54864"/>
-          </a:xfrm>
-          <a:prstGeom prst="rect">
-            <a:avLst/>
-          </a:prstGeom>
-          <a:solidFill>
-            <a:srgbClr val="00D4AA"/>
-          </a:solidFill>
-          <a:ln>
-            <a:noFill/>
-          </a:ln>
-          <a:effectLst/>
-        </p:spPr>
-        <p:style>
-          <a:lnRef idx="1">
-            <a:schemeClr val="accent1"/>
-          </a:lnRef>
-          <a:fillRef idx="3">
-            <a:schemeClr val="accent1"/>
-          </a:fillRef>
-          <a:effectRef idx="2">
-            <a:schemeClr val="accent1"/>
-          </a:effectRef>
-          <a:fontRef idx="minor">
-            <a:schemeClr val="lt1"/>
-          </a:fontRef>
-        </p:style>
-        <p:txBody>
-          <a:bodyPr rtlCol="0" anchor="ctr"/>
-          <a:lstStyle/>
-          <a:p/>
-        </p:txBody>
-      </p:sp>
-      <p:sp>
-        <p:nvSpPr>
-          <p:cNvPr id="5" name="TextBox 4"/>
-          <p:cNvSpPr txBox="1"/>
-          <p:nvPr/>
-        </p:nvSpPr>
-        <p:spPr>
-          <a:xfrm>
-            <a:off x="640080" y="1417320"/>
-            <a:ext cx="10881360" cy="4892040"/>
-          </a:xfrm>
-          <a:prstGeom prst="rect">
-            <a:avLst/>
-          </a:prstGeom>
-          <a:noFill/>
-        </p:spPr>
-        <p:txBody>
-          <a:bodyPr wrap="square" lIns="45720" rIns="45720" tIns="27432" bIns="27432" anchor="t">
-            <a:spAutoFit/>
-          </a:bodyPr>
-          <a:lstStyle/>
-          <a:p>
-            <a:pPr marL="292608" indent="-292608">
-              <a:lnSpc>
-                <a:spcPct val="120000"/>
-              </a:lnSpc>
-              <a:spcAft>
-                <a:spcPts val="1260"/>
-              </a:spcAft>
-              <a:buClr>
-                <a:srgbClr val="00D4AA"/>
-              </a:buClr>
-              <a:buFont typeface="Inter"/>
-              <a:buChar char="•"/>
-            </a:pPr>
-            <a:r>
-              <a:rPr sz="1800" b="0">
-                <a:solidFill>
-                  <a:srgbClr val="FFFFFF"/>
-                </a:solidFill>
-                <a:latin typeface="Inter"/>
-              </a:rPr>
-              <a:t>May an engineer who supports tenant A see tenant B's traces? If no: separate projects</a:t>
-            </a:r>
-          </a:p>
-          <a:p>
-            <a:pPr marL="292608" indent="-292608">
-              <a:lnSpc>
-                <a:spcPct val="120000"/>
-              </a:lnSpc>
-              <a:spcAft>
-                <a:spcPts val="1260"/>
-              </a:spcAft>
-              <a:buClr>
-                <a:srgbClr val="00D4AA"/>
-              </a:buClr>
-              <a:buFont typeface="Inter"/>
-              <a:buChar char="•"/>
-            </a:pPr>
-            <a:r>
-              <a:rPr sz="1800" b="0">
-                <a:solidFill>
-                  <a:srgbClr val="FFFFFF"/>
-                </a:solidFill>
-                <a:latin typeface="Inter"/>
-              </a:rPr>
-              <a:t>Are tenants different legal entities or jurisdictions? If yes: separate projects, maybe separate regions</a:t>
-            </a:r>
-          </a:p>
-          <a:p>
-            <a:pPr marL="292608" indent="-292608">
-              <a:lnSpc>
-                <a:spcPct val="120000"/>
-              </a:lnSpc>
-              <a:spcAft>
-                <a:spcPts val="1260"/>
-              </a:spcAft>
-              <a:buClr>
-                <a:srgbClr val="00D4AA"/>
-              </a:buClr>
-              <a:buFont typeface="Inter"/>
-              <a:buChar char="•"/>
-            </a:pPr>
-            <a:r>
-              <a:rPr sz="1800" b="0">
-                <a:solidFill>
-                  <a:srgbClr val="FFFFFF"/>
-                </a:solidFill>
-                <a:latin typeface="Inter"/>
-              </a:rPr>
-              <a:t>Do you need cross-tenant dashboards (the showback, 6.3)? If yes: tags, or aggregate outside Langfuse</a:t>
-            </a:r>
-          </a:p>
-          <a:p>
-            <a:pPr marL="292608" indent="-292608">
-              <a:lnSpc>
-                <a:spcPct val="120000"/>
-              </a:lnSpc>
-              <a:spcAft>
-                <a:spcPts val="1260"/>
-              </a:spcAft>
-              <a:buClr>
-                <a:srgbClr val="00D4AA"/>
-              </a:buClr>
-              <a:buFont typeface="Inter"/>
-              <a:buChar char="•"/>
-            </a:pPr>
-            <a:r>
-              <a:rPr sz="1800" b="0">
-                <a:solidFill>
-                  <a:srgbClr val="FFFFFF"/>
-                </a:solidFill>
-                <a:latin typeface="Inter"/>
-              </a:rPr>
-              <a:t>Northwind: four departments of one company, one legal entity, shared support team, showback needed → tags in one project</a:t>
-            </a:r>
-          </a:p>
-          <a:p>
-            <a:pPr marL="292608" indent="-292608">
-              <a:lnSpc>
-                <a:spcPct val="120000"/>
-              </a:lnSpc>
-              <a:spcAft>
-                <a:spcPts val="1260"/>
-              </a:spcAft>
-              <a:buClr>
-                <a:srgbClr val="00D4AA"/>
-              </a:buClr>
-              <a:buFont typeface="Inter"/>
-              <a:buChar char="•"/>
-            </a:pPr>
-            <a:r>
-              <a:rPr sz="1800" b="0">
-                <a:solidFill>
-                  <a:srgbClr val="FFFFFF"/>
-                </a:solidFill>
-                <a:latin typeface="Inter"/>
-              </a:rPr>
-              <a:t>A SaaS with external customers → project per customer, aggregates in Prometheus</a:t>
-            </a:r>
-          </a:p>
-        </p:txBody>
-      </p:sp>
-    </p:spTree>
-  </p:cSld>
-  <p:clrMapOvr>
-    <a:masterClrMapping/>
-  </p:clrMapOvr>
-</p:sld>
-</file>
-
-<file path=ppt/slides/slide15.xml><?xml version="1.0" encoding="utf-8"?>
-<p:sld xmlns:a="http://schemas.openxmlformats.org/drawingml/2006/main" xmlns:p="http://schemas.openxmlformats.org/presentationml/2006/main" xmlns:r="http://schemas.openxmlformats.org/officeDocument/2006/relationships">
-  <p:cSld>
-    <p:bg>
-      <p:bgPr>
-        <a:solidFill>
-          <a:srgbClr val="0A1628"/>
-        </a:solidFill>
-        <a:effectLst/>
-      </p:bgPr>
-    </p:bg>
-    <p:spTree>
-      <p:nvGrpSpPr>
-        <p:cNvPr id="1" name=""/>
-        <p:cNvGrpSpPr/>
-        <p:nvPr/>
-      </p:nvGrpSpPr>
-      <p:grpSpPr/>
-      <p:sp>
-        <p:nvSpPr>
-          <p:cNvPr id="2" name="TextBox 1"/>
-          <p:cNvSpPr txBox="1"/>
-          <p:nvPr/>
-        </p:nvSpPr>
-        <p:spPr>
-          <a:xfrm>
-            <a:off x="457200" y="6419088"/>
-            <a:ext cx="8686800" cy="320040"/>
-          </a:xfrm>
-          <a:prstGeom prst="rect">
-            <a:avLst/>
-          </a:prstGeom>
-          <a:noFill/>
-        </p:spPr>
-        <p:txBody>
-          <a:bodyPr wrap="square" lIns="45720" rIns="45720" tIns="27432" bIns="27432" anchor="t">
-            <a:spAutoFit/>
-          </a:bodyPr>
-          <a:lstStyle/>
-          <a:p>
-            <a:r>
-              <a:rPr sz="900" b="0">
-                <a:solidFill>
-                  <a:srgbClr val="64748B"/>
-                </a:solidFill>
-                <a:latin typeface="Inter"/>
-              </a:rPr>
-              <a:t>AI Agent Observability &amp; Cost Control · Section 10 · Lecture 10.3</a:t>
-            </a:r>
-          </a:p>
-        </p:txBody>
-      </p:sp>
-      <p:sp>
-        <p:nvSpPr>
-          <p:cNvPr id="3" name="TextBox 2"/>
-          <p:cNvSpPr txBox="1"/>
-          <p:nvPr/>
-        </p:nvSpPr>
-        <p:spPr>
-          <a:xfrm>
-            <a:off x="457200" y="411480"/>
-            <a:ext cx="11247120" cy="868680"/>
-          </a:xfrm>
-          <a:prstGeom prst="rect">
-            <a:avLst/>
-          </a:prstGeom>
-          <a:noFill/>
-        </p:spPr>
-        <p:txBody>
-          <a:bodyPr wrap="square" lIns="45720" rIns="45720" tIns="27432" bIns="27432" anchor="t">
-            <a:spAutoFit/>
-          </a:bodyPr>
-          <a:lstStyle/>
-          <a:p>
-            <a:pPr>
-              <a:lnSpc>
-                <a:spcPct val="110000"/>
-              </a:lnSpc>
-            </a:pPr>
-            <a:r>
-              <a:rPr sz="2600" b="1">
-                <a:solidFill>
-                  <a:srgbClr val="FFFFFF"/>
-                </a:solidFill>
-                <a:latin typeface="Inter"/>
-              </a:rPr>
-              <a:t>Access to the other destinations</a:t>
-            </a:r>
-          </a:p>
-        </p:txBody>
-      </p:sp>
-      <p:sp>
-        <p:nvSpPr>
-          <p:cNvPr id="4" name="Rectangle 3"/>
-          <p:cNvSpPr/>
-          <p:nvPr/>
-        </p:nvSpPr>
-        <p:spPr>
-          <a:xfrm>
-            <a:off x="502920" y="1024128"/>
-            <a:ext cx="822960" cy="54864"/>
-          </a:xfrm>
-          <a:prstGeom prst="rect">
-            <a:avLst/>
-          </a:prstGeom>
-          <a:solidFill>
-            <a:srgbClr val="00D4AA"/>
-          </a:solidFill>
-          <a:ln>
-            <a:noFill/>
-          </a:ln>
-          <a:effectLst/>
-        </p:spPr>
-        <p:style>
-          <a:lnRef idx="1">
-            <a:schemeClr val="accent1"/>
-          </a:lnRef>
-          <a:fillRef idx="3">
-            <a:schemeClr val="accent1"/>
-          </a:fillRef>
-          <a:effectRef idx="2">
-            <a:schemeClr val="accent1"/>
-          </a:effectRef>
-          <a:fontRef idx="minor">
-            <a:schemeClr val="lt1"/>
-          </a:fontRef>
-        </p:style>
-        <p:txBody>
-          <a:bodyPr rtlCol="0" anchor="ctr"/>
-          <a:lstStyle/>
-          <a:p/>
-        </p:txBody>
-      </p:sp>
-      <p:sp>
-        <p:nvSpPr>
-          <p:cNvPr id="5" name="TextBox 4"/>
-          <p:cNvSpPr txBox="1"/>
-          <p:nvPr/>
-        </p:nvSpPr>
-        <p:spPr>
-          <a:xfrm>
-            <a:off x="640080" y="1417320"/>
-            <a:ext cx="10881360" cy="4892040"/>
-          </a:xfrm>
-          <a:prstGeom prst="rect">
-            <a:avLst/>
-          </a:prstGeom>
-          <a:noFill/>
-        </p:spPr>
-        <p:txBody>
-          <a:bodyPr wrap="square" lIns="45720" rIns="45720" tIns="27432" bIns="27432" anchor="t">
-            <a:spAutoFit/>
-          </a:bodyPr>
-          <a:lstStyle/>
-          <a:p>
-            <a:pPr marL="292608" indent="-292608">
-              <a:lnSpc>
-                <a:spcPct val="120000"/>
-              </a:lnSpc>
-              <a:spcAft>
-                <a:spcPts val="1260"/>
-              </a:spcAft>
-              <a:buClr>
-                <a:srgbClr val="00D4AA"/>
-              </a:buClr>
-              <a:buFont typeface="Inter"/>
-              <a:buChar char="•"/>
-            </a:pPr>
-            <a:r>
-              <a:rPr sz="1800" b="0">
-                <a:solidFill>
-                  <a:srgbClr val="FFFFFF"/>
-                </a:solidFill>
-                <a:latin typeface="Inter"/>
-              </a:rPr>
-              <a:t>Collector: runs in your network; config in git; exporters use secrets from the environment, never from the YAML</a:t>
-            </a:r>
-          </a:p>
-          <a:p>
-            <a:pPr marL="292608" indent="-292608">
-              <a:lnSpc>
-                <a:spcPct val="120000"/>
-              </a:lnSpc>
-              <a:spcAft>
-                <a:spcPts val="1260"/>
-              </a:spcAft>
-              <a:buClr>
-                <a:srgbClr val="00D4AA"/>
-              </a:buClr>
-              <a:buFont typeface="Inter"/>
-              <a:buChar char="•"/>
-            </a:pPr>
-            <a:r>
-              <a:rPr sz="1800" b="0">
-                <a:solidFill>
-                  <a:srgbClr val="FFFFFF"/>
-                </a:solidFill>
-                <a:latin typeface="Inter"/>
-              </a:rPr>
-              <a:t>Logs: same retention as traces; PII masked at the source, so the wide audience is acceptable</a:t>
-            </a:r>
-          </a:p>
-          <a:p>
-            <a:pPr marL="292608" indent="-292608">
-              <a:lnSpc>
-                <a:spcPct val="120000"/>
-              </a:lnSpc>
-              <a:spcAft>
-                <a:spcPts val="1260"/>
-              </a:spcAft>
-              <a:buClr>
-                <a:srgbClr val="00D4AA"/>
-              </a:buClr>
-              <a:buFont typeface="Inter"/>
-              <a:buChar char="•"/>
-            </a:pPr>
-            <a:r>
-              <a:rPr sz="1800" b="0">
-                <a:solidFill>
-                  <a:srgbClr val="FFFFFF"/>
-                </a:solidFill>
-                <a:latin typeface="Inter"/>
-              </a:rPr>
-              <a:t>Prometheus and Grafana: viewer accounts for stakeholders; the compose default admin password is for the lab only</a:t>
-            </a:r>
-          </a:p>
-          <a:p>
-            <a:pPr marL="292608" indent="-292608">
-              <a:lnSpc>
-                <a:spcPct val="120000"/>
-              </a:lnSpc>
-              <a:spcAft>
-                <a:spcPts val="1260"/>
-              </a:spcAft>
-              <a:buClr>
-                <a:srgbClr val="00D4AA"/>
-              </a:buClr>
-              <a:buFont typeface="Inter"/>
-              <a:buChar char="•"/>
-            </a:pPr>
-            <a:r>
-              <a:rPr sz="1800" b="0">
-                <a:solidFill>
-                  <a:srgbClr val="FFFFFF"/>
-                </a:solidFill>
-                <a:latin typeface="Inter"/>
-              </a:rPr>
-              <a:t>Judge provider: check the data terms; prefer zero-retention endpoints where offered; masked inputs regardless</a:t>
-            </a:r>
-          </a:p>
-          <a:p>
-            <a:pPr marL="292608" indent="-292608">
-              <a:lnSpc>
-                <a:spcPct val="120000"/>
-              </a:lnSpc>
-              <a:spcAft>
-                <a:spcPts val="1260"/>
-              </a:spcAft>
-              <a:buClr>
-                <a:srgbClr val="00D4AA"/>
-              </a:buClr>
-              <a:buFont typeface="Inter"/>
-              <a:buChar char="•"/>
-            </a:pPr>
-            <a:r>
-              <a:rPr sz="1800" b="0">
-                <a:solidFill>
-                  <a:srgbClr val="FFFFFF"/>
-                </a:solidFill>
-                <a:latin typeface="Inter"/>
-              </a:rPr>
-              <a:t>Laptops: </a:t>
-            </a:r>
-            <a:r>
-              <a:rPr sz="1656" b="0">
-                <a:solidFill>
-                  <a:srgbClr val="00D4AA"/>
-                </a:solidFill>
-                <a:latin typeface="JetBrains Mono"/>
-              </a:rPr>
-              <a:t>OFFLINE=1</a:t>
-            </a:r>
-            <a:r>
-              <a:rPr sz="1800" b="0">
-                <a:solidFill>
-                  <a:srgbClr val="FFFFFF"/>
-                </a:solidFill>
-                <a:latin typeface="Inter"/>
-              </a:rPr>
-              <a:t> uses synthetic data; a real-data export needs a ticket and a deletion date</a:t>
-            </a:r>
-          </a:p>
-        </p:txBody>
-      </p:sp>
-    </p:spTree>
-  </p:cSld>
-  <p:clrMapOvr>
-    <a:masterClrMapping/>
-  </p:clrMapOvr>
-</p:sld>
-</file>
-
 <file path=ppt/slides/slide16.xml><?xml version="1.0" encoding="utf-8"?>
 <p:sld xmlns:a="http://schemas.openxmlformats.org/drawingml/2006/main" xmlns:p="http://schemas.openxmlformats.org/presentationml/2006/main" xmlns:r="http://schemas.openxmlformats.org/officeDocument/2006/relationships">
   <p:cSld>
@@ -7968,7 +8354,7 @@
                 </a:solidFill>
                 <a:latin typeface="Inter"/>
               </a:rPr>
-              <a:t>The checklist</a:t>
+              <a:t>Projects and roles</a:t>
             </a:r>
           </a:p>
         </p:txBody>
@@ -8051,13 +8437,22 @@
               <a:buChar char="•"/>
             </a:pPr>
             <a:r>
+              <a:rPr sz="1800" b="0">
+                <a:solidFill>
+                  <a:srgbClr val="FFFFFF"/>
+                </a:solidFill>
+                <a:latin typeface="Inter"/>
+              </a:rPr>
+              <a:t>One Langfuse project per environment: </a:t>
+            </a:r>
+            <a:r>
               <a:rPr sz="1656" b="0">
                 <a:solidFill>
                   <a:srgbClr val="00D4AA"/>
                 </a:solidFill>
                 <a:latin typeface="JetBrains Mono"/>
               </a:rPr>
-              <a:t>10-resources/telemetry-governance-checklist.md</a:t>
+              <a:t>atlas-dev</a:t>
             </a:r>
             <a:r>
               <a:rPr sz="1800" b="0">
@@ -8066,7 +8461,43 @@
                 </a:solidFill>
                 <a:latin typeface="Inter"/>
               </a:rPr>
-              <a:t>: retention table, project and role map, tenant decision, destinations and their owners</a:t>
+              <a:t>, </a:t>
+            </a:r>
+            <a:r>
+              <a:rPr sz="1656" b="0">
+                <a:solidFill>
+                  <a:srgbClr val="00D4AA"/>
+                </a:solidFill>
+                <a:latin typeface="JetBrains Mono"/>
+              </a:rPr>
+              <a:t>atlas-staging</a:t>
+            </a:r>
+            <a:r>
+              <a:rPr sz="1800" b="0">
+                <a:solidFill>
+                  <a:srgbClr val="FFFFFF"/>
+                </a:solidFill>
+                <a:latin typeface="Inter"/>
+              </a:rPr>
+              <a:t>, </a:t>
+            </a:r>
+            <a:r>
+              <a:rPr sz="1656" b="0">
+                <a:solidFill>
+                  <a:srgbClr val="00D4AA"/>
+                </a:solidFill>
+                <a:latin typeface="JetBrains Mono"/>
+              </a:rPr>
+              <a:t>atlas-prod</a:t>
+            </a:r>
+            <a:r>
+              <a:rPr sz="1800" b="0">
+                <a:solidFill>
+                  <a:srgbClr val="FFFFFF"/>
+                </a:solidFill>
+                <a:latin typeface="Inter"/>
+              </a:rPr>
+              <a:t>; keys differ, retention differs</a:t>
             </a:r>
           </a:p>
           <a:p>
@@ -8090,7 +8521,7 @@
                 </a:solidFill>
                 <a:latin typeface="Inter"/>
               </a:rPr>
-              <a:t>Fill it once, date it, review quarterly</a:t>
+              <a:t>Roles: Owner (2 people), Admin (the on-call rotation), Member (engineers on Atlas), Viewer (stakeholders, 9.4)</a:t>
             </a:r>
           </a:p>
           <a:p>
@@ -8114,7 +8545,7 @@
                 </a:solidFill>
                 <a:latin typeface="Inter"/>
               </a:rPr>
-              <a:t>Every row has an owner and a place where the setting lives</a:t>
+              <a:t>Prod traces: Members and above; dev traces: anyone on the team</a:t>
             </a:r>
           </a:p>
           <a:p>
@@ -8138,7 +8569,49 @@
                 </a:solidFill>
                 <a:latin typeface="Inter"/>
               </a:rPr>
-              <a:t>It's the document your security team asks for; have it before they ask</a:t>
+              <a:t>API keys per service, never per person; rotate on departure</a:t>
+            </a:r>
+          </a:p>
+          <a:p>
+            <a:pPr marL="292608" indent="-292608">
+              <a:lnSpc>
+                <a:spcPct val="120000"/>
+              </a:lnSpc>
+              <a:spcAft>
+                <a:spcPts val="1260"/>
+              </a:spcAft>
+              <a:buClr>
+                <a:srgbClr val="00D4AA"/>
+              </a:buClr>
+              <a:buFont typeface="Inter"/>
+              <a:buChar char="•"/>
+            </a:pPr>
+            <a:r>
+              <a:rPr sz="1800" b="0">
+                <a:solidFill>
+                  <a:srgbClr val="FFFFFF"/>
+                </a:solidFill>
+                <a:latin typeface="Inter"/>
+              </a:rPr>
+              <a:t>Judge and </a:t>
+            </a:r>
+            <a:r>
+              <a:rPr sz="1656" b="0">
+                <a:solidFill>
+                  <a:srgbClr val="00D4AA"/>
+                </a:solidFill>
+                <a:latin typeface="JetBrains Mono"/>
+              </a:rPr>
+              <a:t>to_dataset</a:t>
+            </a:r>
+            <a:r>
+              <a:rPr sz="1800" b="0">
+                <a:solidFill>
+                  <a:srgbClr val="FFFFFF"/>
+                </a:solidFill>
+                <a:latin typeface="Inter"/>
+              </a:rPr>
+              <a:t> jobs run with a scoped key that can write scores and dataset items, not delete</a:t>
             </a:r>
           </a:p>
         </p:txBody>
@@ -8211,42 +8684,8 @@
         </p:nvSpPr>
         <p:spPr>
           <a:xfrm>
-            <a:off x="2377440" y="2286000"/>
-            <a:ext cx="1097280" cy="1097280"/>
-          </a:xfrm>
-          <a:prstGeom prst="rect">
-            <a:avLst/>
-          </a:prstGeom>
-          <a:noFill/>
-        </p:spPr>
-        <p:txBody>
-          <a:bodyPr wrap="square" lIns="45720" rIns="45720" tIns="27432" bIns="27432" anchor="ctr">
-            <a:spAutoFit/>
-          </a:bodyPr>
-          <a:lstStyle/>
-          <a:p>
-            <a:r>
-              <a:rPr sz="5400" b="1">
-                <a:solidFill>
-                  <a:srgbClr val="00D4AA"/>
-                </a:solidFill>
-                <a:latin typeface="Inter"/>
-              </a:rPr>
-              <a:t>→</a:t>
-            </a:r>
-          </a:p>
-        </p:txBody>
-      </p:sp>
-      <p:sp>
-        <p:nvSpPr>
-          <p:cNvPr id="4" name="TextBox 3"/>
-          <p:cNvSpPr txBox="1"/>
-          <p:nvPr/>
-        </p:nvSpPr>
-        <p:spPr>
-          <a:xfrm>
-            <a:off x="3566160" y="2148840"/>
-            <a:ext cx="7315200" cy="457200"/>
+            <a:off x="457200" y="411480"/>
+            <a:ext cx="11247120" cy="868680"/>
           </a:xfrm>
           <a:prstGeom prst="rect">
             <a:avLst/>
@@ -8259,16 +8698,63 @@
           </a:bodyPr>
           <a:lstStyle/>
           <a:p>
-            <a:r>
-              <a:rPr sz="1400" b="0">
-                <a:solidFill>
-                  <a:srgbClr val="94A3B8"/>
-                </a:solidFill>
-                <a:latin typeface="Inter"/>
-              </a:rPr>
-              <a:t>Next up:</a:t>
-            </a:r>
-          </a:p>
+            <a:pPr>
+              <a:lnSpc>
+                <a:spcPct val="110000"/>
+              </a:lnSpc>
+            </a:pPr>
+            <a:r>
+              <a:rPr sz="2600" b="1">
+                <a:solidFill>
+                  <a:srgbClr val="FFFFFF"/>
+                </a:solidFill>
+                <a:latin typeface="Inter"/>
+              </a:rPr>
+              <a:t>Tenant tags or separate projects? Three questions</a:t>
+            </a:r>
+          </a:p>
+        </p:txBody>
+      </p:sp>
+      <p:sp>
+        <p:nvSpPr>
+          <p:cNvPr id="4" name="Rectangle 3"/>
+          <p:cNvSpPr/>
+          <p:nvPr/>
+        </p:nvSpPr>
+        <p:spPr>
+          <a:xfrm>
+            <a:off x="502920" y="1024128"/>
+            <a:ext cx="822960" cy="54864"/>
+          </a:xfrm>
+          <a:prstGeom prst="rect">
+            <a:avLst/>
+          </a:prstGeom>
+          <a:solidFill>
+            <a:srgbClr val="00D4AA"/>
+          </a:solidFill>
+          <a:ln>
+            <a:noFill/>
+          </a:ln>
+          <a:effectLst/>
+        </p:spPr>
+        <p:style>
+          <a:lnRef idx="1">
+            <a:schemeClr val="accent1"/>
+          </a:lnRef>
+          <a:fillRef idx="3">
+            <a:schemeClr val="accent1"/>
+          </a:fillRef>
+          <a:effectRef idx="2">
+            <a:schemeClr val="accent1"/>
+          </a:effectRef>
+          <a:fontRef idx="minor">
+            <a:schemeClr val="lt1"/>
+          </a:fontRef>
+        </p:style>
+        <p:txBody>
+          <a:bodyPr rtlCol="0" anchor="ctr"/>
+          <a:lstStyle/>
+          <a:p/>
         </p:txBody>
       </p:sp>
       <p:sp>
@@ -8279,8 +8765,8 @@
         </p:nvSpPr>
         <p:spPr>
           <a:xfrm>
-            <a:off x="3566160" y="2560320"/>
-            <a:ext cx="7315200" cy="1097280"/>
+            <a:off x="640080" y="1417320"/>
+            <a:ext cx="10881360" cy="4892040"/>
           </a:xfrm>
           <a:prstGeom prst="rect">
             <a:avLst/>
@@ -8293,48 +8779,123 @@
           </a:bodyPr>
           <a:lstStyle/>
           <a:p>
-            <a:r>
-              <a:rPr sz="2600" b="1">
+            <a:pPr marL="292608" indent="-292608">
+              <a:lnSpc>
+                <a:spcPct val="120000"/>
+              </a:lnSpc>
+              <a:spcAft>
+                <a:spcPts val="1260"/>
+              </a:spcAft>
+              <a:buClr>
+                <a:srgbClr val="00D4AA"/>
+              </a:buClr>
+              <a:buFont typeface="Inter"/>
+              <a:buChar char="•"/>
+            </a:pPr>
+            <a:r>
+              <a:rPr sz="1800" b="0">
                 <a:solidFill>
                   <a:srgbClr val="FFFFFF"/>
                 </a:solidFill>
                 <a:latin typeface="Inter"/>
               </a:rPr>
-              <a:t>Regulatory logging obligations (not legal advice)</a:t>
-            </a:r>
-          </a:p>
-        </p:txBody>
-      </p:sp>
-      <p:sp>
-        <p:nvSpPr>
-          <p:cNvPr id="6" name="TextBox 5"/>
-          <p:cNvSpPr txBox="1"/>
-          <p:nvPr/>
-        </p:nvSpPr>
-        <p:spPr>
-          <a:xfrm>
-            <a:off x="3566160" y="3703320"/>
-            <a:ext cx="7315200" cy="1097280"/>
-          </a:xfrm>
-          <a:prstGeom prst="rect">
-            <a:avLst/>
-          </a:prstGeom>
-          <a:noFill/>
-        </p:spPr>
-        <p:txBody>
-          <a:bodyPr wrap="square" lIns="45720" rIns="45720" tIns="27432" bIns="27432" anchor="t">
-            <a:spAutoFit/>
-          </a:bodyPr>
-          <a:lstStyle/>
-          <a:p>
-            <a:r>
-              <a:rPr sz="1400" b="0">
-                <a:solidFill>
-                  <a:srgbClr val="94A3B8"/>
-                </a:solidFill>
-                <a:latin typeface="Inter"/>
-              </a:rPr>
-              <a:t>Everything so far is about keeping less.</a:t>
+              <a:t>May an engineer who supports tenant A see tenant B's traces? If no: separate projects</a:t>
+            </a:r>
+          </a:p>
+          <a:p>
+            <a:pPr marL="292608" indent="-292608">
+              <a:lnSpc>
+                <a:spcPct val="120000"/>
+              </a:lnSpc>
+              <a:spcAft>
+                <a:spcPts val="1260"/>
+              </a:spcAft>
+              <a:buClr>
+                <a:srgbClr val="00D4AA"/>
+              </a:buClr>
+              <a:buFont typeface="Inter"/>
+              <a:buChar char="•"/>
+            </a:pPr>
+            <a:r>
+              <a:rPr sz="1800" b="0">
+                <a:solidFill>
+                  <a:srgbClr val="FFFFFF"/>
+                </a:solidFill>
+                <a:latin typeface="Inter"/>
+              </a:rPr>
+              <a:t>Are tenants different legal entities or jurisdictions? If yes: separate projects, maybe separate regions</a:t>
+            </a:r>
+          </a:p>
+          <a:p>
+            <a:pPr marL="292608" indent="-292608">
+              <a:lnSpc>
+                <a:spcPct val="120000"/>
+              </a:lnSpc>
+              <a:spcAft>
+                <a:spcPts val="1260"/>
+              </a:spcAft>
+              <a:buClr>
+                <a:srgbClr val="00D4AA"/>
+              </a:buClr>
+              <a:buFont typeface="Inter"/>
+              <a:buChar char="•"/>
+            </a:pPr>
+            <a:r>
+              <a:rPr sz="1800" b="0">
+                <a:solidFill>
+                  <a:srgbClr val="FFFFFF"/>
+                </a:solidFill>
+                <a:latin typeface="Inter"/>
+              </a:rPr>
+              <a:t>Do you need cross-tenant dashboards (the showback, 6.3)? If yes: tags, or aggregate outside Langfuse</a:t>
+            </a:r>
+          </a:p>
+          <a:p>
+            <a:pPr marL="292608" indent="-292608">
+              <a:lnSpc>
+                <a:spcPct val="120000"/>
+              </a:lnSpc>
+              <a:spcAft>
+                <a:spcPts val="1260"/>
+              </a:spcAft>
+              <a:buClr>
+                <a:srgbClr val="00D4AA"/>
+              </a:buClr>
+              <a:buFont typeface="Inter"/>
+              <a:buChar char="•"/>
+            </a:pPr>
+            <a:r>
+              <a:rPr sz="1800" b="0">
+                <a:solidFill>
+                  <a:srgbClr val="FFFFFF"/>
+                </a:solidFill>
+                <a:latin typeface="Inter"/>
+              </a:rPr>
+              <a:t>Northwind: four departments of one company, one legal entity, shared support team, showback needed → tags in one project</a:t>
+            </a:r>
+          </a:p>
+          <a:p>
+            <a:pPr marL="292608" indent="-292608">
+              <a:lnSpc>
+                <a:spcPct val="120000"/>
+              </a:lnSpc>
+              <a:spcAft>
+                <a:spcPts val="1260"/>
+              </a:spcAft>
+              <a:buClr>
+                <a:srgbClr val="00D4AA"/>
+              </a:buClr>
+              <a:buFont typeface="Inter"/>
+              <a:buChar char="•"/>
+            </a:pPr>
+            <a:r>
+              <a:rPr sz="1800" b="0">
+                <a:solidFill>
+                  <a:srgbClr val="FFFFFF"/>
+                </a:solidFill>
+                <a:latin typeface="Inter"/>
+              </a:rPr>
+              <a:t>A SaaS with external customers → project per customer, aggregates in Prometheus</a:t>
             </a:r>
           </a:p>
         </p:txBody>
@@ -8394,7 +8955,7 @@
                 </a:solidFill>
                 <a:latin typeface="Inter"/>
               </a:rPr>
-              <a:t>AI Agent Observability &amp; Cost Control · Section 10 · Lecture 10.4</a:t>
+              <a:t>AI Agent Observability &amp; Cost Control · Section 10 · Lecture 10.3</a:t>
             </a:r>
           </a:p>
         </p:txBody>
@@ -8407,77 +8968,8 @@
         </p:nvSpPr>
         <p:spPr>
           <a:xfrm>
-            <a:off x="6675120" y="320040"/>
-            <a:ext cx="5074920" cy="548640"/>
-          </a:xfrm>
-          <a:prstGeom prst="rect">
-            <a:avLst/>
-          </a:prstGeom>
-          <a:noFill/>
-        </p:spPr>
-        <p:txBody>
-          <a:bodyPr wrap="square" lIns="45720" rIns="45720" tIns="27432" bIns="27432" anchor="t">
-            <a:spAutoFit/>
-          </a:bodyPr>
-          <a:lstStyle/>
-          <a:p>
-            <a:pPr algn="r"/>
-            <a:r>
-              <a:rPr sz="1000" b="0">
-                <a:solidFill>
-                  <a:srgbClr val="94A3B8"/>
-                </a:solidFill>
-                <a:latin typeface="Inter"/>
-              </a:rPr>
-              <a:t>SECTION 10 · PRIVACY, SECURITY AND GOVERNANCE OF TELEMETRY</a:t>
-            </a:r>
-          </a:p>
-        </p:txBody>
-      </p:sp>
-      <p:sp>
-        <p:nvSpPr>
-          <p:cNvPr id="4" name="TextBox 3"/>
-          <p:cNvSpPr txBox="1"/>
-          <p:nvPr/>
-        </p:nvSpPr>
-        <p:spPr>
-          <a:xfrm>
-            <a:off x="914400" y="1417320"/>
-            <a:ext cx="10332720" cy="457200"/>
-          </a:xfrm>
-          <a:prstGeom prst="rect">
-            <a:avLst/>
-          </a:prstGeom>
-          <a:noFill/>
-        </p:spPr>
-        <p:txBody>
-          <a:bodyPr wrap="square" lIns="45720" rIns="45720" tIns="27432" bIns="27432" anchor="t">
-            <a:spAutoFit/>
-          </a:bodyPr>
-          <a:lstStyle/>
-          <a:p>
-            <a:r>
-              <a:rPr sz="1200" b="1">
-                <a:solidFill>
-                  <a:srgbClr val="00D4AA"/>
-                </a:solidFill>
-                <a:latin typeface="Inter"/>
-              </a:rPr>
-              <a:t>LECTURE 10.4</a:t>
-            </a:r>
-          </a:p>
-        </p:txBody>
-      </p:sp>
-      <p:sp>
-        <p:nvSpPr>
-          <p:cNvPr id="5" name="TextBox 4"/>
-          <p:cNvSpPr txBox="1"/>
-          <p:nvPr/>
-        </p:nvSpPr>
-        <p:spPr>
-          <a:xfrm>
-            <a:off x="914400" y="1874519"/>
-            <a:ext cx="10332720" cy="1645920"/>
+            <a:off x="457200" y="411480"/>
+            <a:ext cx="11247120" cy="868680"/>
           </a:xfrm>
           <a:prstGeom prst="rect">
             <a:avLst/>
@@ -8496,27 +8988,27 @@
               </a:lnSpc>
             </a:pPr>
             <a:r>
-              <a:rPr sz="3000" b="1">
+              <a:rPr sz="2600" b="1">
                 <a:solidFill>
                   <a:srgbClr val="FFFFFF"/>
                 </a:solidFill>
                 <a:latin typeface="Inter"/>
               </a:rPr>
-              <a:t>Regulatory logging obligations (not legal advice)</a:t>
-            </a:r>
-          </a:p>
-        </p:txBody>
-      </p:sp>
-      <p:sp>
-        <p:nvSpPr>
-          <p:cNvPr id="6" name="Rectangle 5"/>
+              <a:t>Access to the other destinations</a:t>
+            </a:r>
+          </a:p>
+        </p:txBody>
+      </p:sp>
+      <p:sp>
+        <p:nvSpPr>
+          <p:cNvPr id="4" name="Rectangle 3"/>
           <p:cNvSpPr/>
           <p:nvPr/>
         </p:nvSpPr>
         <p:spPr>
           <a:xfrm>
-            <a:off x="914400" y="3794760"/>
-            <a:ext cx="64008" cy="1143000"/>
+            <a:off x="502920" y="1024128"/>
+            <a:ext cx="822960" cy="54864"/>
           </a:xfrm>
           <a:prstGeom prst="rect">
             <a:avLst/>
@@ -8551,14 +9043,14 @@
       </p:sp>
       <p:sp>
         <p:nvSpPr>
-          <p:cNvPr id="7" name="TextBox 6"/>
+          <p:cNvPr id="5" name="TextBox 4"/>
           <p:cNvSpPr txBox="1"/>
           <p:nvPr/>
         </p:nvSpPr>
         <p:spPr>
           <a:xfrm>
-            <a:off x="1188720" y="3749039"/>
-            <a:ext cx="9692640" cy="1280160"/>
+            <a:off x="640080" y="1417320"/>
+            <a:ext cx="10881360" cy="4892040"/>
           </a:xfrm>
           <a:prstGeom prst="rect">
             <a:avLst/>
@@ -8566,24 +9058,146 @@
           <a:noFill/>
         </p:spPr>
         <p:txBody>
-          <a:bodyPr wrap="square" lIns="45720" rIns="45720" tIns="27432" bIns="27432" anchor="ctr">
+          <a:bodyPr wrap="square" lIns="45720" rIns="45720" tIns="27432" bIns="27432" anchor="t">
             <a:spAutoFit/>
           </a:bodyPr>
           <a:lstStyle/>
           <a:p>
-            <a:pPr>
+            <a:pPr marL="292608" indent="-292608">
               <a:lnSpc>
-                <a:spcPct val="130000"/>
+                <a:spcPct val="120000"/>
               </a:lnSpc>
+              <a:spcAft>
+                <a:spcPts val="1260"/>
+              </a:spcAft>
+              <a:buClr>
+                <a:srgbClr val="00D4AA"/>
+              </a:buClr>
+              <a:buFont typeface="Inter"/>
+              <a:buChar char="•"/>
             </a:pPr>
             <a:r>
-              <a:rPr sz="1600" b="0">
-                <a:solidFill>
-                  <a:srgbClr val="CBD5E1"/>
-                </a:solidFill>
-                <a:latin typeface="Inter"/>
-              </a:rPr>
-              <a:t>Some rules require you to keep an audit trail of what your agent did; know the shape of those obligations, build the…</a:t>
+              <a:rPr sz="1800" b="0">
+                <a:solidFill>
+                  <a:srgbClr val="FFFFFF"/>
+                </a:solidFill>
+                <a:latin typeface="Inter"/>
+              </a:rPr>
+              <a:t>Collector: runs in your network; config in git; exporters use secrets from the environment, never from the YAML</a:t>
+            </a:r>
+          </a:p>
+          <a:p>
+            <a:pPr marL="292608" indent="-292608">
+              <a:lnSpc>
+                <a:spcPct val="120000"/>
+              </a:lnSpc>
+              <a:spcAft>
+                <a:spcPts val="1260"/>
+              </a:spcAft>
+              <a:buClr>
+                <a:srgbClr val="00D4AA"/>
+              </a:buClr>
+              <a:buFont typeface="Inter"/>
+              <a:buChar char="•"/>
+            </a:pPr>
+            <a:r>
+              <a:rPr sz="1800" b="0">
+                <a:solidFill>
+                  <a:srgbClr val="FFFFFF"/>
+                </a:solidFill>
+                <a:latin typeface="Inter"/>
+              </a:rPr>
+              <a:t>Logs: same retention as traces; PII masked at the source, so the wide audience is acceptable</a:t>
+            </a:r>
+          </a:p>
+          <a:p>
+            <a:pPr marL="292608" indent="-292608">
+              <a:lnSpc>
+                <a:spcPct val="120000"/>
+              </a:lnSpc>
+              <a:spcAft>
+                <a:spcPts val="1260"/>
+              </a:spcAft>
+              <a:buClr>
+                <a:srgbClr val="00D4AA"/>
+              </a:buClr>
+              <a:buFont typeface="Inter"/>
+              <a:buChar char="•"/>
+            </a:pPr>
+            <a:r>
+              <a:rPr sz="1800" b="0">
+                <a:solidFill>
+                  <a:srgbClr val="FFFFFF"/>
+                </a:solidFill>
+                <a:latin typeface="Inter"/>
+              </a:rPr>
+              <a:t>Prometheus and Grafana: viewer accounts for stakeholders; the compose default admin password is for the lab only</a:t>
+            </a:r>
+          </a:p>
+          <a:p>
+            <a:pPr marL="292608" indent="-292608">
+              <a:lnSpc>
+                <a:spcPct val="120000"/>
+              </a:lnSpc>
+              <a:spcAft>
+                <a:spcPts val="1260"/>
+              </a:spcAft>
+              <a:buClr>
+                <a:srgbClr val="00D4AA"/>
+              </a:buClr>
+              <a:buFont typeface="Inter"/>
+              <a:buChar char="•"/>
+            </a:pPr>
+            <a:r>
+              <a:rPr sz="1800" b="0">
+                <a:solidFill>
+                  <a:srgbClr val="FFFFFF"/>
+                </a:solidFill>
+                <a:latin typeface="Inter"/>
+              </a:rPr>
+              <a:t>Judge provider: check the data terms; prefer zero-retention endpoints where offered; masked inputs regardless</a:t>
+            </a:r>
+          </a:p>
+          <a:p>
+            <a:pPr marL="292608" indent="-292608">
+              <a:lnSpc>
+                <a:spcPct val="120000"/>
+              </a:lnSpc>
+              <a:spcAft>
+                <a:spcPts val="1260"/>
+              </a:spcAft>
+              <a:buClr>
+                <a:srgbClr val="00D4AA"/>
+              </a:buClr>
+              <a:buFont typeface="Inter"/>
+              <a:buChar char="•"/>
+            </a:pPr>
+            <a:r>
+              <a:rPr sz="1800" b="0">
+                <a:solidFill>
+                  <a:srgbClr val="FFFFFF"/>
+                </a:solidFill>
+                <a:latin typeface="Inter"/>
+              </a:rPr>
+              <a:t>Laptops: </a:t>
+            </a:r>
+            <a:r>
+              <a:rPr sz="1656" b="0">
+                <a:solidFill>
+                  <a:srgbClr val="00D4AA"/>
+                </a:solidFill>
+                <a:latin typeface="JetBrains Mono"/>
+              </a:rPr>
+              <a:t>OFFLINE=1</a:t>
+            </a:r>
+            <a:r>
+              <a:rPr sz="1800" b="0">
+                <a:solidFill>
+                  <a:srgbClr val="FFFFFF"/>
+                </a:solidFill>
+                <a:latin typeface="Inter"/>
+              </a:rPr>
+              <a:t> uses synthetic data; a real-data export needs a ticket and a deletion date</a:t>
             </a:r>
           </a:p>
         </p:txBody>
@@ -8643,7 +9257,7 @@
                 </a:solidFill>
                 <a:latin typeface="Inter"/>
               </a:rPr>
-              <a:t>AI Agent Observability &amp; Cost Control · Section 10 · Lecture 10.4</a:t>
+              <a:t>AI Agent Observability &amp; Cost Control · Section 10 · Lecture 10.3</a:t>
             </a:r>
           </a:p>
         </p:txBody>
@@ -8682,7 +9296,7 @@
                 </a:solidFill>
                 <a:latin typeface="Inter"/>
               </a:rPr>
-              <a:t>Why "delete everything" is also wrong</a:t>
+              <a:t>The checklist</a:t>
             </a:r>
           </a:p>
         </p:txBody>
@@ -8765,13 +9379,22 @@
               <a:buChar char="•"/>
             </a:pPr>
             <a:r>
+              <a:rPr sz="1656" b="0">
+                <a:solidFill>
+                  <a:srgbClr val="00D4AA"/>
+                </a:solidFill>
+                <a:latin typeface="JetBrains Mono"/>
+              </a:rPr>
+              <a:t>10-resources/telemetry-governance-checklist.md</a:t>
+            </a:r>
+            <a:r>
               <a:rPr sz="1800" b="0">
                 <a:solidFill>
                   <a:srgbClr val="FFFFFF"/>
                 </a:solidFill>
                 <a:latin typeface="Inter"/>
               </a:rPr>
-              <a:t>Section 10 so far: collect less, keep it shorter, restrict who reads it</a:t>
+              <a:t>: retention table, project and role map, tenant decision, destinations and their owners</a:t>
             </a:r>
           </a:p>
           <a:p>
@@ -8795,7 +9418,7 @@
                 </a:solidFill>
                 <a:latin typeface="Inter"/>
               </a:rPr>
-              <a:t>Some regulations require the opposite for specific records: keep an audit trail, for a minimum period</a:t>
+              <a:t>Fill it once, date it, review quarterly</a:t>
             </a:r>
           </a:p>
           <a:p>
@@ -8819,7 +9442,7 @@
                 </a:solidFill>
                 <a:latin typeface="Inter"/>
               </a:rPr>
-              <a:t>The two are compatible: a small, deliberate audit trail; short-lived, masked debugging telemetry</a:t>
+              <a:t>Every row has an owner and a place where the setting lives</a:t>
             </a:r>
           </a:p>
           <a:p>
@@ -8843,7 +9466,7 @@
                 </a:solidFill>
                 <a:latin typeface="Inter"/>
               </a:rPr>
-              <a:t>The mistake is treating them as one dataset with one retention</a:t>
+              <a:t>It's the document your security team asks for; have it before they ask</a:t>
             </a:r>
           </a:p>
         </p:txBody>
@@ -9031,7 +9654,43 @@
                 </a:solidFill>
                 <a:latin typeface="Inter"/>
               </a:rPr>
-              <a:t>User input: whatever the employee typed, including what they shouldn't have</a:t>
+              <a:t>Identifiers: </a:t>
+            </a:r>
+            <a:r>
+              <a:rPr sz="1656" b="0">
+                <a:solidFill>
+                  <a:srgbClr val="00D4AA"/>
+                </a:solidFill>
+                <a:latin typeface="JetBrains Mono"/>
+              </a:rPr>
+              <a:t>user.id</a:t>
+            </a:r>
+            <a:r>
+              <a:rPr sz="1800" b="0">
+                <a:solidFill>
+                  <a:srgbClr val="FFFFFF"/>
+                </a:solidFill>
+                <a:latin typeface="Inter"/>
+              </a:rPr>
+              <a:t>, </a:t>
+            </a:r>
+            <a:r>
+              <a:rPr sz="1656" b="0">
+                <a:solidFill>
+                  <a:srgbClr val="00D4AA"/>
+                </a:solidFill>
+                <a:latin typeface="JetBrains Mono"/>
+              </a:rPr>
+              <a:t>session.id</a:t>
+            </a:r>
+            <a:r>
+              <a:rPr sz="1800" b="0">
+                <a:solidFill>
+                  <a:srgbClr val="FFFFFF"/>
+                </a:solidFill>
+                <a:latin typeface="Inter"/>
+              </a:rPr>
+              <a:t>, tenant; IPs and emails if you're careless</a:t>
             </a:r>
           </a:p>
           <a:p>
@@ -9055,7 +9714,7 @@
                 </a:solidFill>
                 <a:latin typeface="Inter"/>
               </a:rPr>
-              <a:t>Tool arguments and results: records from ticketing, HR, shipping, sometimes whole documents</a:t>
+              <a:t>User input: whatever the employee typed, including what they shouldn't have</a:t>
             </a:r>
           </a:p>
           <a:p>
@@ -9079,7 +9738,7 @@
                 </a:solidFill>
                 <a:latin typeface="Inter"/>
               </a:rPr>
-              <a:t>The model's output: which may echo any of the above</a:t>
+              <a:t>Tool arguments and results: records from ticketing, HR and shipping, sometimes whole documents</a:t>
             </a:r>
           </a:p>
           <a:p>
@@ -9103,7 +9762,7 @@
                 </a:solidFill>
                 <a:latin typeface="Inter"/>
               </a:rPr>
-              <a:t>Retrieval context: knowledge-base chunks, sometimes internal-only</a:t>
+              <a:t>The model's output: which may echo any of the above</a:t>
             </a:r>
           </a:p>
           <a:p>
@@ -9127,7 +9786,7 @@
                 </a:solidFill>
                 <a:latin typeface="Inter"/>
               </a:rPr>
-              <a:t>Judge inputs (Section 8): all of the above, sent to a second model</a:t>
+              <a:t>Retrieval context: knowledge-base passages, sometimes internal-only</a:t>
             </a:r>
           </a:p>
         </p:txBody>
@@ -9187,7 +9846,7 @@
                 </a:solidFill>
                 <a:latin typeface="Inter"/>
               </a:rPr>
-              <a:t>AI Agent Observability &amp; Cost Control · Section 10 · Lecture 10.4</a:t>
+              <a:t>AI Agent Observability &amp; Cost Control · Section 10 · Lecture 10.3</a:t>
             </a:r>
           </a:p>
         </p:txBody>
@@ -9200,8 +9859,8 @@
         </p:nvSpPr>
         <p:spPr>
           <a:xfrm>
-            <a:off x="457200" y="411480"/>
-            <a:ext cx="11247120" cy="868680"/>
+            <a:off x="1371600" y="822960"/>
+            <a:ext cx="9418320" cy="457200"/>
           </a:xfrm>
           <a:prstGeom prst="rect">
             <a:avLst/>
@@ -9214,11 +9873,42 @@
           </a:bodyPr>
           <a:lstStyle/>
           <a:p>
-            <a:pPr>
-              <a:lnSpc>
-                <a:spcPct val="110000"/>
-              </a:lnSpc>
-            </a:pPr>
+            <a:pPr algn="ctr"/>
+            <a:r>
+              <a:rPr sz="1200" b="1">
+                <a:solidFill>
+                  <a:srgbClr val="00D4AA"/>
+                </a:solidFill>
+                <a:latin typeface="Inter"/>
+              </a:rPr>
+              <a:t>RECAP</a:t>
+            </a:r>
+          </a:p>
+        </p:txBody>
+      </p:sp>
+      <p:sp>
+        <p:nvSpPr>
+          <p:cNvPr id="4" name="TextBox 3"/>
+          <p:cNvSpPr txBox="1"/>
+          <p:nvPr/>
+        </p:nvSpPr>
+        <p:spPr>
+          <a:xfrm>
+            <a:off x="1371600" y="1234440"/>
+            <a:ext cx="9418320" cy="822960"/>
+          </a:xfrm>
+          <a:prstGeom prst="rect">
+            <a:avLst/>
+          </a:prstGeom>
+          <a:noFill/>
+        </p:spPr>
+        <p:txBody>
+          <a:bodyPr wrap="square" lIns="45720" rIns="45720" tIns="27432" bIns="27432" anchor="t">
+            <a:spAutoFit/>
+          </a:bodyPr>
+          <a:lstStyle/>
+          <a:p>
+            <a:pPr algn="ctr"/>
             <a:r>
               <a:rPr sz="2600" b="1">
                 <a:solidFill>
@@ -9226,27 +9916,29 @@
                 </a:solidFill>
                 <a:latin typeface="Inter"/>
               </a:rPr>
-              <a:t>The EU AI Act, in one slide (verify with counsel) (1/2)</a:t>
-            </a:r>
-          </a:p>
-        </p:txBody>
-      </p:sp>
-      <p:sp>
-        <p:nvSpPr>
-          <p:cNvPr id="4" name="Rectangle 3"/>
+              <a:t>Key takeaways</a:t>
+            </a:r>
+          </a:p>
+        </p:txBody>
+      </p:sp>
+      <p:sp>
+        <p:nvSpPr>
+          <p:cNvPr id="5" name="Rounded Rectangle 4"/>
           <p:cNvSpPr/>
           <p:nvPr/>
         </p:nvSpPr>
         <p:spPr>
           <a:xfrm>
-            <a:off x="502920" y="1024128"/>
-            <a:ext cx="822960" cy="54864"/>
-          </a:xfrm>
-          <a:prstGeom prst="rect">
-            <a:avLst/>
+            <a:off x="2011680" y="2514600"/>
+            <a:ext cx="8138160" cy="777240"/>
+          </a:xfrm>
+          <a:prstGeom prst="roundRect">
+            <a:avLst>
+              <a:gd name="adj" fmla="val 6588"/>
+            </a:avLst>
           </a:prstGeom>
           <a:solidFill>
-            <a:srgbClr val="00D4AA"/>
+            <a:srgbClr val="1A2742"/>
           </a:solidFill>
           <a:ln>
             <a:noFill/>
@@ -9275,14 +9967,14 @@
       </p:sp>
       <p:sp>
         <p:nvSpPr>
-          <p:cNvPr id="5" name="TextBox 4"/>
+          <p:cNvPr id="6" name="TextBox 5"/>
           <p:cNvSpPr txBox="1"/>
           <p:nvPr/>
         </p:nvSpPr>
         <p:spPr>
           <a:xfrm>
-            <a:off x="640080" y="1417320"/>
-            <a:ext cx="10881360" cy="4892040"/>
+            <a:off x="2194560" y="2514600"/>
+            <a:ext cx="548640" cy="777240"/>
           </a:xfrm>
           <a:prstGeom prst="rect">
             <a:avLst/>
@@ -9290,128 +9982,277 @@
           <a:noFill/>
         </p:spPr>
         <p:txBody>
-          <a:bodyPr wrap="square" lIns="45720" rIns="45720" tIns="27432" bIns="27432" anchor="t">
+          <a:bodyPr wrap="square" lIns="45720" rIns="45720" tIns="27432" bIns="27432" anchor="ctr">
             <a:spAutoFit/>
           </a:bodyPr>
           <a:lstStyle/>
           <a:p>
-            <a:pPr marL="292608" indent="-292608">
-              <a:lnSpc>
-                <a:spcPct val="120000"/>
-              </a:lnSpc>
-              <a:spcAft>
-                <a:spcPts val="1260"/>
-              </a:spcAft>
-              <a:buClr>
-                <a:srgbClr val="00D4AA"/>
-              </a:buClr>
-              <a:buFont typeface="Inter"/>
-              <a:buChar char="•"/>
-            </a:pPr>
-            <a:r>
-              <a:rPr sz="1800" b="0">
+            <a:r>
+              <a:rPr sz="2200" b="1">
+                <a:solidFill>
+                  <a:srgbClr val="00D4AA"/>
+                </a:solidFill>
+                <a:latin typeface="Inter"/>
+              </a:rPr>
+              <a:t>✓</a:t>
+            </a:r>
+          </a:p>
+        </p:txBody>
+      </p:sp>
+      <p:sp>
+        <p:nvSpPr>
+          <p:cNvPr id="7" name="TextBox 6"/>
+          <p:cNvSpPr txBox="1"/>
+          <p:nvPr/>
+        </p:nvSpPr>
+        <p:spPr>
+          <a:xfrm>
+            <a:off x="2788920" y="2514600"/>
+            <a:ext cx="7223760" cy="777240"/>
+          </a:xfrm>
+          <a:prstGeom prst="rect">
+            <a:avLst/>
+          </a:prstGeom>
+          <a:noFill/>
+        </p:spPr>
+        <p:txBody>
+          <a:bodyPr wrap="square" lIns="45720" rIns="45720" tIns="27432" bIns="27432" anchor="ctr">
+            <a:spAutoFit/>
+          </a:bodyPr>
+          <a:lstStyle/>
+          <a:p>
+            <a:r>
+              <a:rPr sz="1800" b="1">
                 <a:solidFill>
                   <a:srgbClr val="FFFFFF"/>
                 </a:solidFill>
                 <a:latin typeface="Inter"/>
               </a:rPr>
-              <a:t>Applies in tiers; the strict record-keeping rules target "high-risk" systems listed in the Act's annexes</a:t>
-            </a:r>
-          </a:p>
-          <a:p>
-            <a:pPr marL="292608" indent="-292608">
-              <a:lnSpc>
-                <a:spcPct val="120000"/>
-              </a:lnSpc>
-              <a:spcAft>
-                <a:spcPts val="1260"/>
-              </a:spcAft>
-              <a:buClr>
-                <a:srgbClr val="00D4AA"/>
-              </a:buClr>
-              <a:buFont typeface="Inter"/>
-              <a:buChar char="•"/>
-            </a:pPr>
-            <a:r>
-              <a:rPr sz="1800" b="0">
+              <a:t>Retention per data class, written down</a:t>
+            </a:r>
+          </a:p>
+        </p:txBody>
+      </p:sp>
+      <p:sp>
+        <p:nvSpPr>
+          <p:cNvPr id="8" name="Rounded Rectangle 7"/>
+          <p:cNvSpPr/>
+          <p:nvPr/>
+        </p:nvSpPr>
+        <p:spPr>
+          <a:xfrm>
+            <a:off x="2011680" y="3474720"/>
+            <a:ext cx="8138160" cy="777240"/>
+          </a:xfrm>
+          <a:prstGeom prst="roundRect">
+            <a:avLst>
+              <a:gd name="adj" fmla="val 6588"/>
+            </a:avLst>
+          </a:prstGeom>
+          <a:solidFill>
+            <a:srgbClr val="1A2742"/>
+          </a:solidFill>
+          <a:ln>
+            <a:noFill/>
+          </a:ln>
+          <a:effectLst/>
+        </p:spPr>
+        <p:style>
+          <a:lnRef idx="1">
+            <a:schemeClr val="accent1"/>
+          </a:lnRef>
+          <a:fillRef idx="3">
+            <a:schemeClr val="accent1"/>
+          </a:fillRef>
+          <a:effectRef idx="2">
+            <a:schemeClr val="accent1"/>
+          </a:effectRef>
+          <a:fontRef idx="minor">
+            <a:schemeClr val="lt1"/>
+          </a:fontRef>
+        </p:style>
+        <p:txBody>
+          <a:bodyPr rtlCol="0" anchor="ctr"/>
+          <a:lstStyle/>
+          <a:p/>
+        </p:txBody>
+      </p:sp>
+      <p:sp>
+        <p:nvSpPr>
+          <p:cNvPr id="9" name="TextBox 8"/>
+          <p:cNvSpPr txBox="1"/>
+          <p:nvPr/>
+        </p:nvSpPr>
+        <p:spPr>
+          <a:xfrm>
+            <a:off x="2194560" y="3474720"/>
+            <a:ext cx="548640" cy="777240"/>
+          </a:xfrm>
+          <a:prstGeom prst="rect">
+            <a:avLst/>
+          </a:prstGeom>
+          <a:noFill/>
+        </p:spPr>
+        <p:txBody>
+          <a:bodyPr wrap="square" lIns="45720" rIns="45720" tIns="27432" bIns="27432" anchor="ctr">
+            <a:spAutoFit/>
+          </a:bodyPr>
+          <a:lstStyle/>
+          <a:p>
+            <a:r>
+              <a:rPr sz="2200" b="1">
+                <a:solidFill>
+                  <a:srgbClr val="00D4AA"/>
+                </a:solidFill>
+                <a:latin typeface="Inter"/>
+              </a:rPr>
+              <a:t>✓</a:t>
+            </a:r>
+          </a:p>
+        </p:txBody>
+      </p:sp>
+      <p:sp>
+        <p:nvSpPr>
+          <p:cNvPr id="10" name="TextBox 9"/>
+          <p:cNvSpPr txBox="1"/>
+          <p:nvPr/>
+        </p:nvSpPr>
+        <p:spPr>
+          <a:xfrm>
+            <a:off x="2788920" y="3474720"/>
+            <a:ext cx="7223760" cy="777240"/>
+          </a:xfrm>
+          <a:prstGeom prst="rect">
+            <a:avLst/>
+          </a:prstGeom>
+          <a:noFill/>
+        </p:spPr>
+        <p:txBody>
+          <a:bodyPr wrap="square" lIns="45720" rIns="45720" tIns="27432" bIns="27432" anchor="ctr">
+            <a:spAutoFit/>
+          </a:bodyPr>
+          <a:lstStyle/>
+          <a:p>
+            <a:r>
+              <a:rPr sz="1800" b="1">
                 <a:solidFill>
                   <a:srgbClr val="FFFFFF"/>
                 </a:solidFill>
                 <a:latin typeface="Inter"/>
               </a:rPr>
-              <a:t>Employment-related uses are on that list: recruitment, promotion, termination, task allocation, monitoring and evaluation of workers</a:t>
-            </a:r>
-          </a:p>
-          <a:p>
-            <a:pPr marL="292608" indent="-292608">
-              <a:lnSpc>
-                <a:spcPct val="120000"/>
-              </a:lnSpc>
-              <a:spcAft>
-                <a:spcPts val="1260"/>
-              </a:spcAft>
-              <a:buClr>
-                <a:srgbClr val="00D4AA"/>
-              </a:buClr>
-              <a:buFont typeface="Inter"/>
-              <a:buChar char="•"/>
-            </a:pPr>
-            <a:r>
-              <a:rPr sz="1800" b="0">
+              <a:t>One project per environment, least privilege</a:t>
+            </a:r>
+          </a:p>
+        </p:txBody>
+      </p:sp>
+      <p:sp>
+        <p:nvSpPr>
+          <p:cNvPr id="11" name="Rounded Rectangle 10"/>
+          <p:cNvSpPr/>
+          <p:nvPr/>
+        </p:nvSpPr>
+        <p:spPr>
+          <a:xfrm>
+            <a:off x="2011680" y="4434840"/>
+            <a:ext cx="8138160" cy="777240"/>
+          </a:xfrm>
+          <a:prstGeom prst="roundRect">
+            <a:avLst>
+              <a:gd name="adj" fmla="val 6588"/>
+            </a:avLst>
+          </a:prstGeom>
+          <a:solidFill>
+            <a:srgbClr val="1A2742"/>
+          </a:solidFill>
+          <a:ln>
+            <a:noFill/>
+          </a:ln>
+          <a:effectLst/>
+        </p:spPr>
+        <p:style>
+          <a:lnRef idx="1">
+            <a:schemeClr val="accent1"/>
+          </a:lnRef>
+          <a:fillRef idx="3">
+            <a:schemeClr val="accent1"/>
+          </a:fillRef>
+          <a:effectRef idx="2">
+            <a:schemeClr val="accent1"/>
+          </a:effectRef>
+          <a:fontRef idx="minor">
+            <a:schemeClr val="lt1"/>
+          </a:fontRef>
+        </p:style>
+        <p:txBody>
+          <a:bodyPr rtlCol="0" anchor="ctr"/>
+          <a:lstStyle/>
+          <a:p/>
+        </p:txBody>
+      </p:sp>
+      <p:sp>
+        <p:nvSpPr>
+          <p:cNvPr id="12" name="TextBox 11"/>
+          <p:cNvSpPr txBox="1"/>
+          <p:nvPr/>
+        </p:nvSpPr>
+        <p:spPr>
+          <a:xfrm>
+            <a:off x="2194560" y="4434840"/>
+            <a:ext cx="548640" cy="777240"/>
+          </a:xfrm>
+          <a:prstGeom prst="rect">
+            <a:avLst/>
+          </a:prstGeom>
+          <a:noFill/>
+        </p:spPr>
+        <p:txBody>
+          <a:bodyPr wrap="square" lIns="45720" rIns="45720" tIns="27432" bIns="27432" anchor="ctr">
+            <a:spAutoFit/>
+          </a:bodyPr>
+          <a:lstStyle/>
+          <a:p>
+            <a:r>
+              <a:rPr sz="2200" b="1">
+                <a:solidFill>
+                  <a:srgbClr val="00D4AA"/>
+                </a:solidFill>
+                <a:latin typeface="Inter"/>
+              </a:rPr>
+              <a:t>✓</a:t>
+            </a:r>
+          </a:p>
+        </p:txBody>
+      </p:sp>
+      <p:sp>
+        <p:nvSpPr>
+          <p:cNvPr id="13" name="TextBox 12"/>
+          <p:cNvSpPr txBox="1"/>
+          <p:nvPr/>
+        </p:nvSpPr>
+        <p:spPr>
+          <a:xfrm>
+            <a:off x="2788920" y="4434840"/>
+            <a:ext cx="7223760" cy="777240"/>
+          </a:xfrm>
+          <a:prstGeom prst="rect">
+            <a:avLst/>
+          </a:prstGeom>
+          <a:noFill/>
+        </p:spPr>
+        <p:txBody>
+          <a:bodyPr wrap="square" lIns="45720" rIns="45720" tIns="27432" bIns="27432" anchor="ctr">
+            <a:spAutoFit/>
+          </a:bodyPr>
+          <a:lstStyle/>
+          <a:p>
+            <a:r>
+              <a:rPr sz="1800" b="1">
                 <a:solidFill>
                   <a:srgbClr val="FFFFFF"/>
                 </a:solidFill>
                 <a:latin typeface="Inter"/>
               </a:rPr>
-              <a:t>Atlas today answers policy questions, opens tickets, resets passwords: probably not making employment decisions</a:t>
-            </a:r>
-          </a:p>
-          <a:p>
-            <a:pPr marL="292608" indent="-292608">
-              <a:lnSpc>
-                <a:spcPct val="120000"/>
-              </a:lnSpc>
-              <a:spcAft>
-                <a:spcPts val="1260"/>
-              </a:spcAft>
-              <a:buClr>
-                <a:srgbClr val="00D4AA"/>
-              </a:buClr>
-              <a:buFont typeface="Inter"/>
-              <a:buChar char="•"/>
-            </a:pPr>
-            <a:r>
-              <a:rPr sz="1800" b="0">
-                <a:solidFill>
-                  <a:srgbClr val="FFFFFF"/>
-                </a:solidFill>
-                <a:latin typeface="Inter"/>
-              </a:rPr>
-              <a:t>Atlas tomorrow, if it triages leave requests or flags "underperforming" employees: that's a different conversation</a:t>
-            </a:r>
-          </a:p>
-          <a:p>
-            <a:pPr marL="292608" indent="-292608">
-              <a:lnSpc>
-                <a:spcPct val="120000"/>
-              </a:lnSpc>
-              <a:spcAft>
-                <a:spcPts val="1260"/>
-              </a:spcAft>
-              <a:buClr>
-                <a:srgbClr val="00D4AA"/>
-              </a:buClr>
-              <a:buFont typeface="Inter"/>
-              <a:buChar char="•"/>
-            </a:pPr>
-            <a:r>
-              <a:rPr sz="1800" b="0">
-                <a:solidFill>
-                  <a:srgbClr val="FFFFFF"/>
-                </a:solidFill>
-                <a:latin typeface="Inter"/>
-              </a:rPr>
-              <a:t>High-risk obligations include automatic logging of events over the system's lifetime, kept for a minimum period (the Act sets a floor in months; verify the current number), plus human oversight and technical documentation</a:t>
+              <a:t>Tags or projects: ask who may see whom</a:t>
             </a:r>
           </a:p>
         </p:txBody>
@@ -9471,7 +10312,7 @@
                 </a:solidFill>
                 <a:latin typeface="Inter"/>
               </a:rPr>
-              <a:t>AI Agent Observability &amp; Cost Control · Section 10 · Lecture 10.4</a:t>
+              <a:t>AI Agent Observability &amp; Cost Control · Section 10 · Lecture 10.3</a:t>
             </a:r>
           </a:p>
         </p:txBody>
@@ -9484,8 +10325,42 @@
         </p:nvSpPr>
         <p:spPr>
           <a:xfrm>
-            <a:off x="457200" y="411480"/>
-            <a:ext cx="11247120" cy="868680"/>
+            <a:off x="2377440" y="2286000"/>
+            <a:ext cx="1097280" cy="1097280"/>
+          </a:xfrm>
+          <a:prstGeom prst="rect">
+            <a:avLst/>
+          </a:prstGeom>
+          <a:noFill/>
+        </p:spPr>
+        <p:txBody>
+          <a:bodyPr wrap="square" lIns="45720" rIns="45720" tIns="27432" bIns="27432" anchor="ctr">
+            <a:spAutoFit/>
+          </a:bodyPr>
+          <a:lstStyle/>
+          <a:p>
+            <a:r>
+              <a:rPr sz="5400" b="1">
+                <a:solidFill>
+                  <a:srgbClr val="00D4AA"/>
+                </a:solidFill>
+                <a:latin typeface="Inter"/>
+              </a:rPr>
+              <a:t>→</a:t>
+            </a:r>
+          </a:p>
+        </p:txBody>
+      </p:sp>
+      <p:sp>
+        <p:nvSpPr>
+          <p:cNvPr id="4" name="TextBox 3"/>
+          <p:cNvSpPr txBox="1"/>
+          <p:nvPr/>
+        </p:nvSpPr>
+        <p:spPr>
+          <a:xfrm>
+            <a:off x="3566160" y="2148840"/>
+            <a:ext cx="7315200" cy="457200"/>
           </a:xfrm>
           <a:prstGeom prst="rect">
             <a:avLst/>
@@ -9498,63 +10373,16 @@
           </a:bodyPr>
           <a:lstStyle/>
           <a:p>
-            <a:pPr>
-              <a:lnSpc>
-                <a:spcPct val="110000"/>
-              </a:lnSpc>
-            </a:pPr>
-            <a:r>
-              <a:rPr sz="2600" b="1">
-                <a:solidFill>
-                  <a:srgbClr val="FFFFFF"/>
-                </a:solidFill>
-                <a:latin typeface="Inter"/>
-              </a:rPr>
-              <a:t>The EU AI Act, in one slide (verify with counsel) (2/2)</a:t>
-            </a:r>
-          </a:p>
-        </p:txBody>
-      </p:sp>
-      <p:sp>
-        <p:nvSpPr>
-          <p:cNvPr id="4" name="Rectangle 3"/>
-          <p:cNvSpPr/>
-          <p:nvPr/>
-        </p:nvSpPr>
-        <p:spPr>
-          <a:xfrm>
-            <a:off x="502920" y="1024128"/>
-            <a:ext cx="822960" cy="54864"/>
-          </a:xfrm>
-          <a:prstGeom prst="rect">
-            <a:avLst/>
-          </a:prstGeom>
-          <a:solidFill>
-            <a:srgbClr val="00D4AA"/>
-          </a:solidFill>
-          <a:ln>
-            <a:noFill/>
-          </a:ln>
-          <a:effectLst/>
-        </p:spPr>
-        <p:style>
-          <a:lnRef idx="1">
-            <a:schemeClr val="accent1"/>
-          </a:lnRef>
-          <a:fillRef idx="3">
-            <a:schemeClr val="accent1"/>
-          </a:fillRef>
-          <a:effectRef idx="2">
-            <a:schemeClr val="accent1"/>
-          </a:effectRef>
-          <a:fontRef idx="minor">
-            <a:schemeClr val="lt1"/>
-          </a:fontRef>
-        </p:style>
-        <p:txBody>
-          <a:bodyPr rtlCol="0" anchor="ctr"/>
-          <a:lstStyle/>
-          <a:p/>
+            <a:r>
+              <a:rPr sz="1400" b="0">
+                <a:solidFill>
+                  <a:srgbClr val="94A3B8"/>
+                </a:solidFill>
+                <a:latin typeface="Inter"/>
+              </a:rPr>
+              <a:t>Next up:</a:t>
+            </a:r>
+          </a:p>
         </p:txBody>
       </p:sp>
       <p:sp>
@@ -9565,8 +10393,8 @@
         </p:nvSpPr>
         <p:spPr>
           <a:xfrm>
-            <a:off x="640080" y="1417320"/>
-            <a:ext cx="10881360" cy="4892040"/>
+            <a:off x="3566160" y="2560320"/>
+            <a:ext cx="7315200" cy="1097280"/>
           </a:xfrm>
           <a:prstGeom prst="rect">
             <a:avLst/>
@@ -9579,27 +10407,48 @@
           </a:bodyPr>
           <a:lstStyle/>
           <a:p>
-            <a:pPr marL="292608" indent="-292608">
-              <a:lnSpc>
-                <a:spcPct val="120000"/>
-              </a:lnSpc>
-              <a:spcAft>
-                <a:spcPts val="1539"/>
-              </a:spcAft>
-              <a:buClr>
-                <a:srgbClr val="00D4AA"/>
-              </a:buClr>
-              <a:buFont typeface="Inter"/>
-              <a:buChar char="•"/>
-            </a:pPr>
-            <a:r>
-              <a:rPr sz="2200" b="0">
+            <a:r>
+              <a:rPr sz="2600" b="1">
                 <a:solidFill>
                   <a:srgbClr val="FFFFFF"/>
                 </a:solidFill>
                 <a:latin typeface="Inter"/>
               </a:rPr>
-              <a:t>Also: general transparency duties for AI that interacts with people; telling users they're talking to an AI</a:t>
+              <a:t>Regulatory logging obligations (not legal advice)</a:t>
+            </a:r>
+          </a:p>
+        </p:txBody>
+      </p:sp>
+      <p:sp>
+        <p:nvSpPr>
+          <p:cNvPr id="6" name="TextBox 5"/>
+          <p:cNvSpPr txBox="1"/>
+          <p:nvPr/>
+        </p:nvSpPr>
+        <p:spPr>
+          <a:xfrm>
+            <a:off x="3566160" y="3703320"/>
+            <a:ext cx="7315200" cy="1097280"/>
+          </a:xfrm>
+          <a:prstGeom prst="rect">
+            <a:avLst/>
+          </a:prstGeom>
+          <a:noFill/>
+        </p:spPr>
+        <p:txBody>
+          <a:bodyPr wrap="square" lIns="45720" rIns="45720" tIns="27432" bIns="27432" anchor="t">
+            <a:spAutoFit/>
+          </a:bodyPr>
+          <a:lstStyle/>
+          <a:p>
+            <a:r>
+              <a:rPr sz="1400" b="0">
+                <a:solidFill>
+                  <a:srgbClr val="94A3B8"/>
+                </a:solidFill>
+                <a:latin typeface="Inter"/>
+              </a:rPr>
+              <a:t>Everything so far is about keeping less.</a:t>
             </a:r>
           </a:p>
         </p:txBody>
@@ -9672,8 +10521,77 @@
         </p:nvSpPr>
         <p:spPr>
           <a:xfrm>
-            <a:off x="457200" y="411480"/>
-            <a:ext cx="11247120" cy="868680"/>
+            <a:off x="6675120" y="320040"/>
+            <a:ext cx="5074920" cy="548640"/>
+          </a:xfrm>
+          <a:prstGeom prst="rect">
+            <a:avLst/>
+          </a:prstGeom>
+          <a:noFill/>
+        </p:spPr>
+        <p:txBody>
+          <a:bodyPr wrap="square" lIns="45720" rIns="45720" tIns="27432" bIns="27432" anchor="t">
+            <a:spAutoFit/>
+          </a:bodyPr>
+          <a:lstStyle/>
+          <a:p>
+            <a:pPr algn="r"/>
+            <a:r>
+              <a:rPr sz="1000" b="0">
+                <a:solidFill>
+                  <a:srgbClr val="94A3B8"/>
+                </a:solidFill>
+                <a:latin typeface="Inter"/>
+              </a:rPr>
+              <a:t>SECTION 10 · PRIVACY, SECURITY AND GOVERNANCE OF TELEMETRY</a:t>
+            </a:r>
+          </a:p>
+        </p:txBody>
+      </p:sp>
+      <p:sp>
+        <p:nvSpPr>
+          <p:cNvPr id="4" name="TextBox 3"/>
+          <p:cNvSpPr txBox="1"/>
+          <p:nvPr/>
+        </p:nvSpPr>
+        <p:spPr>
+          <a:xfrm>
+            <a:off x="914400" y="1417320"/>
+            <a:ext cx="10332720" cy="457200"/>
+          </a:xfrm>
+          <a:prstGeom prst="rect">
+            <a:avLst/>
+          </a:prstGeom>
+          <a:noFill/>
+        </p:spPr>
+        <p:txBody>
+          <a:bodyPr wrap="square" lIns="45720" rIns="45720" tIns="27432" bIns="27432" anchor="t">
+            <a:spAutoFit/>
+          </a:bodyPr>
+          <a:lstStyle/>
+          <a:p>
+            <a:r>
+              <a:rPr sz="1200" b="1">
+                <a:solidFill>
+                  <a:srgbClr val="00D4AA"/>
+                </a:solidFill>
+                <a:latin typeface="Inter"/>
+              </a:rPr>
+              <a:t>LECTURE 10.4</a:t>
+            </a:r>
+          </a:p>
+        </p:txBody>
+      </p:sp>
+      <p:sp>
+        <p:nvSpPr>
+          <p:cNvPr id="5" name="TextBox 4"/>
+          <p:cNvSpPr txBox="1"/>
+          <p:nvPr/>
+        </p:nvSpPr>
+        <p:spPr>
+          <a:xfrm>
+            <a:off x="914400" y="1874519"/>
+            <a:ext cx="10332720" cy="1645920"/>
           </a:xfrm>
           <a:prstGeom prst="rect">
             <a:avLst/>
@@ -9692,27 +10610,27 @@
               </a:lnSpc>
             </a:pPr>
             <a:r>
-              <a:rPr sz="2600" b="1">
+              <a:rPr sz="3000" b="1">
                 <a:solidFill>
                   <a:srgbClr val="FFFFFF"/>
                 </a:solidFill>
                 <a:latin typeface="Inter"/>
               </a:rPr>
-              <a:t>Other rules that touch telemetry (verify which apply to you)</a:t>
-            </a:r>
-          </a:p>
-        </p:txBody>
-      </p:sp>
-      <p:sp>
-        <p:nvSpPr>
-          <p:cNvPr id="4" name="Rectangle 3"/>
+              <a:t>Regulatory logging obligations (not legal advice)</a:t>
+            </a:r>
+          </a:p>
+        </p:txBody>
+      </p:sp>
+      <p:sp>
+        <p:nvSpPr>
+          <p:cNvPr id="6" name="Rectangle 5"/>
           <p:cNvSpPr/>
           <p:nvPr/>
         </p:nvSpPr>
         <p:spPr>
           <a:xfrm>
-            <a:off x="502920" y="1435607"/>
-            <a:ext cx="822960" cy="54864"/>
+            <a:off x="914400" y="3794760"/>
+            <a:ext cx="64008" cy="1143000"/>
           </a:xfrm>
           <a:prstGeom prst="rect">
             <a:avLst/>
@@ -9747,14 +10665,14 @@
       </p:sp>
       <p:sp>
         <p:nvSpPr>
-          <p:cNvPr id="5" name="TextBox 4"/>
+          <p:cNvPr id="7" name="TextBox 6"/>
           <p:cNvSpPr txBox="1"/>
           <p:nvPr/>
         </p:nvSpPr>
         <p:spPr>
           <a:xfrm>
-            <a:off x="640080" y="1828800"/>
-            <a:ext cx="10881360" cy="4480560"/>
+            <a:off x="1188720" y="3749039"/>
+            <a:ext cx="9692640" cy="1280160"/>
           </a:xfrm>
           <a:prstGeom prst="rect">
             <a:avLst/>
@@ -9762,104 +10680,24 @@
           <a:noFill/>
         </p:spPr>
         <p:txBody>
-          <a:bodyPr wrap="square" lIns="45720" rIns="45720" tIns="27432" bIns="27432" anchor="t">
+          <a:bodyPr wrap="square" lIns="45720" rIns="45720" tIns="27432" bIns="27432" anchor="ctr">
             <a:spAutoFit/>
           </a:bodyPr>
           <a:lstStyle/>
           <a:p>
-            <a:pPr marL="292608" indent="-292608">
+            <a:pPr>
               <a:lnSpc>
-                <a:spcPct val="120000"/>
+                <a:spcPct val="130000"/>
               </a:lnSpc>
-              <a:spcAft>
-                <a:spcPts val="1260"/>
-              </a:spcAft>
-              <a:buClr>
-                <a:srgbClr val="00D4AA"/>
-              </a:buClr>
-              <a:buFont typeface="Inter"/>
-              <a:buChar char="•"/>
             </a:pPr>
             <a:r>
-              <a:rPr sz="1800" b="0">
-                <a:solidFill>
-                  <a:srgbClr val="FFFFFF"/>
-                </a:solidFill>
-                <a:latin typeface="Inter"/>
-              </a:rPr>
-              <a:t>GDPR and similar: traces are personal data; lawful basis, minimisation, purpose limitation, and subject rights apply. Access and erasure requests reach your tracing backend. The hash in 10.2 is how you find one person's traces</a:t>
-            </a:r>
-          </a:p>
-          <a:p>
-            <a:pPr marL="292608" indent="-292608">
-              <a:lnSpc>
-                <a:spcPct val="120000"/>
-              </a:lnSpc>
-              <a:spcAft>
-                <a:spcPts val="1260"/>
-              </a:spcAft>
-              <a:buClr>
-                <a:srgbClr val="00D4AA"/>
-              </a:buClr>
-              <a:buFont typeface="Inter"/>
-              <a:buChar char="•"/>
-            </a:pPr>
-            <a:r>
-              <a:rPr sz="1800" b="0">
-                <a:solidFill>
-                  <a:srgbClr val="FFFFFF"/>
-                </a:solidFill>
-                <a:latin typeface="Inter"/>
-              </a:rPr>
-              <a:t>Sector rules: health (HIPAA), finance (GLBA, PCI DSS for card data: the six card numbers from 10.1 are a PCI event if stored raw)</a:t>
-            </a:r>
-          </a:p>
-          <a:p>
-            <a:pPr marL="292608" indent="-292608">
-              <a:lnSpc>
-                <a:spcPct val="120000"/>
-              </a:lnSpc>
-              <a:spcAft>
-                <a:spcPts val="1260"/>
-              </a:spcAft>
-              <a:buClr>
-                <a:srgbClr val="00D4AA"/>
-              </a:buClr>
-              <a:buFont typeface="Inter"/>
-              <a:buChar char="•"/>
-            </a:pPr>
-            <a:r>
-              <a:rPr sz="1800" b="0">
-                <a:solidFill>
-                  <a:srgbClr val="FFFFFF"/>
-                </a:solidFill>
-                <a:latin typeface="Inter"/>
-              </a:rPr>
-              <a:t>Audit and assurance: SOC 2, ISO 27001: expect "show me who accessed what, when"</a:t>
-            </a:r>
-          </a:p>
-          <a:p>
-            <a:pPr marL="292608" indent="-292608">
-              <a:lnSpc>
-                <a:spcPct val="120000"/>
-              </a:lnSpc>
-              <a:spcAft>
-                <a:spcPts val="1260"/>
-              </a:spcAft>
-              <a:buClr>
-                <a:srgbClr val="00D4AA"/>
-              </a:buClr>
-              <a:buFont typeface="Inter"/>
-              <a:buChar char="•"/>
-            </a:pPr>
-            <a:r>
-              <a:rPr sz="1800" b="0">
-                <a:solidFill>
-                  <a:srgbClr val="FFFFFF"/>
-                </a:solidFill>
-                <a:latin typeface="Inter"/>
-              </a:rPr>
-              <a:t>Contracts: your enterprise customers' DPAs may set retention and location; your vendor's DPA sets theirs</a:t>
+              <a:rPr sz="1600" b="0">
+                <a:solidFill>
+                  <a:srgbClr val="CBD5E1"/>
+                </a:solidFill>
+                <a:latin typeface="Inter"/>
+              </a:rPr>
+              <a:t>Some rules require you to keep an audit trail of what your agent did; know the shape of those obligations, build the…</a:t>
             </a:r>
           </a:p>
         </p:txBody>
@@ -9958,7 +10796,7 @@
                 </a:solidFill>
                 <a:latin typeface="Inter"/>
               </a:rPr>
-              <a:t>An audit trail for an agent (what to keep, long)</a:t>
+              <a:t>Why "delete everything" is also wrong</a:t>
             </a:r>
           </a:p>
         </p:txBody>
@@ -10047,7 +10885,7 @@
                 </a:solidFill>
                 <a:latin typeface="Inter"/>
               </a:rPr>
-              <a:t>Per request: timestamp, trace id, hashed user, tenant, prompt name and version, model and version actually served, tool calls with arguments hashed or summarised, decisions taken (ticket created, password reset, escalated to human), guardrail outcomes, the final answer's hash</a:t>
+              <a:t>Section 10 so far: collect less, keep it shorter, restrict who reads it</a:t>
             </a:r>
           </a:p>
           <a:p>
@@ -10071,7 +10909,7 @@
                 </a:solidFill>
                 <a:latin typeface="Inter"/>
               </a:rPr>
-              <a:t>Not the raw prompt, not the raw tool results, not the retrieval chunks</a:t>
+              <a:t>Some regulations require the opposite for specific records: keep an audit trail, for a minimum period</a:t>
             </a:r>
           </a:p>
           <a:p>
@@ -10095,7 +10933,7 @@
                 </a:solidFill>
                 <a:latin typeface="Inter"/>
               </a:rPr>
-              <a:t>Built from spans you already emit (Sections 3 to 5); a small exporter writes one line per request to an append-only store</a:t>
+              <a:t>The two are compatible: a small, deliberate audit trail; short-lived, masked debugging telemetry</a:t>
             </a:r>
           </a:p>
           <a:p>
@@ -10119,7 +10957,7 @@
                 </a:solidFill>
                 <a:latin typeface="Inter"/>
               </a:rPr>
-              <a:t>Retention: long, per counsel; access: narrower than debugging telemetry</a:t>
+              <a:t>The mistake is treating them as one dataset with one retention</a:t>
             </a:r>
           </a:p>
         </p:txBody>
@@ -10218,7 +11056,7 @@
                 </a:solidFill>
                 <a:latin typeface="Inter"/>
               </a:rPr>
-              <a:t>What never to log, anywhere</a:t>
+              <a:t>The EU AI Act, in one slide (verify with counsel) (1/2)</a:t>
             </a:r>
           </a:p>
         </p:txBody>
@@ -10307,16 +11145,7 @@
                 </a:solidFill>
                 <a:latin typeface="Inter"/>
               </a:rPr>
-              <a:t>Credentials and secrets: passwords, tokens, the answers to identity verification questions in </a:t>
-            </a:r>
-            <a:r>
-              <a:rPr sz="1656" b="0">
-                <a:solidFill>
-                  <a:srgbClr val="00D4AA"/>
-                </a:solidFill>
-                <a:latin typeface="JetBrains Mono"/>
-              </a:rPr>
-              <a:t>reset_password</a:t>
+              <a:t>Applies in tiers; the strict record-keeping rules target "high-risk" systems listed in the Act's annexes</a:t>
             </a:r>
           </a:p>
           <a:p>
@@ -10340,7 +11169,7 @@
                 </a:solidFill>
                 <a:latin typeface="Inter"/>
               </a:rPr>
-              <a:t>Full payment card numbers, bank details</a:t>
+              <a:t>Employment-related uses are on that list: recruitment, promotion, termination, task allocation, monitoring and evaluation of workers</a:t>
             </a:r>
           </a:p>
           <a:p>
@@ -10364,7 +11193,7 @@
                 </a:solidFill>
                 <a:latin typeface="Inter"/>
               </a:rPr>
-              <a:t>Special-category data: health, biometrics, beliefs; if the helpdesk sees it, mask it at the source</a:t>
+              <a:t>Atlas today answers policy questions, opens tickets, resets passwords: probably not making employment decisions</a:t>
             </a:r>
           </a:p>
           <a:p>
@@ -10388,7 +11217,7 @@
                 </a:solidFill>
                 <a:latin typeface="Inter"/>
               </a:rPr>
-              <a:t>Raw content of a suspected prompt injection beyond what security needs</a:t>
+              <a:t>Atlas tomorrow, if it triages leave requests or flags "underperforming" employees: that's a different conversation</a:t>
             </a:r>
           </a:p>
           <a:p>
@@ -10412,7 +11241,7 @@
                 </a:solidFill>
                 <a:latin typeface="Inter"/>
               </a:rPr>
-              <a:t>Anything the DPA with your vendor prohibits sending to that vendor</a:t>
+              <a:t>High-risk obligations include automatic logging of events over the system's lifetime, kept for a minimum period (the Act sets a floor in months; verify the current number), plus human oversight and technical documentation</a:t>
             </a:r>
           </a:p>
         </p:txBody>
@@ -10511,7 +11340,7 @@
                 </a:solidFill>
                 <a:latin typeface="Inter"/>
               </a:rPr>
-              <a:t>Questions to take to counsel and the DPO (1/2)</a:t>
+              <a:t>The EU AI Act, in one slide (verify with counsel) (2/2)</a:t>
             </a:r>
           </a:p>
         </p:txBody>
@@ -10585,7 +11414,7 @@
                 <a:spcPct val="120000"/>
               </a:lnSpc>
               <a:spcAft>
-                <a:spcPts val="1260"/>
+                <a:spcPts val="1539"/>
               </a:spcAft>
               <a:buClr>
                 <a:srgbClr val="00D4AA"/>
@@ -10594,109 +11423,13 @@
               <a:buChar char="•"/>
             </a:pPr>
             <a:r>
-              <a:rPr sz="1800" b="0">
+              <a:rPr sz="2200" b="0">
                 <a:solidFill>
                   <a:srgbClr val="FFFFFF"/>
                 </a:solidFill>
                 <a:latin typeface="Inter"/>
               </a:rPr>
-              <a:t>Is Atlas, or any planned feature, in scope for high-risk obligations under the AI Act or a national equivalent?</a:t>
-            </a:r>
-          </a:p>
-          <a:p>
-            <a:pPr marL="292608" indent="-292608">
-              <a:lnSpc>
-                <a:spcPct val="120000"/>
-              </a:lnSpc>
-              <a:spcAft>
-                <a:spcPts val="1260"/>
-              </a:spcAft>
-              <a:buClr>
-                <a:srgbClr val="00D4AA"/>
-              </a:buClr>
-              <a:buFont typeface="Inter"/>
-              <a:buChar char="•"/>
-            </a:pPr>
-            <a:r>
-              <a:rPr sz="1800" b="0">
-                <a:solidFill>
-                  <a:srgbClr val="FFFFFF"/>
-                </a:solidFill>
-                <a:latin typeface="Inter"/>
-              </a:rPr>
-              <a:t>What is our lawful basis for processing employee data in traces, and does the retention table match it?</a:t>
-            </a:r>
-          </a:p>
-          <a:p>
-            <a:pPr marL="292608" indent="-292608">
-              <a:lnSpc>
-                <a:spcPct val="120000"/>
-              </a:lnSpc>
-              <a:spcAft>
-                <a:spcPts val="1260"/>
-              </a:spcAft>
-              <a:buClr>
-                <a:srgbClr val="00D4AA"/>
-              </a:buClr>
-              <a:buFont typeface="Inter"/>
-              <a:buChar char="•"/>
-            </a:pPr>
-            <a:r>
-              <a:rPr sz="1800" b="0">
-                <a:solidFill>
-                  <a:srgbClr val="FFFFFF"/>
-                </a:solidFill>
-                <a:latin typeface="Inter"/>
-              </a:rPr>
-              <a:t>What is the minimum audit-trail retention that applies to us, and what must it contain?</a:t>
-            </a:r>
-          </a:p>
-          <a:p>
-            <a:pPr marL="292608" indent="-292608">
-              <a:lnSpc>
-                <a:spcPct val="120000"/>
-              </a:lnSpc>
-              <a:spcAft>
-                <a:spcPts val="1260"/>
-              </a:spcAft>
-              <a:buClr>
-                <a:srgbClr val="00D4AA"/>
-              </a:buClr>
-              <a:buFont typeface="Inter"/>
-              <a:buChar char="•"/>
-            </a:pPr>
-            <a:r>
-              <a:rPr sz="1800" b="0">
-                <a:solidFill>
-                  <a:srgbClr val="FFFFFF"/>
-                </a:solidFill>
-                <a:latin typeface="Inter"/>
-              </a:rPr>
-              <a:t>Does our tracing vendor's DPA cover the data we send, in the region we send it to?</a:t>
-            </a:r>
-          </a:p>
-          <a:p>
-            <a:pPr marL="292608" indent="-292608">
-              <a:lnSpc>
-                <a:spcPct val="120000"/>
-              </a:lnSpc>
-              <a:spcAft>
-                <a:spcPts val="1260"/>
-              </a:spcAft>
-              <a:buClr>
-                <a:srgbClr val="00D4AA"/>
-              </a:buClr>
-              <a:buFont typeface="Inter"/>
-              <a:buChar char="•"/>
-            </a:pPr>
-            <a:r>
-              <a:rPr sz="1800" b="0">
-                <a:solidFill>
-                  <a:srgbClr val="FFFFFF"/>
-                </a:solidFill>
-                <a:latin typeface="Inter"/>
-              </a:rPr>
-              <a:t>How do we fulfil an access or erasure request against traces, scores and datasets?</a:t>
+              <a:t>Also: general transparency duties for AI that interacts with people; telling users they're talking to an AI</a:t>
             </a:r>
           </a:p>
         </p:txBody>
@@ -10795,7 +11528,7 @@
                 </a:solidFill>
                 <a:latin typeface="Inter"/>
               </a:rPr>
-              <a:t>Questions to take to counsel and the DPO (2/2)</a:t>
+              <a:t>Other rules that touch telemetry (verify which apply to you)</a:t>
             </a:r>
           </a:p>
         </p:txBody>
@@ -10808,7 +11541,7 @@
         </p:nvSpPr>
         <p:spPr>
           <a:xfrm>
-            <a:off x="502920" y="1024128"/>
+            <a:off x="502920" y="1435607"/>
             <a:ext cx="822960" cy="54864"/>
           </a:xfrm>
           <a:prstGeom prst="rect">
@@ -10850,8 +11583,8 @@
         </p:nvSpPr>
         <p:spPr>
           <a:xfrm>
-            <a:off x="640080" y="1417320"/>
-            <a:ext cx="10881360" cy="4892040"/>
+            <a:off x="640080" y="1828800"/>
+            <a:ext cx="10881360" cy="4480560"/>
           </a:xfrm>
           <a:prstGeom prst="rect">
             <a:avLst/>
@@ -10869,7 +11602,7 @@
                 <a:spcPct val="120000"/>
               </a:lnSpc>
               <a:spcAft>
-                <a:spcPts val="1539"/>
+                <a:spcPts val="1260"/>
               </a:spcAft>
               <a:buClr>
                 <a:srgbClr val="00D4AA"/>
@@ -10878,13 +11611,85 @@
               <a:buChar char="•"/>
             </a:pPr>
             <a:r>
-              <a:rPr sz="2200" b="0">
+              <a:rPr sz="1800" b="0">
                 <a:solidFill>
                   <a:srgbClr val="FFFFFF"/>
                 </a:solidFill>
                 <a:latin typeface="Inter"/>
               </a:rPr>
-              <a:t>Who signs off the governance checklist, and how often?</a:t>
+              <a:t>GDPR and similar: traces are personal data; lawful basis, minimisation, purpose limitation, and subject rights apply. Access and erasure requests reach your tracing backend. The hash in 10.2 is how you find one person's traces</a:t>
+            </a:r>
+          </a:p>
+          <a:p>
+            <a:pPr marL="292608" indent="-292608">
+              <a:lnSpc>
+                <a:spcPct val="120000"/>
+              </a:lnSpc>
+              <a:spcAft>
+                <a:spcPts val="1260"/>
+              </a:spcAft>
+              <a:buClr>
+                <a:srgbClr val="00D4AA"/>
+              </a:buClr>
+              <a:buFont typeface="Inter"/>
+              <a:buChar char="•"/>
+            </a:pPr>
+            <a:r>
+              <a:rPr sz="1800" b="0">
+                <a:solidFill>
+                  <a:srgbClr val="FFFFFF"/>
+                </a:solidFill>
+                <a:latin typeface="Inter"/>
+              </a:rPr>
+              <a:t>Sector rules: health (HIPAA), finance (GLBA, PCI DSS for card data: a card number stored raw in a trace is a PCI event)</a:t>
+            </a:r>
+          </a:p>
+          <a:p>
+            <a:pPr marL="292608" indent="-292608">
+              <a:lnSpc>
+                <a:spcPct val="120000"/>
+              </a:lnSpc>
+              <a:spcAft>
+                <a:spcPts val="1260"/>
+              </a:spcAft>
+              <a:buClr>
+                <a:srgbClr val="00D4AA"/>
+              </a:buClr>
+              <a:buFont typeface="Inter"/>
+              <a:buChar char="•"/>
+            </a:pPr>
+            <a:r>
+              <a:rPr sz="1800" b="0">
+                <a:solidFill>
+                  <a:srgbClr val="FFFFFF"/>
+                </a:solidFill>
+                <a:latin typeface="Inter"/>
+              </a:rPr>
+              <a:t>Audit and assurance: SOC 2, ISO 27001: expect "show me who accessed what, when"</a:t>
+            </a:r>
+          </a:p>
+          <a:p>
+            <a:pPr marL="292608" indent="-292608">
+              <a:lnSpc>
+                <a:spcPct val="120000"/>
+              </a:lnSpc>
+              <a:spcAft>
+                <a:spcPts val="1260"/>
+              </a:spcAft>
+              <a:buClr>
+                <a:srgbClr val="00D4AA"/>
+              </a:buClr>
+              <a:buFont typeface="Inter"/>
+              <a:buChar char="•"/>
+            </a:pPr>
+            <a:r>
+              <a:rPr sz="1800" b="0">
+                <a:solidFill>
+                  <a:srgbClr val="FFFFFF"/>
+                </a:solidFill>
+                <a:latin typeface="Inter"/>
+              </a:rPr>
+              <a:t>Contracts: your enterprise customers' DPAs may set retention and location; your vendor's DPA sets theirs</a:t>
             </a:r>
           </a:p>
         </p:txBody>
@@ -10957,42 +11762,8 @@
         </p:nvSpPr>
         <p:spPr>
           <a:xfrm>
-            <a:off x="2377440" y="2286000"/>
-            <a:ext cx="1097280" cy="1097280"/>
-          </a:xfrm>
-          <a:prstGeom prst="rect">
-            <a:avLst/>
-          </a:prstGeom>
-          <a:noFill/>
-        </p:spPr>
-        <p:txBody>
-          <a:bodyPr wrap="square" lIns="45720" rIns="45720" tIns="27432" bIns="27432" anchor="ctr">
-            <a:spAutoFit/>
-          </a:bodyPr>
-          <a:lstStyle/>
-          <a:p>
-            <a:r>
-              <a:rPr sz="5400" b="1">
-                <a:solidFill>
-                  <a:srgbClr val="00D4AA"/>
-                </a:solidFill>
-                <a:latin typeface="Inter"/>
-              </a:rPr>
-              <a:t>→</a:t>
-            </a:r>
-          </a:p>
-        </p:txBody>
-      </p:sp>
-      <p:sp>
-        <p:nvSpPr>
-          <p:cNvPr id="4" name="TextBox 3"/>
-          <p:cNvSpPr txBox="1"/>
-          <p:nvPr/>
-        </p:nvSpPr>
-        <p:spPr>
-          <a:xfrm>
-            <a:off x="3566160" y="2148840"/>
-            <a:ext cx="7315200" cy="457200"/>
+            <a:off x="457200" y="411480"/>
+            <a:ext cx="11247120" cy="868680"/>
           </a:xfrm>
           <a:prstGeom prst="rect">
             <a:avLst/>
@@ -11005,16 +11776,63 @@
           </a:bodyPr>
           <a:lstStyle/>
           <a:p>
-            <a:r>
-              <a:rPr sz="1400" b="0">
-                <a:solidFill>
-                  <a:srgbClr val="94A3B8"/>
-                </a:solidFill>
-                <a:latin typeface="Inter"/>
-              </a:rPr>
-              <a:t>Next up:</a:t>
-            </a:r>
-          </a:p>
+            <a:pPr>
+              <a:lnSpc>
+                <a:spcPct val="110000"/>
+              </a:lnSpc>
+            </a:pPr>
+            <a:r>
+              <a:rPr sz="2600" b="1">
+                <a:solidFill>
+                  <a:srgbClr val="FFFFFF"/>
+                </a:solidFill>
+                <a:latin typeface="Inter"/>
+              </a:rPr>
+              <a:t>An audit trail for an agent (what to keep, long)</a:t>
+            </a:r>
+          </a:p>
+        </p:txBody>
+      </p:sp>
+      <p:sp>
+        <p:nvSpPr>
+          <p:cNvPr id="4" name="Rectangle 3"/>
+          <p:cNvSpPr/>
+          <p:nvPr/>
+        </p:nvSpPr>
+        <p:spPr>
+          <a:xfrm>
+            <a:off x="502920" y="1024128"/>
+            <a:ext cx="822960" cy="54864"/>
+          </a:xfrm>
+          <a:prstGeom prst="rect">
+            <a:avLst/>
+          </a:prstGeom>
+          <a:solidFill>
+            <a:srgbClr val="00D4AA"/>
+          </a:solidFill>
+          <a:ln>
+            <a:noFill/>
+          </a:ln>
+          <a:effectLst/>
+        </p:spPr>
+        <p:style>
+          <a:lnRef idx="1">
+            <a:schemeClr val="accent1"/>
+          </a:lnRef>
+          <a:fillRef idx="3">
+            <a:schemeClr val="accent1"/>
+          </a:fillRef>
+          <a:effectRef idx="2">
+            <a:schemeClr val="accent1"/>
+          </a:effectRef>
+          <a:fontRef idx="minor">
+            <a:schemeClr val="lt1"/>
+          </a:fontRef>
+        </p:style>
+        <p:txBody>
+          <a:bodyPr rtlCol="0" anchor="ctr"/>
+          <a:lstStyle/>
+          <a:p/>
         </p:txBody>
       </p:sp>
       <p:sp>
@@ -11025,8 +11843,8 @@
         </p:nvSpPr>
         <p:spPr>
           <a:xfrm>
-            <a:off x="3566160" y="2560320"/>
-            <a:ext cx="7315200" cy="1097280"/>
+            <a:off x="640080" y="1417320"/>
+            <a:ext cx="10881360" cy="4892040"/>
           </a:xfrm>
           <a:prstGeom prst="rect">
             <a:avLst/>
@@ -11039,48 +11857,99 @@
           </a:bodyPr>
           <a:lstStyle/>
           <a:p>
-            <a:r>
-              <a:rPr sz="2600" b="1">
+            <a:pPr marL="292608" indent="-292608">
+              <a:lnSpc>
+                <a:spcPct val="120000"/>
+              </a:lnSpc>
+              <a:spcAft>
+                <a:spcPts val="1260"/>
+              </a:spcAft>
+              <a:buClr>
+                <a:srgbClr val="00D4AA"/>
+              </a:buClr>
+              <a:buFont typeface="Inter"/>
+              <a:buChar char="•"/>
+            </a:pPr>
+            <a:r>
+              <a:rPr sz="1800" b="0">
                 <a:solidFill>
                   <a:srgbClr val="FFFFFF"/>
                 </a:solidFill>
                 <a:latin typeface="Inter"/>
               </a:rPr>
-              <a:t>Quiz: Governance</a:t>
-            </a:r>
-          </a:p>
-        </p:txBody>
-      </p:sp>
-      <p:sp>
-        <p:nvSpPr>
-          <p:cNvPr id="6" name="TextBox 5"/>
-          <p:cNvSpPr txBox="1"/>
-          <p:nvPr/>
-        </p:nvSpPr>
-        <p:spPr>
-          <a:xfrm>
-            <a:off x="3566160" y="3703320"/>
-            <a:ext cx="7315200" cy="1097280"/>
-          </a:xfrm>
-          <a:prstGeom prst="rect">
-            <a:avLst/>
-          </a:prstGeom>
-          <a:noFill/>
-        </p:spPr>
-        <p:txBody>
-          <a:bodyPr wrap="square" lIns="45720" rIns="45720" tIns="27432" bIns="27432" anchor="t">
-            <a:spAutoFit/>
-          </a:bodyPr>
-          <a:lstStyle/>
-          <a:p>
-            <a:r>
-              <a:rPr sz="1400" b="0">
-                <a:solidFill>
-                  <a:srgbClr val="94A3B8"/>
-                </a:solidFill>
-                <a:latin typeface="Inter"/>
-              </a:rPr>
-              <a:t>The Section 10 quiz, and then Section 11, where you go on call and investigate three real-shaped incidents…</a:t>
+              <a:t>Per request: timestamp, trace id, hashed user, tenant, prompt name and version, model and version actually served, tool calls with arguments hashed or summarised, decisions taken (ticket created, password reset, escalated to human), guardrail outcomes, the final answer's hash</a:t>
+            </a:r>
+          </a:p>
+          <a:p>
+            <a:pPr marL="292608" indent="-292608">
+              <a:lnSpc>
+                <a:spcPct val="120000"/>
+              </a:lnSpc>
+              <a:spcAft>
+                <a:spcPts val="1260"/>
+              </a:spcAft>
+              <a:buClr>
+                <a:srgbClr val="00D4AA"/>
+              </a:buClr>
+              <a:buFont typeface="Inter"/>
+              <a:buChar char="•"/>
+            </a:pPr>
+            <a:r>
+              <a:rPr sz="1800" b="0">
+                <a:solidFill>
+                  <a:srgbClr val="FFFFFF"/>
+                </a:solidFill>
+                <a:latin typeface="Inter"/>
+              </a:rPr>
+              <a:t>Not the raw prompt, not the raw tool results, not the retrieval chunks</a:t>
+            </a:r>
+          </a:p>
+          <a:p>
+            <a:pPr marL="292608" indent="-292608">
+              <a:lnSpc>
+                <a:spcPct val="120000"/>
+              </a:lnSpc>
+              <a:spcAft>
+                <a:spcPts val="1260"/>
+              </a:spcAft>
+              <a:buClr>
+                <a:srgbClr val="00D4AA"/>
+              </a:buClr>
+              <a:buFont typeface="Inter"/>
+              <a:buChar char="•"/>
+            </a:pPr>
+            <a:r>
+              <a:rPr sz="1800" b="0">
+                <a:solidFill>
+                  <a:srgbClr val="FFFFFF"/>
+                </a:solidFill>
+                <a:latin typeface="Inter"/>
+              </a:rPr>
+              <a:t>Built from spans you already emit (Sections 3 to 5); a small job writes one line per request to an append-only store</a:t>
+            </a:r>
+          </a:p>
+          <a:p>
+            <a:pPr marL="292608" indent="-292608">
+              <a:lnSpc>
+                <a:spcPct val="120000"/>
+              </a:lnSpc>
+              <a:spcAft>
+                <a:spcPts val="1260"/>
+              </a:spcAft>
+              <a:buClr>
+                <a:srgbClr val="00D4AA"/>
+              </a:buClr>
+              <a:buFont typeface="Inter"/>
+              <a:buChar char="•"/>
+            </a:pPr>
+            <a:r>
+              <a:rPr sz="1800" b="0">
+                <a:solidFill>
+                  <a:srgbClr val="FFFFFF"/>
+                </a:solidFill>
+                <a:latin typeface="Inter"/>
+              </a:rPr>
+              <a:t>Retention: long, per counsel; access: narrower than debugging telemetry</a:t>
             </a:r>
           </a:p>
         </p:txBody>
@@ -11140,7 +12009,7 @@
                 </a:solidFill>
                 <a:latin typeface="Inter"/>
               </a:rPr>
-              <a:t>AI Agent Observability &amp; Cost Control · Section 10 · Lecture 10.5</a:t>
+              <a:t>AI Agent Observability &amp; Cost Control · Section 10 · Lecture 10.4</a:t>
             </a:r>
           </a:p>
         </p:txBody>
@@ -11153,77 +12022,8 @@
         </p:nvSpPr>
         <p:spPr>
           <a:xfrm>
-            <a:off x="6675120" y="320040"/>
-            <a:ext cx="5074920" cy="548640"/>
-          </a:xfrm>
-          <a:prstGeom prst="rect">
-            <a:avLst/>
-          </a:prstGeom>
-          <a:noFill/>
-        </p:spPr>
-        <p:txBody>
-          <a:bodyPr wrap="square" lIns="45720" rIns="45720" tIns="27432" bIns="27432" anchor="t">
-            <a:spAutoFit/>
-          </a:bodyPr>
-          <a:lstStyle/>
-          <a:p>
-            <a:pPr algn="r"/>
-            <a:r>
-              <a:rPr sz="1000" b="0">
-                <a:solidFill>
-                  <a:srgbClr val="94A3B8"/>
-                </a:solidFill>
-                <a:latin typeface="Inter"/>
-              </a:rPr>
-              <a:t>SECTION 10 · PRIVACY, SECURITY AND GOVERNANCE OF TELEMETRY</a:t>
-            </a:r>
-          </a:p>
-        </p:txBody>
-      </p:sp>
-      <p:sp>
-        <p:nvSpPr>
-          <p:cNvPr id="4" name="TextBox 3"/>
-          <p:cNvSpPr txBox="1"/>
-          <p:nvPr/>
-        </p:nvSpPr>
-        <p:spPr>
-          <a:xfrm>
-            <a:off x="914400" y="1417320"/>
-            <a:ext cx="10332720" cy="457200"/>
-          </a:xfrm>
-          <a:prstGeom prst="rect">
-            <a:avLst/>
-          </a:prstGeom>
-          <a:noFill/>
-        </p:spPr>
-        <p:txBody>
-          <a:bodyPr wrap="square" lIns="45720" rIns="45720" tIns="27432" bIns="27432" anchor="t">
-            <a:spAutoFit/>
-          </a:bodyPr>
-          <a:lstStyle/>
-          <a:p>
-            <a:r>
-              <a:rPr sz="1200" b="1">
-                <a:solidFill>
-                  <a:srgbClr val="00D4AA"/>
-                </a:solidFill>
-                <a:latin typeface="Inter"/>
-              </a:rPr>
-              <a:t>LECTURE 10.5</a:t>
-            </a:r>
-          </a:p>
-        </p:txBody>
-      </p:sp>
-      <p:sp>
-        <p:nvSpPr>
-          <p:cNvPr id="5" name="TextBox 4"/>
-          <p:cNvSpPr txBox="1"/>
-          <p:nvPr/>
-        </p:nvSpPr>
-        <p:spPr>
-          <a:xfrm>
-            <a:off x="914400" y="1874519"/>
-            <a:ext cx="10332720" cy="1645920"/>
+            <a:off x="457200" y="411480"/>
+            <a:ext cx="11247120" cy="868680"/>
           </a:xfrm>
           <a:prstGeom prst="rect">
             <a:avLst/>
@@ -11242,27 +12042,27 @@
               </a:lnSpc>
             </a:pPr>
             <a:r>
-              <a:rPr sz="3000" b="1">
+              <a:rPr sz="2600" b="1">
                 <a:solidFill>
                   <a:srgbClr val="FFFFFF"/>
                 </a:solidFill>
                 <a:latin typeface="Inter"/>
               </a:rPr>
-              <a:t>Quiz: Governance</a:t>
-            </a:r>
-          </a:p>
-        </p:txBody>
-      </p:sp>
-      <p:sp>
-        <p:nvSpPr>
-          <p:cNvPr id="6" name="Rectangle 5"/>
+              <a:t>What never to log, anywhere</a:t>
+            </a:r>
+          </a:p>
+        </p:txBody>
+      </p:sp>
+      <p:sp>
+        <p:nvSpPr>
+          <p:cNvPr id="4" name="Rectangle 3"/>
           <p:cNvSpPr/>
           <p:nvPr/>
         </p:nvSpPr>
         <p:spPr>
           <a:xfrm>
-            <a:off x="914400" y="3794760"/>
-            <a:ext cx="64008" cy="1143000"/>
+            <a:off x="502920" y="1024128"/>
+            <a:ext cx="822960" cy="54864"/>
           </a:xfrm>
           <a:prstGeom prst="rect">
             <a:avLst/>
@@ -11297,14 +12097,14 @@
       </p:sp>
       <p:sp>
         <p:nvSpPr>
-          <p:cNvPr id="7" name="TextBox 6"/>
+          <p:cNvPr id="5" name="TextBox 4"/>
           <p:cNvSpPr txBox="1"/>
           <p:nvPr/>
         </p:nvSpPr>
         <p:spPr>
           <a:xfrm>
-            <a:off x="1188720" y="3749039"/>
-            <a:ext cx="9692640" cy="1280160"/>
+            <a:off x="640080" y="1417320"/>
+            <a:ext cx="10881360" cy="4892040"/>
           </a:xfrm>
           <a:prstGeom prst="rect">
             <a:avLst/>
@@ -11312,24 +12112,128 @@
           <a:noFill/>
         </p:spPr>
         <p:txBody>
-          <a:bodyPr wrap="square" lIns="45720" rIns="45720" tIns="27432" bIns="27432" anchor="ctr">
+          <a:bodyPr wrap="square" lIns="45720" rIns="45720" tIns="27432" bIns="27432" anchor="t">
             <a:spAutoFit/>
           </a:bodyPr>
           <a:lstStyle/>
           <a:p>
-            <a:pPr>
+            <a:pPr marL="292608" indent="-292608">
               <a:lnSpc>
-                <a:spcPct val="130000"/>
+                <a:spcPct val="120000"/>
               </a:lnSpc>
+              <a:spcAft>
+                <a:spcPts val="1260"/>
+              </a:spcAft>
+              <a:buClr>
+                <a:srgbClr val="00D4AA"/>
+              </a:buClr>
+              <a:buFont typeface="Inter"/>
+              <a:buChar char="•"/>
             </a:pPr>
             <a:r>
-              <a:rPr sz="1600" b="0">
-                <a:solidFill>
-                  <a:srgbClr val="CBD5E1"/>
-                </a:solidFill>
-                <a:latin typeface="Inter"/>
-              </a:rPr>
-              <a:t>Check you can place a masking control at the right layer, set retention per data class, and separate an audit trail from…</a:t>
+              <a:rPr sz="1800" b="0">
+                <a:solidFill>
+                  <a:srgbClr val="FFFFFF"/>
+                </a:solidFill>
+                <a:latin typeface="Inter"/>
+              </a:rPr>
+              <a:t>Credentials and secrets: passwords, tokens, one-time codes, the answers to identity verification questions</a:t>
+            </a:r>
+          </a:p>
+          <a:p>
+            <a:pPr marL="292608" indent="-292608">
+              <a:lnSpc>
+                <a:spcPct val="120000"/>
+              </a:lnSpc>
+              <a:spcAft>
+                <a:spcPts val="1260"/>
+              </a:spcAft>
+              <a:buClr>
+                <a:srgbClr val="00D4AA"/>
+              </a:buClr>
+              <a:buFont typeface="Inter"/>
+              <a:buChar char="•"/>
+            </a:pPr>
+            <a:r>
+              <a:rPr sz="1800" b="0">
+                <a:solidFill>
+                  <a:srgbClr val="FFFFFF"/>
+                </a:solidFill>
+                <a:latin typeface="Inter"/>
+              </a:rPr>
+              <a:t>Full payment card numbers, bank details</a:t>
+            </a:r>
+          </a:p>
+          <a:p>
+            <a:pPr marL="292608" indent="-292608">
+              <a:lnSpc>
+                <a:spcPct val="120000"/>
+              </a:lnSpc>
+              <a:spcAft>
+                <a:spcPts val="1260"/>
+              </a:spcAft>
+              <a:buClr>
+                <a:srgbClr val="00D4AA"/>
+              </a:buClr>
+              <a:buFont typeface="Inter"/>
+              <a:buChar char="•"/>
+            </a:pPr>
+            <a:r>
+              <a:rPr sz="1800" b="0">
+                <a:solidFill>
+                  <a:srgbClr val="FFFFFF"/>
+                </a:solidFill>
+                <a:latin typeface="Inter"/>
+              </a:rPr>
+              <a:t>Special-category data: health, biometrics, beliefs; if the helpdesk sees it, mask it at the source</a:t>
+            </a:r>
+          </a:p>
+          <a:p>
+            <a:pPr marL="292608" indent="-292608">
+              <a:lnSpc>
+                <a:spcPct val="120000"/>
+              </a:lnSpc>
+              <a:spcAft>
+                <a:spcPts val="1260"/>
+              </a:spcAft>
+              <a:buClr>
+                <a:srgbClr val="00D4AA"/>
+              </a:buClr>
+              <a:buFont typeface="Inter"/>
+              <a:buChar char="•"/>
+            </a:pPr>
+            <a:r>
+              <a:rPr sz="1800" b="0">
+                <a:solidFill>
+                  <a:srgbClr val="FFFFFF"/>
+                </a:solidFill>
+                <a:latin typeface="Inter"/>
+              </a:rPr>
+              <a:t>Raw content of a suspected prompt injection beyond what security needs</a:t>
+            </a:r>
+          </a:p>
+          <a:p>
+            <a:pPr marL="292608" indent="-292608">
+              <a:lnSpc>
+                <a:spcPct val="120000"/>
+              </a:lnSpc>
+              <a:spcAft>
+                <a:spcPts val="1260"/>
+              </a:spcAft>
+              <a:buClr>
+                <a:srgbClr val="00D4AA"/>
+              </a:buClr>
+              <a:buFont typeface="Inter"/>
+              <a:buChar char="•"/>
+            </a:pPr>
+            <a:r>
+              <a:rPr sz="1800" b="0">
+                <a:solidFill>
+                  <a:srgbClr val="FFFFFF"/>
+                </a:solidFill>
+                <a:latin typeface="Inter"/>
+              </a:rPr>
+              <a:t>Anything the DPA with your vendor prohibits sending to that vendor</a:t>
             </a:r>
           </a:p>
         </p:txBody>
@@ -11389,7 +12293,7 @@
                 </a:solidFill>
                 <a:latin typeface="Inter"/>
               </a:rPr>
-              <a:t>AI Agent Observability &amp; Cost Control · Section 10 · Lecture 10.5</a:t>
+              <a:t>AI Agent Observability &amp; Cost Control · Section 10 · Lecture 10.4</a:t>
             </a:r>
           </a:p>
         </p:txBody>
@@ -11428,7 +12332,7 @@
                 </a:solidFill>
                 <a:latin typeface="Inter"/>
               </a:rPr>
-              <a:t>Quiz: 6 questions</a:t>
+              <a:t>Questions to take to counsel and the DPO (1/2)</a:t>
             </a:r>
           </a:p>
         </p:txBody>
@@ -11502,7 +12406,7 @@
                 <a:spcPct val="120000"/>
               </a:lnSpc>
               <a:spcAft>
-                <a:spcPts val="1539"/>
+                <a:spcPts val="1260"/>
               </a:spcAft>
               <a:buClr>
                 <a:srgbClr val="00D4AA"/>
@@ -11511,13 +12415,13 @@
               <a:buChar char="•"/>
             </a:pPr>
             <a:r>
-              <a:rPr sz="2200" b="0">
+              <a:rPr sz="1800" b="0">
                 <a:solidFill>
                   <a:srgbClr val="FFFFFF"/>
                 </a:solidFill>
                 <a:latin typeface="Inter"/>
               </a:rPr>
-              <a:t>Masking layers and hash vs placeholder</a:t>
+              <a:t>Is Atlas, or any planned feature, in scope for high-risk obligations under the AI Act or a national equivalent?</a:t>
             </a:r>
           </a:p>
           <a:p>
@@ -11526,7 +12430,7 @@
                 <a:spcPct val="120000"/>
               </a:lnSpc>
               <a:spcAft>
-                <a:spcPts val="1539"/>
+                <a:spcPts val="1260"/>
               </a:spcAft>
               <a:buClr>
                 <a:srgbClr val="00D4AA"/>
@@ -11535,13 +12439,13 @@
               <a:buChar char="•"/>
             </a:pPr>
             <a:r>
-              <a:rPr sz="2200" b="0">
+              <a:rPr sz="1800" b="0">
                 <a:solidFill>
                   <a:srgbClr val="FFFFFF"/>
                 </a:solidFill>
                 <a:latin typeface="Inter"/>
               </a:rPr>
-              <a:t>Retention by data class</a:t>
+              <a:t>What is our lawful basis for processing employee data in traces, and does the retention table match it?</a:t>
             </a:r>
           </a:p>
           <a:p>
@@ -11550,7 +12454,7 @@
                 <a:spcPct val="120000"/>
               </a:lnSpc>
               <a:spcAft>
-                <a:spcPts val="1539"/>
+                <a:spcPts val="1260"/>
               </a:spcAft>
               <a:buClr>
                 <a:srgbClr val="00D4AA"/>
@@ -11559,13 +12463,13 @@
               <a:buChar char="•"/>
             </a:pPr>
             <a:r>
-              <a:rPr sz="2200" b="0">
+              <a:rPr sz="1800" b="0">
                 <a:solidFill>
                   <a:srgbClr val="FFFFFF"/>
                 </a:solidFill>
                 <a:latin typeface="Inter"/>
               </a:rPr>
-              <a:t>Tags vs projects</a:t>
+              <a:t>What is the minimum audit-trail retention that applies to us, and what must it contain?</a:t>
             </a:r>
           </a:p>
           <a:p>
@@ -11574,7 +12478,7 @@
                 <a:spcPct val="120000"/>
               </a:lnSpc>
               <a:spcAft>
-                <a:spcPts val="1539"/>
+                <a:spcPts val="1260"/>
               </a:spcAft>
               <a:buClr>
                 <a:srgbClr val="00D4AA"/>
@@ -11583,13 +12487,37 @@
               <a:buChar char="•"/>
             </a:pPr>
             <a:r>
-              <a:rPr sz="2200" b="0">
+              <a:rPr sz="1800" b="0">
                 <a:solidFill>
                   <a:srgbClr val="FFFFFF"/>
                 </a:solidFill>
                 <a:latin typeface="Inter"/>
               </a:rPr>
-              <a:t>Audit trail vs telemetry</a:t>
+              <a:t>Does our tracing vendor's DPA cover the data we send, in the region we send it to?</a:t>
+            </a:r>
+          </a:p>
+          <a:p>
+            <a:pPr marL="292608" indent="-292608">
+              <a:lnSpc>
+                <a:spcPct val="120000"/>
+              </a:lnSpc>
+              <a:spcAft>
+                <a:spcPts val="1260"/>
+              </a:spcAft>
+              <a:buClr>
+                <a:srgbClr val="00D4AA"/>
+              </a:buClr>
+              <a:buFont typeface="Inter"/>
+              <a:buChar char="•"/>
+            </a:pPr>
+            <a:r>
+              <a:rPr sz="1800" b="0">
+                <a:solidFill>
+                  <a:srgbClr val="FFFFFF"/>
+                </a:solidFill>
+                <a:latin typeface="Inter"/>
+              </a:rPr>
+              <a:t>How do we fulfil an access or erasure request against traces, scores and datasets?</a:t>
             </a:r>
           </a:p>
         </p:txBody>
@@ -11777,67 +12705,7 @@
                 </a:solidFill>
                 <a:latin typeface="Inter"/>
               </a:rPr>
-              <a:t>Feedback comments (8.3): free text, and people paste anything</a:t>
-            </a:r>
-          </a:p>
-          <a:p>
-            <a:pPr marL="292608" indent="-292608">
-              <a:lnSpc>
-                <a:spcPct val="120000"/>
-              </a:lnSpc>
-              <a:spcAft>
-                <a:spcPts val="1539"/>
-              </a:spcAft>
-              <a:buClr>
-                <a:srgbClr val="00D4AA"/>
-              </a:buClr>
-              <a:buFont typeface="Inter"/>
-              <a:buChar char="•"/>
-            </a:pPr>
-            <a:r>
-              <a:rPr sz="2200" b="0">
-                <a:solidFill>
-                  <a:srgbClr val="FFFFFF"/>
-                </a:solidFill>
-                <a:latin typeface="Inter"/>
-              </a:rPr>
-              <a:t>Metadata: </a:t>
-            </a:r>
-            <a:r>
-              <a:rPr sz="2024" b="0">
-                <a:solidFill>
-                  <a:srgbClr val="00D4AA"/>
-                </a:solidFill>
-                <a:latin typeface="JetBrains Mono"/>
-              </a:rPr>
-              <a:t>user_id</a:t>
-            </a:r>
-            <a:r>
-              <a:rPr sz="2200" b="0">
-                <a:solidFill>
-                  <a:srgbClr val="FFFFFF"/>
-                </a:solidFill>
-                <a:latin typeface="Inter"/>
-              </a:rPr>
-              <a:t>, </a:t>
-            </a:r>
-            <a:r>
-              <a:rPr sz="2024" b="0">
-                <a:solidFill>
-                  <a:srgbClr val="00D4AA"/>
-                </a:solidFill>
-                <a:latin typeface="JetBrains Mono"/>
-              </a:rPr>
-              <a:t>session_id</a:t>
-            </a:r>
-            <a:r>
-              <a:rPr sz="2200" b="0">
-                <a:solidFill>
-                  <a:srgbClr val="FFFFFF"/>
-                </a:solidFill>
-                <a:latin typeface="Inter"/>
-              </a:rPr>
-              <a:t>, tenant, IPs if you're careless</a:t>
+              <a:t>Copies: judge inputs (Section 8), feedback comments (8.3), screenshots</a:t>
             </a:r>
           </a:p>
         </p:txBody>
@@ -11897,6 +12765,1831 @@
                 </a:solidFill>
                 <a:latin typeface="Inter"/>
               </a:rPr>
+              <a:t>AI Agent Observability &amp; Cost Control · Section 10 · Lecture 10.4</a:t>
+            </a:r>
+          </a:p>
+        </p:txBody>
+      </p:sp>
+      <p:sp>
+        <p:nvSpPr>
+          <p:cNvPr id="3" name="TextBox 2"/>
+          <p:cNvSpPr txBox="1"/>
+          <p:nvPr/>
+        </p:nvSpPr>
+        <p:spPr>
+          <a:xfrm>
+            <a:off x="457200" y="411480"/>
+            <a:ext cx="11247120" cy="868680"/>
+          </a:xfrm>
+          <a:prstGeom prst="rect">
+            <a:avLst/>
+          </a:prstGeom>
+          <a:noFill/>
+        </p:spPr>
+        <p:txBody>
+          <a:bodyPr wrap="square" lIns="45720" rIns="45720" tIns="27432" bIns="27432" anchor="t">
+            <a:spAutoFit/>
+          </a:bodyPr>
+          <a:lstStyle/>
+          <a:p>
+            <a:pPr>
+              <a:lnSpc>
+                <a:spcPct val="110000"/>
+              </a:lnSpc>
+            </a:pPr>
+            <a:r>
+              <a:rPr sz="2600" b="1">
+                <a:solidFill>
+                  <a:srgbClr val="FFFFFF"/>
+                </a:solidFill>
+                <a:latin typeface="Inter"/>
+              </a:rPr>
+              <a:t>Questions to take to counsel and the DPO (2/2)</a:t>
+            </a:r>
+          </a:p>
+        </p:txBody>
+      </p:sp>
+      <p:sp>
+        <p:nvSpPr>
+          <p:cNvPr id="4" name="Rectangle 3"/>
+          <p:cNvSpPr/>
+          <p:nvPr/>
+        </p:nvSpPr>
+        <p:spPr>
+          <a:xfrm>
+            <a:off x="502920" y="1024128"/>
+            <a:ext cx="822960" cy="54864"/>
+          </a:xfrm>
+          <a:prstGeom prst="rect">
+            <a:avLst/>
+          </a:prstGeom>
+          <a:solidFill>
+            <a:srgbClr val="00D4AA"/>
+          </a:solidFill>
+          <a:ln>
+            <a:noFill/>
+          </a:ln>
+          <a:effectLst/>
+        </p:spPr>
+        <p:style>
+          <a:lnRef idx="1">
+            <a:schemeClr val="accent1"/>
+          </a:lnRef>
+          <a:fillRef idx="3">
+            <a:schemeClr val="accent1"/>
+          </a:fillRef>
+          <a:effectRef idx="2">
+            <a:schemeClr val="accent1"/>
+          </a:effectRef>
+          <a:fontRef idx="minor">
+            <a:schemeClr val="lt1"/>
+          </a:fontRef>
+        </p:style>
+        <p:txBody>
+          <a:bodyPr rtlCol="0" anchor="ctr"/>
+          <a:lstStyle/>
+          <a:p/>
+        </p:txBody>
+      </p:sp>
+      <p:sp>
+        <p:nvSpPr>
+          <p:cNvPr id="5" name="TextBox 4"/>
+          <p:cNvSpPr txBox="1"/>
+          <p:nvPr/>
+        </p:nvSpPr>
+        <p:spPr>
+          <a:xfrm>
+            <a:off x="640080" y="1417320"/>
+            <a:ext cx="10881360" cy="4892040"/>
+          </a:xfrm>
+          <a:prstGeom prst="rect">
+            <a:avLst/>
+          </a:prstGeom>
+          <a:noFill/>
+        </p:spPr>
+        <p:txBody>
+          <a:bodyPr wrap="square" lIns="45720" rIns="45720" tIns="27432" bIns="27432" anchor="t">
+            <a:spAutoFit/>
+          </a:bodyPr>
+          <a:lstStyle/>
+          <a:p>
+            <a:pPr marL="292608" indent="-292608">
+              <a:lnSpc>
+                <a:spcPct val="120000"/>
+              </a:lnSpc>
+              <a:spcAft>
+                <a:spcPts val="1539"/>
+              </a:spcAft>
+              <a:buClr>
+                <a:srgbClr val="00D4AA"/>
+              </a:buClr>
+              <a:buFont typeface="Inter"/>
+              <a:buChar char="•"/>
+            </a:pPr>
+            <a:r>
+              <a:rPr sz="2200" b="0">
+                <a:solidFill>
+                  <a:srgbClr val="FFFFFF"/>
+                </a:solidFill>
+                <a:latin typeface="Inter"/>
+              </a:rPr>
+              <a:t>Who signs off the governance checklist, and how often?</a:t>
+            </a:r>
+          </a:p>
+        </p:txBody>
+      </p:sp>
+    </p:spTree>
+  </p:cSld>
+  <p:clrMapOvr>
+    <a:masterClrMapping/>
+  </p:clrMapOvr>
+</p:sld>
+</file>
+
+<file path=ppt/slides/slide31.xml><?xml version="1.0" encoding="utf-8"?>
+<p:sld xmlns:a="http://schemas.openxmlformats.org/drawingml/2006/main" xmlns:p="http://schemas.openxmlformats.org/presentationml/2006/main" xmlns:r="http://schemas.openxmlformats.org/officeDocument/2006/relationships">
+  <p:cSld>
+    <p:bg>
+      <p:bgPr>
+        <a:solidFill>
+          <a:srgbClr val="0A1628"/>
+        </a:solidFill>
+        <a:effectLst/>
+      </p:bgPr>
+    </p:bg>
+    <p:spTree>
+      <p:nvGrpSpPr>
+        <p:cNvPr id="1" name=""/>
+        <p:cNvGrpSpPr/>
+        <p:nvPr/>
+      </p:nvGrpSpPr>
+      <p:grpSpPr/>
+      <p:sp>
+        <p:nvSpPr>
+          <p:cNvPr id="2" name="TextBox 1"/>
+          <p:cNvSpPr txBox="1"/>
+          <p:nvPr/>
+        </p:nvSpPr>
+        <p:spPr>
+          <a:xfrm>
+            <a:off x="457200" y="6419088"/>
+            <a:ext cx="8686800" cy="320040"/>
+          </a:xfrm>
+          <a:prstGeom prst="rect">
+            <a:avLst/>
+          </a:prstGeom>
+          <a:noFill/>
+        </p:spPr>
+        <p:txBody>
+          <a:bodyPr wrap="square" lIns="45720" rIns="45720" tIns="27432" bIns="27432" anchor="t">
+            <a:spAutoFit/>
+          </a:bodyPr>
+          <a:lstStyle/>
+          <a:p>
+            <a:r>
+              <a:rPr sz="900" b="0">
+                <a:solidFill>
+                  <a:srgbClr val="64748B"/>
+                </a:solidFill>
+                <a:latin typeface="Inter"/>
+              </a:rPr>
+              <a:t>AI Agent Observability &amp; Cost Control · Section 10 · Lecture 10.4</a:t>
+            </a:r>
+          </a:p>
+        </p:txBody>
+      </p:sp>
+      <p:sp>
+        <p:nvSpPr>
+          <p:cNvPr id="3" name="TextBox 2"/>
+          <p:cNvSpPr txBox="1"/>
+          <p:nvPr/>
+        </p:nvSpPr>
+        <p:spPr>
+          <a:xfrm>
+            <a:off x="1371600" y="822960"/>
+            <a:ext cx="9418320" cy="457200"/>
+          </a:xfrm>
+          <a:prstGeom prst="rect">
+            <a:avLst/>
+          </a:prstGeom>
+          <a:noFill/>
+        </p:spPr>
+        <p:txBody>
+          <a:bodyPr wrap="square" lIns="45720" rIns="45720" tIns="27432" bIns="27432" anchor="t">
+            <a:spAutoFit/>
+          </a:bodyPr>
+          <a:lstStyle/>
+          <a:p>
+            <a:pPr algn="ctr"/>
+            <a:r>
+              <a:rPr sz="1200" b="1">
+                <a:solidFill>
+                  <a:srgbClr val="00D4AA"/>
+                </a:solidFill>
+                <a:latin typeface="Inter"/>
+              </a:rPr>
+              <a:t>RECAP</a:t>
+            </a:r>
+          </a:p>
+        </p:txBody>
+      </p:sp>
+      <p:sp>
+        <p:nvSpPr>
+          <p:cNvPr id="4" name="TextBox 3"/>
+          <p:cNvSpPr txBox="1"/>
+          <p:nvPr/>
+        </p:nvSpPr>
+        <p:spPr>
+          <a:xfrm>
+            <a:off x="1371600" y="1234440"/>
+            <a:ext cx="9418320" cy="822960"/>
+          </a:xfrm>
+          <a:prstGeom prst="rect">
+            <a:avLst/>
+          </a:prstGeom>
+          <a:noFill/>
+        </p:spPr>
+        <p:txBody>
+          <a:bodyPr wrap="square" lIns="45720" rIns="45720" tIns="27432" bIns="27432" anchor="t">
+            <a:spAutoFit/>
+          </a:bodyPr>
+          <a:lstStyle/>
+          <a:p>
+            <a:pPr algn="ctr"/>
+            <a:r>
+              <a:rPr sz="2600" b="1">
+                <a:solidFill>
+                  <a:srgbClr val="FFFFFF"/>
+                </a:solidFill>
+                <a:latin typeface="Inter"/>
+              </a:rPr>
+              <a:t>Key takeaways</a:t>
+            </a:r>
+          </a:p>
+        </p:txBody>
+      </p:sp>
+      <p:sp>
+        <p:nvSpPr>
+          <p:cNvPr id="5" name="Rounded Rectangle 4"/>
+          <p:cNvSpPr/>
+          <p:nvPr/>
+        </p:nvSpPr>
+        <p:spPr>
+          <a:xfrm>
+            <a:off x="2011680" y="2514600"/>
+            <a:ext cx="8138160" cy="777240"/>
+          </a:xfrm>
+          <a:prstGeom prst="roundRect">
+            <a:avLst>
+              <a:gd name="adj" fmla="val 6588"/>
+            </a:avLst>
+          </a:prstGeom>
+          <a:solidFill>
+            <a:srgbClr val="1A2742"/>
+          </a:solidFill>
+          <a:ln>
+            <a:noFill/>
+          </a:ln>
+          <a:effectLst/>
+        </p:spPr>
+        <p:style>
+          <a:lnRef idx="1">
+            <a:schemeClr val="accent1"/>
+          </a:lnRef>
+          <a:fillRef idx="3">
+            <a:schemeClr val="accent1"/>
+          </a:fillRef>
+          <a:effectRef idx="2">
+            <a:schemeClr val="accent1"/>
+          </a:effectRef>
+          <a:fontRef idx="minor">
+            <a:schemeClr val="lt1"/>
+          </a:fontRef>
+        </p:style>
+        <p:txBody>
+          <a:bodyPr rtlCol="0" anchor="ctr"/>
+          <a:lstStyle/>
+          <a:p/>
+        </p:txBody>
+      </p:sp>
+      <p:sp>
+        <p:nvSpPr>
+          <p:cNvPr id="6" name="TextBox 5"/>
+          <p:cNvSpPr txBox="1"/>
+          <p:nvPr/>
+        </p:nvSpPr>
+        <p:spPr>
+          <a:xfrm>
+            <a:off x="2194560" y="2514600"/>
+            <a:ext cx="548640" cy="777240"/>
+          </a:xfrm>
+          <a:prstGeom prst="rect">
+            <a:avLst/>
+          </a:prstGeom>
+          <a:noFill/>
+        </p:spPr>
+        <p:txBody>
+          <a:bodyPr wrap="square" lIns="45720" rIns="45720" tIns="27432" bIns="27432" anchor="ctr">
+            <a:spAutoFit/>
+          </a:bodyPr>
+          <a:lstStyle/>
+          <a:p>
+            <a:r>
+              <a:rPr sz="2200" b="1">
+                <a:solidFill>
+                  <a:srgbClr val="00D4AA"/>
+                </a:solidFill>
+                <a:latin typeface="Inter"/>
+              </a:rPr>
+              <a:t>✓</a:t>
+            </a:r>
+          </a:p>
+        </p:txBody>
+      </p:sp>
+      <p:sp>
+        <p:nvSpPr>
+          <p:cNvPr id="7" name="TextBox 6"/>
+          <p:cNvSpPr txBox="1"/>
+          <p:nvPr/>
+        </p:nvSpPr>
+        <p:spPr>
+          <a:xfrm>
+            <a:off x="2788920" y="2514600"/>
+            <a:ext cx="7223760" cy="777240"/>
+          </a:xfrm>
+          <a:prstGeom prst="rect">
+            <a:avLst/>
+          </a:prstGeom>
+          <a:noFill/>
+        </p:spPr>
+        <p:txBody>
+          <a:bodyPr wrap="square" lIns="45720" rIns="45720" tIns="27432" bIns="27432" anchor="ctr">
+            <a:spAutoFit/>
+          </a:bodyPr>
+          <a:lstStyle/>
+          <a:p>
+            <a:r>
+              <a:rPr sz="1800" b="1">
+                <a:solidFill>
+                  <a:srgbClr val="FFFFFF"/>
+                </a:solidFill>
+                <a:latin typeface="Inter"/>
+              </a:rPr>
+              <a:t>Audit trail and telemetry are different datasets</a:t>
+            </a:r>
+          </a:p>
+        </p:txBody>
+      </p:sp>
+      <p:sp>
+        <p:nvSpPr>
+          <p:cNvPr id="8" name="Rounded Rectangle 7"/>
+          <p:cNvSpPr/>
+          <p:nvPr/>
+        </p:nvSpPr>
+        <p:spPr>
+          <a:xfrm>
+            <a:off x="2011680" y="3474720"/>
+            <a:ext cx="8138160" cy="777240"/>
+          </a:xfrm>
+          <a:prstGeom prst="roundRect">
+            <a:avLst>
+              <a:gd name="adj" fmla="val 6588"/>
+            </a:avLst>
+          </a:prstGeom>
+          <a:solidFill>
+            <a:srgbClr val="1A2742"/>
+          </a:solidFill>
+          <a:ln>
+            <a:noFill/>
+          </a:ln>
+          <a:effectLst/>
+        </p:spPr>
+        <p:style>
+          <a:lnRef idx="1">
+            <a:schemeClr val="accent1"/>
+          </a:lnRef>
+          <a:fillRef idx="3">
+            <a:schemeClr val="accent1"/>
+          </a:fillRef>
+          <a:effectRef idx="2">
+            <a:schemeClr val="accent1"/>
+          </a:effectRef>
+          <a:fontRef idx="minor">
+            <a:schemeClr val="lt1"/>
+          </a:fontRef>
+        </p:style>
+        <p:txBody>
+          <a:bodyPr rtlCol="0" anchor="ctr"/>
+          <a:lstStyle/>
+          <a:p/>
+        </p:txBody>
+      </p:sp>
+      <p:sp>
+        <p:nvSpPr>
+          <p:cNvPr id="9" name="TextBox 8"/>
+          <p:cNvSpPr txBox="1"/>
+          <p:nvPr/>
+        </p:nvSpPr>
+        <p:spPr>
+          <a:xfrm>
+            <a:off x="2194560" y="3474720"/>
+            <a:ext cx="548640" cy="777240"/>
+          </a:xfrm>
+          <a:prstGeom prst="rect">
+            <a:avLst/>
+          </a:prstGeom>
+          <a:noFill/>
+        </p:spPr>
+        <p:txBody>
+          <a:bodyPr wrap="square" lIns="45720" rIns="45720" tIns="27432" bIns="27432" anchor="ctr">
+            <a:spAutoFit/>
+          </a:bodyPr>
+          <a:lstStyle/>
+          <a:p>
+            <a:r>
+              <a:rPr sz="2200" b="1">
+                <a:solidFill>
+                  <a:srgbClr val="00D4AA"/>
+                </a:solidFill>
+                <a:latin typeface="Inter"/>
+              </a:rPr>
+              <a:t>✓</a:t>
+            </a:r>
+          </a:p>
+        </p:txBody>
+      </p:sp>
+      <p:sp>
+        <p:nvSpPr>
+          <p:cNvPr id="10" name="TextBox 9"/>
+          <p:cNvSpPr txBox="1"/>
+          <p:nvPr/>
+        </p:nvSpPr>
+        <p:spPr>
+          <a:xfrm>
+            <a:off x="2788920" y="3474720"/>
+            <a:ext cx="7223760" cy="777240"/>
+          </a:xfrm>
+          <a:prstGeom prst="rect">
+            <a:avLst/>
+          </a:prstGeom>
+          <a:noFill/>
+        </p:spPr>
+        <p:txBody>
+          <a:bodyPr wrap="square" lIns="45720" rIns="45720" tIns="27432" bIns="27432" anchor="ctr">
+            <a:spAutoFit/>
+          </a:bodyPr>
+          <a:lstStyle/>
+          <a:p>
+            <a:r>
+              <a:rPr sz="1800" b="1">
+                <a:solidFill>
+                  <a:srgbClr val="FFFFFF"/>
+                </a:solidFill>
+                <a:latin typeface="Inter"/>
+              </a:rPr>
+              <a:t>Keep decisions and hashes; never credentials</a:t>
+            </a:r>
+          </a:p>
+        </p:txBody>
+      </p:sp>
+      <p:sp>
+        <p:nvSpPr>
+          <p:cNvPr id="11" name="Rounded Rectangle 10"/>
+          <p:cNvSpPr/>
+          <p:nvPr/>
+        </p:nvSpPr>
+        <p:spPr>
+          <a:xfrm>
+            <a:off x="2011680" y="4434840"/>
+            <a:ext cx="8138160" cy="777240"/>
+          </a:xfrm>
+          <a:prstGeom prst="roundRect">
+            <a:avLst>
+              <a:gd name="adj" fmla="val 6588"/>
+            </a:avLst>
+          </a:prstGeom>
+          <a:solidFill>
+            <a:srgbClr val="1A2742"/>
+          </a:solidFill>
+          <a:ln>
+            <a:noFill/>
+          </a:ln>
+          <a:effectLst/>
+        </p:spPr>
+        <p:style>
+          <a:lnRef idx="1">
+            <a:schemeClr val="accent1"/>
+          </a:lnRef>
+          <a:fillRef idx="3">
+            <a:schemeClr val="accent1"/>
+          </a:fillRef>
+          <a:effectRef idx="2">
+            <a:schemeClr val="accent1"/>
+          </a:effectRef>
+          <a:fontRef idx="minor">
+            <a:schemeClr val="lt1"/>
+          </a:fontRef>
+        </p:style>
+        <p:txBody>
+          <a:bodyPr rtlCol="0" anchor="ctr"/>
+          <a:lstStyle/>
+          <a:p/>
+        </p:txBody>
+      </p:sp>
+      <p:sp>
+        <p:nvSpPr>
+          <p:cNvPr id="12" name="TextBox 11"/>
+          <p:cNvSpPr txBox="1"/>
+          <p:nvPr/>
+        </p:nvSpPr>
+        <p:spPr>
+          <a:xfrm>
+            <a:off x="2194560" y="4434840"/>
+            <a:ext cx="548640" cy="777240"/>
+          </a:xfrm>
+          <a:prstGeom prst="rect">
+            <a:avLst/>
+          </a:prstGeom>
+          <a:noFill/>
+        </p:spPr>
+        <p:txBody>
+          <a:bodyPr wrap="square" lIns="45720" rIns="45720" tIns="27432" bIns="27432" anchor="ctr">
+            <a:spAutoFit/>
+          </a:bodyPr>
+          <a:lstStyle/>
+          <a:p>
+            <a:r>
+              <a:rPr sz="2200" b="1">
+                <a:solidFill>
+                  <a:srgbClr val="00D4AA"/>
+                </a:solidFill>
+                <a:latin typeface="Inter"/>
+              </a:rPr>
+              <a:t>✓</a:t>
+            </a:r>
+          </a:p>
+        </p:txBody>
+      </p:sp>
+      <p:sp>
+        <p:nvSpPr>
+          <p:cNvPr id="13" name="TextBox 12"/>
+          <p:cNvSpPr txBox="1"/>
+          <p:nvPr/>
+        </p:nvSpPr>
+        <p:spPr>
+          <a:xfrm>
+            <a:off x="2788920" y="4434840"/>
+            <a:ext cx="7223760" cy="777240"/>
+          </a:xfrm>
+          <a:prstGeom prst="rect">
+            <a:avLst/>
+          </a:prstGeom>
+          <a:noFill/>
+        </p:spPr>
+        <p:txBody>
+          <a:bodyPr wrap="square" lIns="45720" rIns="45720" tIns="27432" bIns="27432" anchor="ctr">
+            <a:spAutoFit/>
+          </a:bodyPr>
+          <a:lstStyle/>
+          <a:p>
+            <a:r>
+              <a:rPr sz="1800" b="1">
+                <a:solidFill>
+                  <a:srgbClr val="FFFFFF"/>
+                </a:solidFill>
+                <a:latin typeface="Inter"/>
+              </a:rPr>
+              <a:t>Take six questions to counsel</a:t>
+            </a:r>
+          </a:p>
+        </p:txBody>
+      </p:sp>
+    </p:spTree>
+  </p:cSld>
+  <p:clrMapOvr>
+    <a:masterClrMapping/>
+  </p:clrMapOvr>
+</p:sld>
+</file>
+
+<file path=ppt/slides/slide32.xml><?xml version="1.0" encoding="utf-8"?>
+<p:sld xmlns:a="http://schemas.openxmlformats.org/drawingml/2006/main" xmlns:p="http://schemas.openxmlformats.org/presentationml/2006/main" xmlns:r="http://schemas.openxmlformats.org/officeDocument/2006/relationships">
+  <p:cSld>
+    <p:bg>
+      <p:bgPr>
+        <a:solidFill>
+          <a:srgbClr val="0A1628"/>
+        </a:solidFill>
+        <a:effectLst/>
+      </p:bgPr>
+    </p:bg>
+    <p:spTree>
+      <p:nvGrpSpPr>
+        <p:cNvPr id="1" name=""/>
+        <p:cNvGrpSpPr/>
+        <p:nvPr/>
+      </p:nvGrpSpPr>
+      <p:grpSpPr/>
+      <p:sp>
+        <p:nvSpPr>
+          <p:cNvPr id="2" name="TextBox 1"/>
+          <p:cNvSpPr txBox="1"/>
+          <p:nvPr/>
+        </p:nvSpPr>
+        <p:spPr>
+          <a:xfrm>
+            <a:off x="457200" y="6419088"/>
+            <a:ext cx="8686800" cy="320040"/>
+          </a:xfrm>
+          <a:prstGeom prst="rect">
+            <a:avLst/>
+          </a:prstGeom>
+          <a:noFill/>
+        </p:spPr>
+        <p:txBody>
+          <a:bodyPr wrap="square" lIns="45720" rIns="45720" tIns="27432" bIns="27432" anchor="t">
+            <a:spAutoFit/>
+          </a:bodyPr>
+          <a:lstStyle/>
+          <a:p>
+            <a:r>
+              <a:rPr sz="900" b="0">
+                <a:solidFill>
+                  <a:srgbClr val="64748B"/>
+                </a:solidFill>
+                <a:latin typeface="Inter"/>
+              </a:rPr>
+              <a:t>AI Agent Observability &amp; Cost Control · Section 10 · Lecture 10.4</a:t>
+            </a:r>
+          </a:p>
+        </p:txBody>
+      </p:sp>
+      <p:sp>
+        <p:nvSpPr>
+          <p:cNvPr id="3" name="TextBox 2"/>
+          <p:cNvSpPr txBox="1"/>
+          <p:nvPr/>
+        </p:nvSpPr>
+        <p:spPr>
+          <a:xfrm>
+            <a:off x="1371600" y="822960"/>
+            <a:ext cx="9418320" cy="457200"/>
+          </a:xfrm>
+          <a:prstGeom prst="rect">
+            <a:avLst/>
+          </a:prstGeom>
+          <a:noFill/>
+        </p:spPr>
+        <p:txBody>
+          <a:bodyPr wrap="square" lIns="45720" rIns="45720" tIns="27432" bIns="27432" anchor="t">
+            <a:spAutoFit/>
+          </a:bodyPr>
+          <a:lstStyle/>
+          <a:p>
+            <a:pPr algn="ctr"/>
+            <a:r>
+              <a:rPr sz="1200" b="1">
+                <a:solidFill>
+                  <a:srgbClr val="00D4AA"/>
+                </a:solidFill>
+                <a:latin typeface="Inter"/>
+              </a:rPr>
+              <a:t>SECTION COMPLETE</a:t>
+            </a:r>
+          </a:p>
+        </p:txBody>
+      </p:sp>
+      <p:sp>
+        <p:nvSpPr>
+          <p:cNvPr id="4" name="TextBox 3"/>
+          <p:cNvSpPr txBox="1"/>
+          <p:nvPr/>
+        </p:nvSpPr>
+        <p:spPr>
+          <a:xfrm>
+            <a:off x="1371600" y="1234440"/>
+            <a:ext cx="9418320" cy="822960"/>
+          </a:xfrm>
+          <a:prstGeom prst="rect">
+            <a:avLst/>
+          </a:prstGeom>
+          <a:noFill/>
+        </p:spPr>
+        <p:txBody>
+          <a:bodyPr wrap="square" lIns="45720" rIns="45720" tIns="27432" bIns="27432" anchor="t">
+            <a:spAutoFit/>
+          </a:bodyPr>
+          <a:lstStyle/>
+          <a:p>
+            <a:pPr algn="ctr"/>
+            <a:r>
+              <a:rPr sz="2600" b="1">
+                <a:solidFill>
+                  <a:srgbClr val="FFFFFF"/>
+                </a:solidFill>
+                <a:latin typeface="Inter"/>
+              </a:rPr>
+              <a:t>You can now</a:t>
+            </a:r>
+          </a:p>
+        </p:txBody>
+      </p:sp>
+      <p:sp>
+        <p:nvSpPr>
+          <p:cNvPr id="5" name="Rounded Rectangle 4"/>
+          <p:cNvSpPr/>
+          <p:nvPr/>
+        </p:nvSpPr>
+        <p:spPr>
+          <a:xfrm>
+            <a:off x="2011680" y="2514600"/>
+            <a:ext cx="8138160" cy="777240"/>
+          </a:xfrm>
+          <a:prstGeom prst="roundRect">
+            <a:avLst>
+              <a:gd name="adj" fmla="val 6588"/>
+            </a:avLst>
+          </a:prstGeom>
+          <a:solidFill>
+            <a:srgbClr val="1A2742"/>
+          </a:solidFill>
+          <a:ln>
+            <a:noFill/>
+          </a:ln>
+          <a:effectLst/>
+        </p:spPr>
+        <p:style>
+          <a:lnRef idx="1">
+            <a:schemeClr val="accent1"/>
+          </a:lnRef>
+          <a:fillRef idx="3">
+            <a:schemeClr val="accent1"/>
+          </a:fillRef>
+          <a:effectRef idx="2">
+            <a:schemeClr val="accent1"/>
+          </a:effectRef>
+          <a:fontRef idx="minor">
+            <a:schemeClr val="lt1"/>
+          </a:fontRef>
+        </p:style>
+        <p:txBody>
+          <a:bodyPr rtlCol="0" anchor="ctr"/>
+          <a:lstStyle/>
+          <a:p/>
+        </p:txBody>
+      </p:sp>
+      <p:sp>
+        <p:nvSpPr>
+          <p:cNvPr id="6" name="TextBox 5"/>
+          <p:cNvSpPr txBox="1"/>
+          <p:nvPr/>
+        </p:nvSpPr>
+        <p:spPr>
+          <a:xfrm>
+            <a:off x="2194560" y="2514600"/>
+            <a:ext cx="548640" cy="777240"/>
+          </a:xfrm>
+          <a:prstGeom prst="rect">
+            <a:avLst/>
+          </a:prstGeom>
+          <a:noFill/>
+        </p:spPr>
+        <p:txBody>
+          <a:bodyPr wrap="square" lIns="45720" rIns="45720" tIns="27432" bIns="27432" anchor="ctr">
+            <a:spAutoFit/>
+          </a:bodyPr>
+          <a:lstStyle/>
+          <a:p>
+            <a:r>
+              <a:rPr sz="2200" b="1">
+                <a:solidFill>
+                  <a:srgbClr val="00D4AA"/>
+                </a:solidFill>
+                <a:latin typeface="Inter"/>
+              </a:rPr>
+              <a:t>✓</a:t>
+            </a:r>
+          </a:p>
+        </p:txBody>
+      </p:sp>
+      <p:sp>
+        <p:nvSpPr>
+          <p:cNvPr id="7" name="TextBox 6"/>
+          <p:cNvSpPr txBox="1"/>
+          <p:nvPr/>
+        </p:nvSpPr>
+        <p:spPr>
+          <a:xfrm>
+            <a:off x="2788920" y="2514600"/>
+            <a:ext cx="7223760" cy="777240"/>
+          </a:xfrm>
+          <a:prstGeom prst="rect">
+            <a:avLst/>
+          </a:prstGeom>
+          <a:noFill/>
+        </p:spPr>
+        <p:txBody>
+          <a:bodyPr wrap="square" lIns="45720" rIns="45720" tIns="27432" bIns="27432" anchor="ctr">
+            <a:spAutoFit/>
+          </a:bodyPr>
+          <a:lstStyle/>
+          <a:p>
+            <a:r>
+              <a:rPr sz="1800" b="1">
+                <a:solidFill>
+                  <a:srgbClr val="FFFFFF"/>
+                </a:solidFill>
+                <a:latin typeface="Inter"/>
+              </a:rPr>
+              <a:t>Mask PII in three layers and prove it in CI</a:t>
+            </a:r>
+          </a:p>
+        </p:txBody>
+      </p:sp>
+      <p:sp>
+        <p:nvSpPr>
+          <p:cNvPr id="8" name="Rounded Rectangle 7"/>
+          <p:cNvSpPr/>
+          <p:nvPr/>
+        </p:nvSpPr>
+        <p:spPr>
+          <a:xfrm>
+            <a:off x="2011680" y="3474720"/>
+            <a:ext cx="8138160" cy="777240"/>
+          </a:xfrm>
+          <a:prstGeom prst="roundRect">
+            <a:avLst>
+              <a:gd name="adj" fmla="val 6588"/>
+            </a:avLst>
+          </a:prstGeom>
+          <a:solidFill>
+            <a:srgbClr val="1A2742"/>
+          </a:solidFill>
+          <a:ln>
+            <a:noFill/>
+          </a:ln>
+          <a:effectLst/>
+        </p:spPr>
+        <p:style>
+          <a:lnRef idx="1">
+            <a:schemeClr val="accent1"/>
+          </a:lnRef>
+          <a:fillRef idx="3">
+            <a:schemeClr val="accent1"/>
+          </a:fillRef>
+          <a:effectRef idx="2">
+            <a:schemeClr val="accent1"/>
+          </a:effectRef>
+          <a:fontRef idx="minor">
+            <a:schemeClr val="lt1"/>
+          </a:fontRef>
+        </p:style>
+        <p:txBody>
+          <a:bodyPr rtlCol="0" anchor="ctr"/>
+          <a:lstStyle/>
+          <a:p/>
+        </p:txBody>
+      </p:sp>
+      <p:sp>
+        <p:nvSpPr>
+          <p:cNvPr id="9" name="TextBox 8"/>
+          <p:cNvSpPr txBox="1"/>
+          <p:nvPr/>
+        </p:nvSpPr>
+        <p:spPr>
+          <a:xfrm>
+            <a:off x="2194560" y="3474720"/>
+            <a:ext cx="548640" cy="777240"/>
+          </a:xfrm>
+          <a:prstGeom prst="rect">
+            <a:avLst/>
+          </a:prstGeom>
+          <a:noFill/>
+        </p:spPr>
+        <p:txBody>
+          <a:bodyPr wrap="square" lIns="45720" rIns="45720" tIns="27432" bIns="27432" anchor="ctr">
+            <a:spAutoFit/>
+          </a:bodyPr>
+          <a:lstStyle/>
+          <a:p>
+            <a:r>
+              <a:rPr sz="2200" b="1">
+                <a:solidFill>
+                  <a:srgbClr val="00D4AA"/>
+                </a:solidFill>
+                <a:latin typeface="Inter"/>
+              </a:rPr>
+              <a:t>✓</a:t>
+            </a:r>
+          </a:p>
+        </p:txBody>
+      </p:sp>
+      <p:sp>
+        <p:nvSpPr>
+          <p:cNvPr id="10" name="TextBox 9"/>
+          <p:cNvSpPr txBox="1"/>
+          <p:nvPr/>
+        </p:nvSpPr>
+        <p:spPr>
+          <a:xfrm>
+            <a:off x="2788920" y="3474720"/>
+            <a:ext cx="7223760" cy="777240"/>
+          </a:xfrm>
+          <a:prstGeom prst="rect">
+            <a:avLst/>
+          </a:prstGeom>
+          <a:noFill/>
+        </p:spPr>
+        <p:txBody>
+          <a:bodyPr wrap="square" lIns="45720" rIns="45720" tIns="27432" bIns="27432" anchor="ctr">
+            <a:spAutoFit/>
+          </a:bodyPr>
+          <a:lstStyle/>
+          <a:p>
+            <a:r>
+              <a:rPr sz="1800" b="1">
+                <a:solidFill>
+                  <a:srgbClr val="FFFFFF"/>
+                </a:solidFill>
+                <a:latin typeface="Inter"/>
+              </a:rPr>
+              <a:t>Set retention and access per data class</a:t>
+            </a:r>
+          </a:p>
+        </p:txBody>
+      </p:sp>
+      <p:sp>
+        <p:nvSpPr>
+          <p:cNvPr id="11" name="Rounded Rectangle 10"/>
+          <p:cNvSpPr/>
+          <p:nvPr/>
+        </p:nvSpPr>
+        <p:spPr>
+          <a:xfrm>
+            <a:off x="2011680" y="4434840"/>
+            <a:ext cx="8138160" cy="777240"/>
+          </a:xfrm>
+          <a:prstGeom prst="roundRect">
+            <a:avLst>
+              <a:gd name="adj" fmla="val 6588"/>
+            </a:avLst>
+          </a:prstGeom>
+          <a:solidFill>
+            <a:srgbClr val="1A2742"/>
+          </a:solidFill>
+          <a:ln>
+            <a:noFill/>
+          </a:ln>
+          <a:effectLst/>
+        </p:spPr>
+        <p:style>
+          <a:lnRef idx="1">
+            <a:schemeClr val="accent1"/>
+          </a:lnRef>
+          <a:fillRef idx="3">
+            <a:schemeClr val="accent1"/>
+          </a:fillRef>
+          <a:effectRef idx="2">
+            <a:schemeClr val="accent1"/>
+          </a:effectRef>
+          <a:fontRef idx="minor">
+            <a:schemeClr val="lt1"/>
+          </a:fontRef>
+        </p:style>
+        <p:txBody>
+          <a:bodyPr rtlCol="0" anchor="ctr"/>
+          <a:lstStyle/>
+          <a:p/>
+        </p:txBody>
+      </p:sp>
+      <p:sp>
+        <p:nvSpPr>
+          <p:cNvPr id="12" name="TextBox 11"/>
+          <p:cNvSpPr txBox="1"/>
+          <p:nvPr/>
+        </p:nvSpPr>
+        <p:spPr>
+          <a:xfrm>
+            <a:off x="2194560" y="4434840"/>
+            <a:ext cx="548640" cy="777240"/>
+          </a:xfrm>
+          <a:prstGeom prst="rect">
+            <a:avLst/>
+          </a:prstGeom>
+          <a:noFill/>
+        </p:spPr>
+        <p:txBody>
+          <a:bodyPr wrap="square" lIns="45720" rIns="45720" tIns="27432" bIns="27432" anchor="ctr">
+            <a:spAutoFit/>
+          </a:bodyPr>
+          <a:lstStyle/>
+          <a:p>
+            <a:r>
+              <a:rPr sz="2200" b="1">
+                <a:solidFill>
+                  <a:srgbClr val="00D4AA"/>
+                </a:solidFill>
+                <a:latin typeface="Inter"/>
+              </a:rPr>
+              <a:t>✓</a:t>
+            </a:r>
+          </a:p>
+        </p:txBody>
+      </p:sp>
+      <p:sp>
+        <p:nvSpPr>
+          <p:cNvPr id="13" name="TextBox 12"/>
+          <p:cNvSpPr txBox="1"/>
+          <p:nvPr/>
+        </p:nvSpPr>
+        <p:spPr>
+          <a:xfrm>
+            <a:off x="2788920" y="4434840"/>
+            <a:ext cx="7223760" cy="777240"/>
+          </a:xfrm>
+          <a:prstGeom prst="rect">
+            <a:avLst/>
+          </a:prstGeom>
+          <a:noFill/>
+        </p:spPr>
+        <p:txBody>
+          <a:bodyPr wrap="square" lIns="45720" rIns="45720" tIns="27432" bIns="27432" anchor="ctr">
+            <a:spAutoFit/>
+          </a:bodyPr>
+          <a:lstStyle/>
+          <a:p>
+            <a:r>
+              <a:rPr sz="1800" b="1">
+                <a:solidFill>
+                  <a:srgbClr val="FFFFFF"/>
+                </a:solidFill>
+                <a:latin typeface="Inter"/>
+              </a:rPr>
+              <a:t>Separate an audit trail from debugging telemetry</a:t>
+            </a:r>
+          </a:p>
+        </p:txBody>
+      </p:sp>
+    </p:spTree>
+  </p:cSld>
+  <p:clrMapOvr>
+    <a:masterClrMapping/>
+  </p:clrMapOvr>
+</p:sld>
+</file>
+
+<file path=ppt/slides/slide33.xml><?xml version="1.0" encoding="utf-8"?>
+<p:sld xmlns:a="http://schemas.openxmlformats.org/drawingml/2006/main" xmlns:p="http://schemas.openxmlformats.org/presentationml/2006/main" xmlns:r="http://schemas.openxmlformats.org/officeDocument/2006/relationships">
+  <p:cSld>
+    <p:bg>
+      <p:bgPr>
+        <a:solidFill>
+          <a:srgbClr val="0A1628"/>
+        </a:solidFill>
+        <a:effectLst/>
+      </p:bgPr>
+    </p:bg>
+    <p:spTree>
+      <p:nvGrpSpPr>
+        <p:cNvPr id="1" name=""/>
+        <p:cNvGrpSpPr/>
+        <p:nvPr/>
+      </p:nvGrpSpPr>
+      <p:grpSpPr/>
+      <p:sp>
+        <p:nvSpPr>
+          <p:cNvPr id="2" name="TextBox 1"/>
+          <p:cNvSpPr txBox="1"/>
+          <p:nvPr/>
+        </p:nvSpPr>
+        <p:spPr>
+          <a:xfrm>
+            <a:off x="457200" y="6419088"/>
+            <a:ext cx="8686800" cy="320040"/>
+          </a:xfrm>
+          <a:prstGeom prst="rect">
+            <a:avLst/>
+          </a:prstGeom>
+          <a:noFill/>
+        </p:spPr>
+        <p:txBody>
+          <a:bodyPr wrap="square" lIns="45720" rIns="45720" tIns="27432" bIns="27432" anchor="t">
+            <a:spAutoFit/>
+          </a:bodyPr>
+          <a:lstStyle/>
+          <a:p>
+            <a:r>
+              <a:rPr sz="900" b="0">
+                <a:solidFill>
+                  <a:srgbClr val="64748B"/>
+                </a:solidFill>
+                <a:latin typeface="Inter"/>
+              </a:rPr>
+              <a:t>AI Agent Observability &amp; Cost Control · Section 10 · Lecture 10.4</a:t>
+            </a:r>
+          </a:p>
+        </p:txBody>
+      </p:sp>
+      <p:sp>
+        <p:nvSpPr>
+          <p:cNvPr id="3" name="TextBox 2"/>
+          <p:cNvSpPr txBox="1"/>
+          <p:nvPr/>
+        </p:nvSpPr>
+        <p:spPr>
+          <a:xfrm>
+            <a:off x="2377440" y="2286000"/>
+            <a:ext cx="1097280" cy="1097280"/>
+          </a:xfrm>
+          <a:prstGeom prst="rect">
+            <a:avLst/>
+          </a:prstGeom>
+          <a:noFill/>
+        </p:spPr>
+        <p:txBody>
+          <a:bodyPr wrap="square" lIns="45720" rIns="45720" tIns="27432" bIns="27432" anchor="ctr">
+            <a:spAutoFit/>
+          </a:bodyPr>
+          <a:lstStyle/>
+          <a:p>
+            <a:r>
+              <a:rPr sz="5400" b="1">
+                <a:solidFill>
+                  <a:srgbClr val="00D4AA"/>
+                </a:solidFill>
+                <a:latin typeface="Inter"/>
+              </a:rPr>
+              <a:t>→</a:t>
+            </a:r>
+          </a:p>
+        </p:txBody>
+      </p:sp>
+      <p:sp>
+        <p:nvSpPr>
+          <p:cNvPr id="4" name="TextBox 3"/>
+          <p:cNvSpPr txBox="1"/>
+          <p:nvPr/>
+        </p:nvSpPr>
+        <p:spPr>
+          <a:xfrm>
+            <a:off x="3566160" y="2148840"/>
+            <a:ext cx="7315200" cy="457200"/>
+          </a:xfrm>
+          <a:prstGeom prst="rect">
+            <a:avLst/>
+          </a:prstGeom>
+          <a:noFill/>
+        </p:spPr>
+        <p:txBody>
+          <a:bodyPr wrap="square" lIns="45720" rIns="45720" tIns="27432" bIns="27432" anchor="t">
+            <a:spAutoFit/>
+          </a:bodyPr>
+          <a:lstStyle/>
+          <a:p>
+            <a:r>
+              <a:rPr sz="1400" b="0">
+                <a:solidFill>
+                  <a:srgbClr val="94A3B8"/>
+                </a:solidFill>
+                <a:latin typeface="Inter"/>
+              </a:rPr>
+              <a:t>Next up:</a:t>
+            </a:r>
+          </a:p>
+        </p:txBody>
+      </p:sp>
+      <p:sp>
+        <p:nvSpPr>
+          <p:cNvPr id="5" name="TextBox 4"/>
+          <p:cNvSpPr txBox="1"/>
+          <p:nvPr/>
+        </p:nvSpPr>
+        <p:spPr>
+          <a:xfrm>
+            <a:off x="3566160" y="2560320"/>
+            <a:ext cx="7315200" cy="1097280"/>
+          </a:xfrm>
+          <a:prstGeom prst="rect">
+            <a:avLst/>
+          </a:prstGeom>
+          <a:noFill/>
+        </p:spPr>
+        <p:txBody>
+          <a:bodyPr wrap="square" lIns="45720" rIns="45720" tIns="27432" bIns="27432" anchor="t">
+            <a:spAutoFit/>
+          </a:bodyPr>
+          <a:lstStyle/>
+          <a:p>
+            <a:r>
+              <a:rPr sz="2600" b="1">
+                <a:solidFill>
+                  <a:srgbClr val="FFFFFF"/>
+                </a:solidFill>
+                <a:latin typeface="Inter"/>
+              </a:rPr>
+              <a:t>Quiz: Governance</a:t>
+            </a:r>
+          </a:p>
+        </p:txBody>
+      </p:sp>
+      <p:sp>
+        <p:nvSpPr>
+          <p:cNvPr id="6" name="TextBox 5"/>
+          <p:cNvSpPr txBox="1"/>
+          <p:nvPr/>
+        </p:nvSpPr>
+        <p:spPr>
+          <a:xfrm>
+            <a:off x="3566160" y="3703320"/>
+            <a:ext cx="7315200" cy="1097280"/>
+          </a:xfrm>
+          <a:prstGeom prst="rect">
+            <a:avLst/>
+          </a:prstGeom>
+          <a:noFill/>
+        </p:spPr>
+        <p:txBody>
+          <a:bodyPr wrap="square" lIns="45720" rIns="45720" tIns="27432" bIns="27432" anchor="t">
+            <a:spAutoFit/>
+          </a:bodyPr>
+          <a:lstStyle/>
+          <a:p>
+            <a:r>
+              <a:rPr sz="1400" b="0">
+                <a:solidFill>
+                  <a:srgbClr val="94A3B8"/>
+                </a:solidFill>
+                <a:latin typeface="Inter"/>
+              </a:rPr>
+              <a:t>The Section 10 quiz, and then Section 11, where you go on call and investigate three real-shaped incidents…</a:t>
+            </a:r>
+          </a:p>
+        </p:txBody>
+      </p:sp>
+    </p:spTree>
+  </p:cSld>
+  <p:clrMapOvr>
+    <a:masterClrMapping/>
+  </p:clrMapOvr>
+</p:sld>
+</file>
+
+<file path=ppt/slides/slide34.xml><?xml version="1.0" encoding="utf-8"?>
+<p:sld xmlns:a="http://schemas.openxmlformats.org/drawingml/2006/main" xmlns:p="http://schemas.openxmlformats.org/presentationml/2006/main" xmlns:r="http://schemas.openxmlformats.org/officeDocument/2006/relationships">
+  <p:cSld>
+    <p:bg>
+      <p:bgPr>
+        <a:solidFill>
+          <a:srgbClr val="0A1628"/>
+        </a:solidFill>
+        <a:effectLst/>
+      </p:bgPr>
+    </p:bg>
+    <p:spTree>
+      <p:nvGrpSpPr>
+        <p:cNvPr id="1" name=""/>
+        <p:cNvGrpSpPr/>
+        <p:nvPr/>
+      </p:nvGrpSpPr>
+      <p:grpSpPr/>
+      <p:sp>
+        <p:nvSpPr>
+          <p:cNvPr id="2" name="TextBox 1"/>
+          <p:cNvSpPr txBox="1"/>
+          <p:nvPr/>
+        </p:nvSpPr>
+        <p:spPr>
+          <a:xfrm>
+            <a:off x="457200" y="6419088"/>
+            <a:ext cx="8686800" cy="320040"/>
+          </a:xfrm>
+          <a:prstGeom prst="rect">
+            <a:avLst/>
+          </a:prstGeom>
+          <a:noFill/>
+        </p:spPr>
+        <p:txBody>
+          <a:bodyPr wrap="square" lIns="45720" rIns="45720" tIns="27432" bIns="27432" anchor="t">
+            <a:spAutoFit/>
+          </a:bodyPr>
+          <a:lstStyle/>
+          <a:p>
+            <a:r>
+              <a:rPr sz="900" b="0">
+                <a:solidFill>
+                  <a:srgbClr val="64748B"/>
+                </a:solidFill>
+                <a:latin typeface="Inter"/>
+              </a:rPr>
+              <a:t>AI Agent Observability &amp; Cost Control · Section 10 · Lecture 10.5</a:t>
+            </a:r>
+          </a:p>
+        </p:txBody>
+      </p:sp>
+      <p:sp>
+        <p:nvSpPr>
+          <p:cNvPr id="3" name="TextBox 2"/>
+          <p:cNvSpPr txBox="1"/>
+          <p:nvPr/>
+        </p:nvSpPr>
+        <p:spPr>
+          <a:xfrm>
+            <a:off x="6675120" y="320040"/>
+            <a:ext cx="5074920" cy="548640"/>
+          </a:xfrm>
+          <a:prstGeom prst="rect">
+            <a:avLst/>
+          </a:prstGeom>
+          <a:noFill/>
+        </p:spPr>
+        <p:txBody>
+          <a:bodyPr wrap="square" lIns="45720" rIns="45720" tIns="27432" bIns="27432" anchor="t">
+            <a:spAutoFit/>
+          </a:bodyPr>
+          <a:lstStyle/>
+          <a:p>
+            <a:pPr algn="r"/>
+            <a:r>
+              <a:rPr sz="1000" b="0">
+                <a:solidFill>
+                  <a:srgbClr val="94A3B8"/>
+                </a:solidFill>
+                <a:latin typeface="Inter"/>
+              </a:rPr>
+              <a:t>SECTION 10 · PRIVACY, SECURITY AND GOVERNANCE OF TELEMETRY</a:t>
+            </a:r>
+          </a:p>
+        </p:txBody>
+      </p:sp>
+      <p:sp>
+        <p:nvSpPr>
+          <p:cNvPr id="4" name="TextBox 3"/>
+          <p:cNvSpPr txBox="1"/>
+          <p:nvPr/>
+        </p:nvSpPr>
+        <p:spPr>
+          <a:xfrm>
+            <a:off x="914400" y="1417320"/>
+            <a:ext cx="10332720" cy="457200"/>
+          </a:xfrm>
+          <a:prstGeom prst="rect">
+            <a:avLst/>
+          </a:prstGeom>
+          <a:noFill/>
+        </p:spPr>
+        <p:txBody>
+          <a:bodyPr wrap="square" lIns="45720" rIns="45720" tIns="27432" bIns="27432" anchor="t">
+            <a:spAutoFit/>
+          </a:bodyPr>
+          <a:lstStyle/>
+          <a:p>
+            <a:r>
+              <a:rPr sz="1200" b="1">
+                <a:solidFill>
+                  <a:srgbClr val="00D4AA"/>
+                </a:solidFill>
+                <a:latin typeface="Inter"/>
+              </a:rPr>
+              <a:t>LECTURE 10.5</a:t>
+            </a:r>
+          </a:p>
+        </p:txBody>
+      </p:sp>
+      <p:sp>
+        <p:nvSpPr>
+          <p:cNvPr id="5" name="TextBox 4"/>
+          <p:cNvSpPr txBox="1"/>
+          <p:nvPr/>
+        </p:nvSpPr>
+        <p:spPr>
+          <a:xfrm>
+            <a:off x="914400" y="1874519"/>
+            <a:ext cx="10332720" cy="1645920"/>
+          </a:xfrm>
+          <a:prstGeom prst="rect">
+            <a:avLst/>
+          </a:prstGeom>
+          <a:noFill/>
+        </p:spPr>
+        <p:txBody>
+          <a:bodyPr wrap="square" lIns="45720" rIns="45720" tIns="27432" bIns="27432" anchor="t">
+            <a:spAutoFit/>
+          </a:bodyPr>
+          <a:lstStyle/>
+          <a:p>
+            <a:pPr>
+              <a:lnSpc>
+                <a:spcPct val="110000"/>
+              </a:lnSpc>
+            </a:pPr>
+            <a:r>
+              <a:rPr sz="3000" b="1">
+                <a:solidFill>
+                  <a:srgbClr val="FFFFFF"/>
+                </a:solidFill>
+                <a:latin typeface="Inter"/>
+              </a:rPr>
+              <a:t>Quiz: Governance</a:t>
+            </a:r>
+          </a:p>
+        </p:txBody>
+      </p:sp>
+      <p:sp>
+        <p:nvSpPr>
+          <p:cNvPr id="6" name="Rectangle 5"/>
+          <p:cNvSpPr/>
+          <p:nvPr/>
+        </p:nvSpPr>
+        <p:spPr>
+          <a:xfrm>
+            <a:off x="914400" y="3794760"/>
+            <a:ext cx="64008" cy="1143000"/>
+          </a:xfrm>
+          <a:prstGeom prst="rect">
+            <a:avLst/>
+          </a:prstGeom>
+          <a:solidFill>
+            <a:srgbClr val="00D4AA"/>
+          </a:solidFill>
+          <a:ln>
+            <a:noFill/>
+          </a:ln>
+          <a:effectLst/>
+        </p:spPr>
+        <p:style>
+          <a:lnRef idx="1">
+            <a:schemeClr val="accent1"/>
+          </a:lnRef>
+          <a:fillRef idx="3">
+            <a:schemeClr val="accent1"/>
+          </a:fillRef>
+          <a:effectRef idx="2">
+            <a:schemeClr val="accent1"/>
+          </a:effectRef>
+          <a:fontRef idx="minor">
+            <a:schemeClr val="lt1"/>
+          </a:fontRef>
+        </p:style>
+        <p:txBody>
+          <a:bodyPr rtlCol="0" anchor="ctr"/>
+          <a:lstStyle/>
+          <a:p/>
+        </p:txBody>
+      </p:sp>
+      <p:sp>
+        <p:nvSpPr>
+          <p:cNvPr id="7" name="TextBox 6"/>
+          <p:cNvSpPr txBox="1"/>
+          <p:nvPr/>
+        </p:nvSpPr>
+        <p:spPr>
+          <a:xfrm>
+            <a:off x="1188720" y="3749039"/>
+            <a:ext cx="9692640" cy="1280160"/>
+          </a:xfrm>
+          <a:prstGeom prst="rect">
+            <a:avLst/>
+          </a:prstGeom>
+          <a:noFill/>
+        </p:spPr>
+        <p:txBody>
+          <a:bodyPr wrap="square" lIns="45720" rIns="45720" tIns="27432" bIns="27432" anchor="ctr">
+            <a:spAutoFit/>
+          </a:bodyPr>
+          <a:lstStyle/>
+          <a:p>
+            <a:pPr>
+              <a:lnSpc>
+                <a:spcPct val="130000"/>
+              </a:lnSpc>
+            </a:pPr>
+            <a:r>
+              <a:rPr sz="1600" b="0">
+                <a:solidFill>
+                  <a:srgbClr val="CBD5E1"/>
+                </a:solidFill>
+                <a:latin typeface="Inter"/>
+              </a:rPr>
+              <a:t>Check you can place a masking control at the right layer, set retention per data class, and separate an audit trail from…</a:t>
+            </a:r>
+          </a:p>
+        </p:txBody>
+      </p:sp>
+    </p:spTree>
+  </p:cSld>
+  <p:clrMapOvr>
+    <a:masterClrMapping/>
+  </p:clrMapOvr>
+</p:sld>
+</file>
+
+<file path=ppt/slides/slide35.xml><?xml version="1.0" encoding="utf-8"?>
+<p:sld xmlns:a="http://schemas.openxmlformats.org/drawingml/2006/main" xmlns:p="http://schemas.openxmlformats.org/presentationml/2006/main" xmlns:r="http://schemas.openxmlformats.org/officeDocument/2006/relationships">
+  <p:cSld>
+    <p:bg>
+      <p:bgPr>
+        <a:solidFill>
+          <a:srgbClr val="0A1628"/>
+        </a:solidFill>
+        <a:effectLst/>
+      </p:bgPr>
+    </p:bg>
+    <p:spTree>
+      <p:nvGrpSpPr>
+        <p:cNvPr id="1" name=""/>
+        <p:cNvGrpSpPr/>
+        <p:nvPr/>
+      </p:nvGrpSpPr>
+      <p:grpSpPr/>
+      <p:sp>
+        <p:nvSpPr>
+          <p:cNvPr id="2" name="TextBox 1"/>
+          <p:cNvSpPr txBox="1"/>
+          <p:nvPr/>
+        </p:nvSpPr>
+        <p:spPr>
+          <a:xfrm>
+            <a:off x="457200" y="6419088"/>
+            <a:ext cx="8686800" cy="320040"/>
+          </a:xfrm>
+          <a:prstGeom prst="rect">
+            <a:avLst/>
+          </a:prstGeom>
+          <a:noFill/>
+        </p:spPr>
+        <p:txBody>
+          <a:bodyPr wrap="square" lIns="45720" rIns="45720" tIns="27432" bIns="27432" anchor="t">
+            <a:spAutoFit/>
+          </a:bodyPr>
+          <a:lstStyle/>
+          <a:p>
+            <a:r>
+              <a:rPr sz="900" b="0">
+                <a:solidFill>
+                  <a:srgbClr val="64748B"/>
+                </a:solidFill>
+                <a:latin typeface="Inter"/>
+              </a:rPr>
+              <a:t>AI Agent Observability &amp; Cost Control · Section 10 · Lecture 10.5</a:t>
+            </a:r>
+          </a:p>
+        </p:txBody>
+      </p:sp>
+      <p:sp>
+        <p:nvSpPr>
+          <p:cNvPr id="3" name="TextBox 2"/>
+          <p:cNvSpPr txBox="1"/>
+          <p:nvPr/>
+        </p:nvSpPr>
+        <p:spPr>
+          <a:xfrm>
+            <a:off x="457200" y="411480"/>
+            <a:ext cx="11247120" cy="868680"/>
+          </a:xfrm>
+          <a:prstGeom prst="rect">
+            <a:avLst/>
+          </a:prstGeom>
+          <a:noFill/>
+        </p:spPr>
+        <p:txBody>
+          <a:bodyPr wrap="square" lIns="45720" rIns="45720" tIns="27432" bIns="27432" anchor="t">
+            <a:spAutoFit/>
+          </a:bodyPr>
+          <a:lstStyle/>
+          <a:p>
+            <a:pPr>
+              <a:lnSpc>
+                <a:spcPct val="110000"/>
+              </a:lnSpc>
+            </a:pPr>
+            <a:r>
+              <a:rPr sz="2600" b="1">
+                <a:solidFill>
+                  <a:srgbClr val="FFFFFF"/>
+                </a:solidFill>
+                <a:latin typeface="Inter"/>
+              </a:rPr>
+              <a:t>Quiz: 6 questions</a:t>
+            </a:r>
+          </a:p>
+        </p:txBody>
+      </p:sp>
+      <p:sp>
+        <p:nvSpPr>
+          <p:cNvPr id="4" name="Rectangle 3"/>
+          <p:cNvSpPr/>
+          <p:nvPr/>
+        </p:nvSpPr>
+        <p:spPr>
+          <a:xfrm>
+            <a:off x="502920" y="1024128"/>
+            <a:ext cx="822960" cy="54864"/>
+          </a:xfrm>
+          <a:prstGeom prst="rect">
+            <a:avLst/>
+          </a:prstGeom>
+          <a:solidFill>
+            <a:srgbClr val="00D4AA"/>
+          </a:solidFill>
+          <a:ln>
+            <a:noFill/>
+          </a:ln>
+          <a:effectLst/>
+        </p:spPr>
+        <p:style>
+          <a:lnRef idx="1">
+            <a:schemeClr val="accent1"/>
+          </a:lnRef>
+          <a:fillRef idx="3">
+            <a:schemeClr val="accent1"/>
+          </a:fillRef>
+          <a:effectRef idx="2">
+            <a:schemeClr val="accent1"/>
+          </a:effectRef>
+          <a:fontRef idx="minor">
+            <a:schemeClr val="lt1"/>
+          </a:fontRef>
+        </p:style>
+        <p:txBody>
+          <a:bodyPr rtlCol="0" anchor="ctr"/>
+          <a:lstStyle/>
+          <a:p/>
+        </p:txBody>
+      </p:sp>
+      <p:sp>
+        <p:nvSpPr>
+          <p:cNvPr id="5" name="TextBox 4"/>
+          <p:cNvSpPr txBox="1"/>
+          <p:nvPr/>
+        </p:nvSpPr>
+        <p:spPr>
+          <a:xfrm>
+            <a:off x="640080" y="1417320"/>
+            <a:ext cx="10881360" cy="4892040"/>
+          </a:xfrm>
+          <a:prstGeom prst="rect">
+            <a:avLst/>
+          </a:prstGeom>
+          <a:noFill/>
+        </p:spPr>
+        <p:txBody>
+          <a:bodyPr wrap="square" lIns="45720" rIns="45720" tIns="27432" bIns="27432" anchor="t">
+            <a:spAutoFit/>
+          </a:bodyPr>
+          <a:lstStyle/>
+          <a:p>
+            <a:pPr marL="292608" indent="-292608">
+              <a:lnSpc>
+                <a:spcPct val="120000"/>
+              </a:lnSpc>
+              <a:spcAft>
+                <a:spcPts val="1539"/>
+              </a:spcAft>
+              <a:buClr>
+                <a:srgbClr val="00D4AA"/>
+              </a:buClr>
+              <a:buFont typeface="Inter"/>
+              <a:buChar char="•"/>
+            </a:pPr>
+            <a:r>
+              <a:rPr sz="2200" b="0">
+                <a:solidFill>
+                  <a:srgbClr val="FFFFFF"/>
+                </a:solidFill>
+                <a:latin typeface="Inter"/>
+              </a:rPr>
+              <a:t>Masking layers and hash vs placeholder</a:t>
+            </a:r>
+          </a:p>
+          <a:p>
+            <a:pPr marL="292608" indent="-292608">
+              <a:lnSpc>
+                <a:spcPct val="120000"/>
+              </a:lnSpc>
+              <a:spcAft>
+                <a:spcPts val="1539"/>
+              </a:spcAft>
+              <a:buClr>
+                <a:srgbClr val="00D4AA"/>
+              </a:buClr>
+              <a:buFont typeface="Inter"/>
+              <a:buChar char="•"/>
+            </a:pPr>
+            <a:r>
+              <a:rPr sz="2200" b="0">
+                <a:solidFill>
+                  <a:srgbClr val="FFFFFF"/>
+                </a:solidFill>
+                <a:latin typeface="Inter"/>
+              </a:rPr>
+              <a:t>Retention by data class</a:t>
+            </a:r>
+          </a:p>
+          <a:p>
+            <a:pPr marL="292608" indent="-292608">
+              <a:lnSpc>
+                <a:spcPct val="120000"/>
+              </a:lnSpc>
+              <a:spcAft>
+                <a:spcPts val="1539"/>
+              </a:spcAft>
+              <a:buClr>
+                <a:srgbClr val="00D4AA"/>
+              </a:buClr>
+              <a:buFont typeface="Inter"/>
+              <a:buChar char="•"/>
+            </a:pPr>
+            <a:r>
+              <a:rPr sz="2200" b="0">
+                <a:solidFill>
+                  <a:srgbClr val="FFFFFF"/>
+                </a:solidFill>
+                <a:latin typeface="Inter"/>
+              </a:rPr>
+              <a:t>Tags vs projects</a:t>
+            </a:r>
+          </a:p>
+          <a:p>
+            <a:pPr marL="292608" indent="-292608">
+              <a:lnSpc>
+                <a:spcPct val="120000"/>
+              </a:lnSpc>
+              <a:spcAft>
+                <a:spcPts val="1539"/>
+              </a:spcAft>
+              <a:buClr>
+                <a:srgbClr val="00D4AA"/>
+              </a:buClr>
+              <a:buFont typeface="Inter"/>
+              <a:buChar char="•"/>
+            </a:pPr>
+            <a:r>
+              <a:rPr sz="2200" b="0">
+                <a:solidFill>
+                  <a:srgbClr val="FFFFFF"/>
+                </a:solidFill>
+                <a:latin typeface="Inter"/>
+              </a:rPr>
+              <a:t>Audit trail vs telemetry</a:t>
+            </a:r>
+          </a:p>
+        </p:txBody>
+      </p:sp>
+    </p:spTree>
+  </p:cSld>
+  <p:clrMapOvr>
+    <a:masterClrMapping/>
+  </p:clrMapOvr>
+</p:sld>
+</file>
+
+<file path=ppt/slides/slide36.xml><?xml version="1.0" encoding="utf-8"?>
+<p:sld xmlns:a="http://schemas.openxmlformats.org/drawingml/2006/main" xmlns:p="http://schemas.openxmlformats.org/presentationml/2006/main" xmlns:r="http://schemas.openxmlformats.org/officeDocument/2006/relationships">
+  <p:cSld>
+    <p:bg>
+      <p:bgPr>
+        <a:solidFill>
+          <a:srgbClr val="0A1628"/>
+        </a:solidFill>
+        <a:effectLst/>
+      </p:bgPr>
+    </p:bg>
+    <p:spTree>
+      <p:nvGrpSpPr>
+        <p:cNvPr id="1" name=""/>
+        <p:cNvGrpSpPr/>
+        <p:nvPr/>
+      </p:nvGrpSpPr>
+      <p:grpSpPr/>
+      <p:sp>
+        <p:nvSpPr>
+          <p:cNvPr id="2" name="TextBox 1"/>
+          <p:cNvSpPr txBox="1"/>
+          <p:nvPr/>
+        </p:nvSpPr>
+        <p:spPr>
+          <a:xfrm>
+            <a:off x="457200" y="6419088"/>
+            <a:ext cx="8686800" cy="320040"/>
+          </a:xfrm>
+          <a:prstGeom prst="rect">
+            <a:avLst/>
+          </a:prstGeom>
+          <a:noFill/>
+        </p:spPr>
+        <p:txBody>
+          <a:bodyPr wrap="square" lIns="45720" rIns="45720" tIns="27432" bIns="27432" anchor="t">
+            <a:spAutoFit/>
+          </a:bodyPr>
+          <a:lstStyle/>
+          <a:p>
+            <a:r>
+              <a:rPr sz="900" b="0">
+                <a:solidFill>
+                  <a:srgbClr val="64748B"/>
+                </a:solidFill>
+                <a:latin typeface="Inter"/>
+              </a:rPr>
               <a:t>AI Agent Observability &amp; Cost Control · Section 10 · Lecture 10.5</a:t>
             </a:r>
           </a:p>
@@ -12189,7 +14882,7 @@
         </p:nvGraphicFramePr>
         <p:xfrm>
           <a:off x="457200" y="1325880"/>
-          <a:ext cx="11292838" cy="2688336"/>
+          <a:ext cx="11292839" cy="2688336"/>
         </p:xfrm>
         <a:graphic>
           <a:graphicData uri="http://schemas.openxmlformats.org/drawingml/2006/table">
@@ -12198,9 +14891,9 @@
                 <a:tableStyleId>{5C22544A-7EE6-4342-B048-85BDC9FD1C3A}</a:tableStyleId>
               </a:tblPr>
               <a:tblGrid>
-                <a:gridCol w="3087885"/>
-                <a:gridCol w="5293518"/>
-                <a:gridCol w="2911435"/>
+                <a:gridCol w="3896825"/>
+                <a:gridCol w="4771622"/>
+                <a:gridCol w="2624392"/>
               </a:tblGrid>
               <a:tr h="384048">
                 <a:tc>
@@ -12259,7 +14952,7 @@
                           </a:solidFill>
                           <a:latin typeface="Inter"/>
                         </a:rPr>
-                        <a:t>Default retention</a:t>
+                        <a:t>Retention</a:t>
                       </a:r>
                     </a:p>
                   </a:txBody>
@@ -12351,7 +15044,7 @@
                           </a:solidFill>
                           <a:latin typeface="Inter"/>
                         </a:rPr>
-                        <a:t>OTel Collector → any exporter</a:t>
+                        <a:t>OTel Collector → any exporter (Langfuse, Phoenix)</a:t>
                       </a:r>
                     </a:p>
                   </a:txBody>
@@ -12428,7 +15121,7 @@
                           </a:solidFill>
                           <a:latin typeface="JetBrains Mono"/>
                         </a:rPr>
-                        <a:t>local_store.py</a:t>
+                        <a:t>.atlas/*.sqlite</a:t>
                       </a:r>
                       <a:r>
                         <a:rPr sz="1200" b="1">
@@ -12481,7 +15174,16 @@
                           </a:solidFill>
                           <a:latin typeface="Inter"/>
                         </a:rPr>
-                        <a:t>forever</a:t>
+                        <a:t>until </a:t>
+                      </a:r>
+                      <a:r>
+                        <a:rPr sz="1104" b="0">
+                          <a:solidFill>
+                            <a:srgbClr val="00D4AA"/>
+                          </a:solidFill>
+                          <a:latin typeface="JetBrains Mono"/>
+                        </a:rPr>
+                        <a:t>make clean</a:t>
                       </a:r>
                     </a:p>
                   </a:txBody>
@@ -12663,7 +15365,7 @@
                           </a:solidFill>
                           <a:latin typeface="Inter"/>
                         </a:rPr>
-                        <a:t>dashboard viewers; no PII by design if you followed 5.5</a:t>
+                        <a:t>dashboard viewers; no ids by design (9.2)</a:t>
                       </a:r>
                     </a:p>
                   </a:txBody>
@@ -12794,7 +15496,7 @@
                 </a:solidFill>
                 <a:latin typeface="Inter"/>
               </a:rPr>
-              <a:t>The numbers (one replayed day, synthetic)</a:t>
+              <a:t>The scale (one replayed day, synthetic)</a:t>
             </a:r>
           </a:p>
         </p:txBody>
@@ -12883,7 +15585,7 @@
                 </a:solidFill>
                 <a:latin typeface="Inter"/>
               </a:rPr>
-              <a:t>1,240 email addresses, 310 phone numbers, about 10,000 employee IDs, 6 card numbers, 90 addresses</a:t>
+              <a:t>An employee ID on every one of the 10,184 agent spans</a:t>
             </a:r>
           </a:p>
           <a:p>
@@ -12907,7 +15609,7 @@
                 </a:solidFill>
                 <a:latin typeface="Inter"/>
               </a:rPr>
-              <a:t>62% in tool results, 31% in user input, 7% in Atlas's output</a:t>
+              <a:t>Every question and every answer, in plain text, on the agent span</a:t>
             </a:r>
           </a:p>
           <a:p>
@@ -12931,7 +15633,7 @@
                 </a:solidFill>
                 <a:latin typeface="Inter"/>
               </a:rPr>
-              <a:t>Multiply by 30 days of retention and 4 destinations: about 1.5 million PII values at rest</a:t>
+              <a:t>678 answers flagged by the PII detector in 8.4, before anyone reviewed them</a:t>
             </a:r>
           </a:p>
           <a:p>
@@ -12955,7 +15657,31 @@
                 </a:solidFill>
                 <a:latin typeface="Inter"/>
               </a:rPr>
-              <a:t>Cost of masking all of it: about 0.4 ms per span, zero tokens</a:t>
+              <a:t>Illustrative: multiply by 30 days of retention and four destinations, and a helpdesk holds over a million identifiers at rest</a:t>
+            </a:r>
+          </a:p>
+          <a:p>
+            <a:pPr marL="292608" indent="-292608">
+              <a:lnSpc>
+                <a:spcPct val="120000"/>
+              </a:lnSpc>
+              <a:spcAft>
+                <a:spcPts val="1260"/>
+              </a:spcAft>
+              <a:buClr>
+                <a:srgbClr val="00D4AA"/>
+              </a:buClr>
+              <a:buFont typeface="Inter"/>
+              <a:buChar char="•"/>
+            </a:pPr>
+            <a:r>
+              <a:rPr sz="1800" b="0">
+                <a:solidFill>
+                  <a:srgbClr val="FFFFFF"/>
+                </a:solidFill>
+                <a:latin typeface="Inter"/>
+              </a:rPr>
+              <a:t>Masking a value costs a fraction of a millisecond and no tokens</a:t>
             </a:r>
           </a:p>
         </p:txBody>
@@ -13054,7 +15780,7 @@
                 </a:solidFill>
                 <a:latin typeface="Inter"/>
               </a:rPr>
-              <a:t>Four threats, four lectures</a:t>
+              <a:t>Four threats, four answers</a:t>
             </a:r>
           </a:p>
         </p:txBody>
@@ -13143,7 +15869,7 @@
                 </a:solidFill>
                 <a:latin typeface="Inter"/>
               </a:rPr>
-              <a:t>Over-collection: you captured what you didn't need → masking at the SDK and the collector (10.2)</a:t>
+              <a:t>Over-collection: you captured what you didn't need → masking at the source, the SDK and the collector (10.2)</a:t>
             </a:r>
           </a:p>
           <a:p>
@@ -13341,8 +16067,122 @@
         </p:nvSpPr>
         <p:spPr>
           <a:xfrm>
-            <a:off x="2377440" y="2286000"/>
-            <a:ext cx="1097280" cy="1097280"/>
+            <a:off x="1371600" y="822960"/>
+            <a:ext cx="9418320" cy="457200"/>
+          </a:xfrm>
+          <a:prstGeom prst="rect">
+            <a:avLst/>
+          </a:prstGeom>
+          <a:noFill/>
+        </p:spPr>
+        <p:txBody>
+          <a:bodyPr wrap="square" lIns="45720" rIns="45720" tIns="27432" bIns="27432" anchor="t">
+            <a:spAutoFit/>
+          </a:bodyPr>
+          <a:lstStyle/>
+          <a:p>
+            <a:pPr algn="ctr"/>
+            <a:r>
+              <a:rPr sz="1200" b="1">
+                <a:solidFill>
+                  <a:srgbClr val="00D4AA"/>
+                </a:solidFill>
+                <a:latin typeface="Inter"/>
+              </a:rPr>
+              <a:t>RECAP</a:t>
+            </a:r>
+          </a:p>
+        </p:txBody>
+      </p:sp>
+      <p:sp>
+        <p:nvSpPr>
+          <p:cNvPr id="4" name="TextBox 3"/>
+          <p:cNvSpPr txBox="1"/>
+          <p:nvPr/>
+        </p:nvSpPr>
+        <p:spPr>
+          <a:xfrm>
+            <a:off x="1371600" y="1234440"/>
+            <a:ext cx="9418320" cy="822960"/>
+          </a:xfrm>
+          <a:prstGeom prst="rect">
+            <a:avLst/>
+          </a:prstGeom>
+          <a:noFill/>
+        </p:spPr>
+        <p:txBody>
+          <a:bodyPr wrap="square" lIns="45720" rIns="45720" tIns="27432" bIns="27432" anchor="t">
+            <a:spAutoFit/>
+          </a:bodyPr>
+          <a:lstStyle/>
+          <a:p>
+            <a:pPr algn="ctr"/>
+            <a:r>
+              <a:rPr sz="2600" b="1">
+                <a:solidFill>
+                  <a:srgbClr val="FFFFFF"/>
+                </a:solidFill>
+                <a:latin typeface="Inter"/>
+              </a:rPr>
+              <a:t>Key takeaways</a:t>
+            </a:r>
+          </a:p>
+        </p:txBody>
+      </p:sp>
+      <p:sp>
+        <p:nvSpPr>
+          <p:cNvPr id="5" name="Rounded Rectangle 4"/>
+          <p:cNvSpPr/>
+          <p:nvPr/>
+        </p:nvSpPr>
+        <p:spPr>
+          <a:xfrm>
+            <a:off x="2011680" y="2514600"/>
+            <a:ext cx="8138160" cy="777240"/>
+          </a:xfrm>
+          <a:prstGeom prst="roundRect">
+            <a:avLst>
+              <a:gd name="adj" fmla="val 6588"/>
+            </a:avLst>
+          </a:prstGeom>
+          <a:solidFill>
+            <a:srgbClr val="1A2742"/>
+          </a:solidFill>
+          <a:ln>
+            <a:noFill/>
+          </a:ln>
+          <a:effectLst/>
+        </p:spPr>
+        <p:style>
+          <a:lnRef idx="1">
+            <a:schemeClr val="accent1"/>
+          </a:lnRef>
+          <a:fillRef idx="3">
+            <a:schemeClr val="accent1"/>
+          </a:fillRef>
+          <a:effectRef idx="2">
+            <a:schemeClr val="accent1"/>
+          </a:effectRef>
+          <a:fontRef idx="minor">
+            <a:schemeClr val="lt1"/>
+          </a:fontRef>
+        </p:style>
+        <p:txBody>
+          <a:bodyPr rtlCol="0" anchor="ctr"/>
+          <a:lstStyle/>
+          <a:p/>
+        </p:txBody>
+      </p:sp>
+      <p:sp>
+        <p:nvSpPr>
+          <p:cNvPr id="6" name="TextBox 5"/>
+          <p:cNvSpPr txBox="1"/>
+          <p:nvPr/>
+        </p:nvSpPr>
+        <p:spPr>
+          <a:xfrm>
+            <a:off x="2194560" y="2514600"/>
+            <a:ext cx="548640" cy="777240"/>
           </a:xfrm>
           <a:prstGeom prst="rect">
             <a:avLst/>
@@ -13356,27 +16196,27 @@
           <a:lstStyle/>
           <a:p>
             <a:r>
-              <a:rPr sz="5400" b="1">
+              <a:rPr sz="2200" b="1">
                 <a:solidFill>
                   <a:srgbClr val="00D4AA"/>
                 </a:solidFill>
                 <a:latin typeface="Inter"/>
               </a:rPr>
-              <a:t>→</a:t>
-            </a:r>
-          </a:p>
-        </p:txBody>
-      </p:sp>
-      <p:sp>
-        <p:nvSpPr>
-          <p:cNvPr id="4" name="TextBox 3"/>
+              <a:t>✓</a:t>
+            </a:r>
+          </a:p>
+        </p:txBody>
+      </p:sp>
+      <p:sp>
+        <p:nvSpPr>
+          <p:cNvPr id="7" name="TextBox 6"/>
           <p:cNvSpPr txBox="1"/>
           <p:nvPr/>
         </p:nvSpPr>
         <p:spPr>
           <a:xfrm>
-            <a:off x="3566160" y="2148840"/>
-            <a:ext cx="7315200" cy="457200"/>
+            <a:off x="2788920" y="2514600"/>
+            <a:ext cx="7223760" cy="777240"/>
           </a:xfrm>
           <a:prstGeom prst="rect">
             <a:avLst/>
@@ -13384,33 +16224,77 @@
           <a:noFill/>
         </p:spPr>
         <p:txBody>
-          <a:bodyPr wrap="square" lIns="45720" rIns="45720" tIns="27432" bIns="27432" anchor="t">
+          <a:bodyPr wrap="square" lIns="45720" rIns="45720" tIns="27432" bIns="27432" anchor="ctr">
             <a:spAutoFit/>
           </a:bodyPr>
           <a:lstStyle/>
           <a:p>
             <a:r>
-              <a:rPr sz="1400" b="0">
-                <a:solidFill>
-                  <a:srgbClr val="94A3B8"/>
-                </a:solidFill>
-                <a:latin typeface="Inter"/>
-              </a:rPr>
-              <a:t>Next up:</a:t>
-            </a:r>
-          </a:p>
-        </p:txBody>
-      </p:sp>
-      <p:sp>
-        <p:nvSpPr>
-          <p:cNvPr id="5" name="TextBox 4"/>
+              <a:rPr sz="1800" b="1">
+                <a:solidFill>
+                  <a:srgbClr val="FFFFFF"/>
+                </a:solidFill>
+                <a:latin typeface="Inter"/>
+              </a:rPr>
+              <a:t>A trace copies identifiers, questions and answers</a:t>
+            </a:r>
+          </a:p>
+        </p:txBody>
+      </p:sp>
+      <p:sp>
+        <p:nvSpPr>
+          <p:cNvPr id="8" name="Rounded Rectangle 7"/>
+          <p:cNvSpPr/>
+          <p:nvPr/>
+        </p:nvSpPr>
+        <p:spPr>
+          <a:xfrm>
+            <a:off x="2011680" y="3474720"/>
+            <a:ext cx="8138160" cy="777240"/>
+          </a:xfrm>
+          <a:prstGeom prst="roundRect">
+            <a:avLst>
+              <a:gd name="adj" fmla="val 6588"/>
+            </a:avLst>
+          </a:prstGeom>
+          <a:solidFill>
+            <a:srgbClr val="1A2742"/>
+          </a:solidFill>
+          <a:ln>
+            <a:noFill/>
+          </a:ln>
+          <a:effectLst/>
+        </p:spPr>
+        <p:style>
+          <a:lnRef idx="1">
+            <a:schemeClr val="accent1"/>
+          </a:lnRef>
+          <a:fillRef idx="3">
+            <a:schemeClr val="accent1"/>
+          </a:fillRef>
+          <a:effectRef idx="2">
+            <a:schemeClr val="accent1"/>
+          </a:effectRef>
+          <a:fontRef idx="minor">
+            <a:schemeClr val="lt1"/>
+          </a:fontRef>
+        </p:style>
+        <p:txBody>
+          <a:bodyPr rtlCol="0" anchor="ctr"/>
+          <a:lstStyle/>
+          <a:p/>
+        </p:txBody>
+      </p:sp>
+      <p:sp>
+        <p:nvSpPr>
+          <p:cNvPr id="9" name="TextBox 8"/>
           <p:cNvSpPr txBox="1"/>
           <p:nvPr/>
         </p:nvSpPr>
         <p:spPr>
           <a:xfrm>
-            <a:off x="3566160" y="2560320"/>
-            <a:ext cx="7315200" cy="1097280"/>
+            <a:off x="2194560" y="3474720"/>
+            <a:ext cx="548640" cy="777240"/>
           </a:xfrm>
           <a:prstGeom prst="rect">
             <a:avLst/>
@@ -13418,33 +16302,33 @@
           <a:noFill/>
         </p:spPr>
         <p:txBody>
-          <a:bodyPr wrap="square" lIns="45720" rIns="45720" tIns="27432" bIns="27432" anchor="t">
+          <a:bodyPr wrap="square" lIns="45720" rIns="45720" tIns="27432" bIns="27432" anchor="ctr">
             <a:spAutoFit/>
           </a:bodyPr>
           <a:lstStyle/>
           <a:p>
             <a:r>
-              <a:rPr sz="2600" b="1">
-                <a:solidFill>
-                  <a:srgbClr val="FFFFFF"/>
-                </a:solidFill>
-                <a:latin typeface="Inter"/>
-              </a:rPr>
-              <a:t>Code-along: masking in the SDK and the collector</a:t>
-            </a:r>
-          </a:p>
-        </p:txBody>
-      </p:sp>
-      <p:sp>
-        <p:nvSpPr>
-          <p:cNvPr id="6" name="TextBox 5"/>
+              <a:rPr sz="2200" b="1">
+                <a:solidFill>
+                  <a:srgbClr val="00D4AA"/>
+                </a:solidFill>
+                <a:latin typeface="Inter"/>
+              </a:rPr>
+              <a:t>✓</a:t>
+            </a:r>
+          </a:p>
+        </p:txBody>
+      </p:sp>
+      <p:sp>
+        <p:nvSpPr>
+          <p:cNvPr id="10" name="TextBox 9"/>
           <p:cNvSpPr txBox="1"/>
           <p:nvPr/>
         </p:nvSpPr>
         <p:spPr>
           <a:xfrm>
-            <a:off x="3566160" y="3703320"/>
-            <a:ext cx="7315200" cy="1097280"/>
+            <a:off x="2788920" y="3474720"/>
+            <a:ext cx="7223760" cy="777240"/>
           </a:xfrm>
           <a:prstGeom prst="rect">
             <a:avLst/>
@@ -13452,19 +16336,131 @@
           <a:noFill/>
         </p:spPr>
         <p:txBody>
-          <a:bodyPr wrap="square" lIns="45720" rIns="45720" tIns="27432" bIns="27432" anchor="t">
+          <a:bodyPr wrap="square" lIns="45720" rIns="45720" tIns="27432" bIns="27432" anchor="ctr">
             <a:spAutoFit/>
           </a:bodyPr>
           <a:lstStyle/>
           <a:p>
             <a:r>
-              <a:rPr sz="1400" b="0">
-                <a:solidFill>
-                  <a:srgbClr val="94A3B8"/>
-                </a:solidFill>
-                <a:latin typeface="Inter"/>
-              </a:rPr>
-              <a:t>Next, the code-along: masking in the Langfuse SDK, in the OpenTelemetry collector, and at the source in tool…</a:t>
+              <a:rPr sz="1800" b="1">
+                <a:solidFill>
+                  <a:srgbClr val="FFFFFF"/>
+                </a:solidFill>
+                <a:latin typeface="Inter"/>
+              </a:rPr>
+              <a:t>Six destinations, each with its own readers</a:t>
+            </a:r>
+          </a:p>
+        </p:txBody>
+      </p:sp>
+      <p:sp>
+        <p:nvSpPr>
+          <p:cNvPr id="11" name="Rounded Rectangle 10"/>
+          <p:cNvSpPr/>
+          <p:nvPr/>
+        </p:nvSpPr>
+        <p:spPr>
+          <a:xfrm>
+            <a:off x="2011680" y="4434840"/>
+            <a:ext cx="8138160" cy="777240"/>
+          </a:xfrm>
+          <a:prstGeom prst="roundRect">
+            <a:avLst>
+              <a:gd name="adj" fmla="val 6588"/>
+            </a:avLst>
+          </a:prstGeom>
+          <a:solidFill>
+            <a:srgbClr val="1A2742"/>
+          </a:solidFill>
+          <a:ln>
+            <a:noFill/>
+          </a:ln>
+          <a:effectLst/>
+        </p:spPr>
+        <p:style>
+          <a:lnRef idx="1">
+            <a:schemeClr val="accent1"/>
+          </a:lnRef>
+          <a:fillRef idx="3">
+            <a:schemeClr val="accent1"/>
+          </a:fillRef>
+          <a:effectRef idx="2">
+            <a:schemeClr val="accent1"/>
+          </a:effectRef>
+          <a:fontRef idx="minor">
+            <a:schemeClr val="lt1"/>
+          </a:fontRef>
+        </p:style>
+        <p:txBody>
+          <a:bodyPr rtlCol="0" anchor="ctr"/>
+          <a:lstStyle/>
+          <a:p/>
+        </p:txBody>
+      </p:sp>
+      <p:sp>
+        <p:nvSpPr>
+          <p:cNvPr id="12" name="TextBox 11"/>
+          <p:cNvSpPr txBox="1"/>
+          <p:nvPr/>
+        </p:nvSpPr>
+        <p:spPr>
+          <a:xfrm>
+            <a:off x="2194560" y="4434840"/>
+            <a:ext cx="548640" cy="777240"/>
+          </a:xfrm>
+          <a:prstGeom prst="rect">
+            <a:avLst/>
+          </a:prstGeom>
+          <a:noFill/>
+        </p:spPr>
+        <p:txBody>
+          <a:bodyPr wrap="square" lIns="45720" rIns="45720" tIns="27432" bIns="27432" anchor="ctr">
+            <a:spAutoFit/>
+          </a:bodyPr>
+          <a:lstStyle/>
+          <a:p>
+            <a:r>
+              <a:rPr sz="2200" b="1">
+                <a:solidFill>
+                  <a:srgbClr val="00D4AA"/>
+                </a:solidFill>
+                <a:latin typeface="Inter"/>
+              </a:rPr>
+              <a:t>✓</a:t>
+            </a:r>
+          </a:p>
+        </p:txBody>
+      </p:sp>
+      <p:sp>
+        <p:nvSpPr>
+          <p:cNvPr id="13" name="TextBox 12"/>
+          <p:cNvSpPr txBox="1"/>
+          <p:nvPr/>
+        </p:nvSpPr>
+        <p:spPr>
+          <a:xfrm>
+            <a:off x="2788920" y="4434840"/>
+            <a:ext cx="7223760" cy="777240"/>
+          </a:xfrm>
+          <a:prstGeom prst="rect">
+            <a:avLst/>
+          </a:prstGeom>
+          <a:noFill/>
+        </p:spPr>
+        <p:txBody>
+          <a:bodyPr wrap="square" lIns="45720" rIns="45720" tIns="27432" bIns="27432" anchor="ctr">
+            <a:spAutoFit/>
+          </a:bodyPr>
+          <a:lstStyle/>
+          <a:p>
+            <a:r>
+              <a:rPr sz="1800" b="1">
+                <a:solidFill>
+                  <a:srgbClr val="FFFFFF"/>
+                </a:solidFill>
+                <a:latin typeface="Inter"/>
+              </a:rPr>
+              <a:t>Mask before export: the cheapest control</a:t>
             </a:r>
           </a:p>
         </p:txBody>
@@ -13524,7 +16520,7 @@
                 </a:solidFill>
                 <a:latin typeface="Inter"/>
               </a:rPr>
-              <a:t>AI Agent Observability &amp; Cost Control · Section 10 · Lecture 10.2</a:t>
+              <a:t>AI Agent Observability &amp; Cost Control · Section 10 · Lecture 10.1</a:t>
             </a:r>
           </a:p>
         </p:txBody>
@@ -13537,8 +16533,42 @@
         </p:nvSpPr>
         <p:spPr>
           <a:xfrm>
-            <a:off x="6675120" y="320040"/>
-            <a:ext cx="5074920" cy="548640"/>
+            <a:off x="2377440" y="2286000"/>
+            <a:ext cx="1097280" cy="1097280"/>
+          </a:xfrm>
+          <a:prstGeom prst="rect">
+            <a:avLst/>
+          </a:prstGeom>
+          <a:noFill/>
+        </p:spPr>
+        <p:txBody>
+          <a:bodyPr wrap="square" lIns="45720" rIns="45720" tIns="27432" bIns="27432" anchor="ctr">
+            <a:spAutoFit/>
+          </a:bodyPr>
+          <a:lstStyle/>
+          <a:p>
+            <a:r>
+              <a:rPr sz="5400" b="1">
+                <a:solidFill>
+                  <a:srgbClr val="00D4AA"/>
+                </a:solidFill>
+                <a:latin typeface="Inter"/>
+              </a:rPr>
+              <a:t>→</a:t>
+            </a:r>
+          </a:p>
+        </p:txBody>
+      </p:sp>
+      <p:sp>
+        <p:nvSpPr>
+          <p:cNvPr id="4" name="TextBox 3"/>
+          <p:cNvSpPr txBox="1"/>
+          <p:nvPr/>
+        </p:nvSpPr>
+        <p:spPr>
+          <a:xfrm>
+            <a:off x="3566160" y="2148840"/>
+            <a:ext cx="7315200" cy="457200"/>
           </a:xfrm>
           <a:prstGeom prst="rect">
             <a:avLst/>
@@ -13551,29 +16581,28 @@
           </a:bodyPr>
           <a:lstStyle/>
           <a:p>
-            <a:pPr algn="r"/>
-            <a:r>
-              <a:rPr sz="1000" b="0">
+            <a:r>
+              <a:rPr sz="1400" b="0">
                 <a:solidFill>
                   <a:srgbClr val="94A3B8"/>
                 </a:solidFill>
                 <a:latin typeface="Inter"/>
               </a:rPr>
-              <a:t>SECTION 10 · PRIVACY, SECURITY AND GOVERNANCE OF TELEMETRY</a:t>
-            </a:r>
-          </a:p>
-        </p:txBody>
-      </p:sp>
-      <p:sp>
-        <p:nvSpPr>
-          <p:cNvPr id="4" name="TextBox 3"/>
+              <a:t>Next up:</a:t>
+            </a:r>
+          </a:p>
+        </p:txBody>
+      </p:sp>
+      <p:sp>
+        <p:nvSpPr>
+          <p:cNvPr id="5" name="TextBox 4"/>
           <p:cNvSpPr txBox="1"/>
           <p:nvPr/>
         </p:nvSpPr>
         <p:spPr>
           <a:xfrm>
-            <a:off x="914400" y="1417320"/>
-            <a:ext cx="10332720" cy="457200"/>
+            <a:off x="3566160" y="2560320"/>
+            <a:ext cx="7315200" cy="1097280"/>
           </a:xfrm>
           <a:prstGeom prst="rect">
             <a:avLst/>
@@ -13587,27 +16616,27 @@
           <a:lstStyle/>
           <a:p>
             <a:r>
-              <a:rPr sz="1200" b="1">
-                <a:solidFill>
-                  <a:srgbClr val="00D4AA"/>
-                </a:solidFill>
-                <a:latin typeface="Inter"/>
-              </a:rPr>
-              <a:t>LECTURE 10.2</a:t>
-            </a:r>
-          </a:p>
-        </p:txBody>
-      </p:sp>
-      <p:sp>
-        <p:nvSpPr>
-          <p:cNvPr id="5" name="TextBox 4"/>
+              <a:rPr sz="2600" b="1">
+                <a:solidFill>
+                  <a:srgbClr val="FFFFFF"/>
+                </a:solidFill>
+                <a:latin typeface="Inter"/>
+              </a:rPr>
+              <a:t>Code-along: masking in the SDK and the collector</a:t>
+            </a:r>
+          </a:p>
+        </p:txBody>
+      </p:sp>
+      <p:sp>
+        <p:nvSpPr>
+          <p:cNvPr id="6" name="TextBox 5"/>
           <p:cNvSpPr txBox="1"/>
           <p:nvPr/>
         </p:nvSpPr>
         <p:spPr>
           <a:xfrm>
-            <a:off x="914400" y="1874519"/>
-            <a:ext cx="10332720" cy="1645920"/>
+            <a:off x="3566160" y="3703320"/>
+            <a:ext cx="7315200" cy="1097280"/>
           </a:xfrm>
           <a:prstGeom prst="rect">
             <a:avLst/>
@@ -13620,118 +16649,14 @@
           </a:bodyPr>
           <a:lstStyle/>
           <a:p>
-            <a:pPr>
-              <a:lnSpc>
-                <a:spcPct val="110000"/>
-              </a:lnSpc>
-            </a:pPr>
-            <a:r>
-              <a:rPr sz="3000" b="1">
-                <a:solidFill>
-                  <a:srgbClr val="FFFFFF"/>
-                </a:solidFill>
-                <a:latin typeface="Inter"/>
-              </a:rPr>
-              <a:t>Code-along: masking in the SDK and the collector</a:t>
-            </a:r>
-          </a:p>
-        </p:txBody>
-      </p:sp>
-      <p:sp>
-        <p:nvSpPr>
-          <p:cNvPr id="6" name="Rectangle 5"/>
-          <p:cNvSpPr/>
-          <p:nvPr/>
-        </p:nvSpPr>
-        <p:spPr>
-          <a:xfrm>
-            <a:off x="914400" y="3794760"/>
-            <a:ext cx="64008" cy="1143000"/>
-          </a:xfrm>
-          <a:prstGeom prst="rect">
-            <a:avLst/>
-          </a:prstGeom>
-          <a:solidFill>
-            <a:srgbClr val="00D4AA"/>
-          </a:solidFill>
-          <a:ln>
-            <a:noFill/>
-          </a:ln>
-          <a:effectLst/>
-        </p:spPr>
-        <p:style>
-          <a:lnRef idx="1">
-            <a:schemeClr val="accent1"/>
-          </a:lnRef>
-          <a:fillRef idx="3">
-            <a:schemeClr val="accent1"/>
-          </a:fillRef>
-          <a:effectRef idx="2">
-            <a:schemeClr val="accent1"/>
-          </a:effectRef>
-          <a:fontRef idx="minor">
-            <a:schemeClr val="lt1"/>
-          </a:fontRef>
-        </p:style>
-        <p:txBody>
-          <a:bodyPr rtlCol="0" anchor="ctr"/>
-          <a:lstStyle/>
-          <a:p/>
-        </p:txBody>
-      </p:sp>
-      <p:sp>
-        <p:nvSpPr>
-          <p:cNvPr id="7" name="TextBox 6"/>
-          <p:cNvSpPr txBox="1"/>
-          <p:nvPr/>
-        </p:nvSpPr>
-        <p:spPr>
-          <a:xfrm>
-            <a:off x="1188720" y="3749039"/>
-            <a:ext cx="9692640" cy="1280160"/>
-          </a:xfrm>
-          <a:prstGeom prst="rect">
-            <a:avLst/>
-          </a:prstGeom>
-          <a:noFill/>
-        </p:spPr>
-        <p:txBody>
-          <a:bodyPr wrap="square" lIns="45720" rIns="45720" tIns="27432" bIns="27432" anchor="ctr">
-            <a:spAutoFit/>
-          </a:bodyPr>
-          <a:lstStyle/>
-          <a:p>
-            <a:pPr>
-              <a:lnSpc>
-                <a:spcPct val="130000"/>
-              </a:lnSpc>
-            </a:pPr>
-            <a:r>
-              <a:rPr sz="1600" b="0">
-                <a:solidFill>
-                  <a:srgbClr val="CBD5E1"/>
-                </a:solidFill>
-                <a:latin typeface="Inter"/>
-              </a:rPr>
-              <a:t>Mask PII in three layers, at the source in tool results, in the Langfuse SDK with </a:t>
-            </a:r>
-            <a:r>
-              <a:rPr sz="1472" b="0">
-                <a:solidFill>
-                  <a:srgbClr val="00D4AA"/>
-                </a:solidFill>
-                <a:latin typeface="JetBrains Mono"/>
-              </a:rPr>
-              <a:t>mask=</a:t>
-            </a:r>
-            <a:r>
-              <a:rPr sz="1600" b="0">
-                <a:solidFill>
-                  <a:srgbClr val="CBD5E1"/>
-                </a:solidFill>
-                <a:latin typeface="Inter"/>
-              </a:rPr>
-              <a:t>, and in the collector for…</a:t>
+            <a:r>
+              <a:rPr sz="1400" b="0">
+                <a:solidFill>
+                  <a:srgbClr val="94A3B8"/>
+                </a:solidFill>
+                <a:latin typeface="Inter"/>
+              </a:rPr>
+              <a:t>Next, the code-along: masking at the source, in the Langfuse SDK and in the OpenTelemetry collector, with a…</a:t>
             </a:r>
           </a:p>
         </p:txBody>
@@ -13804,8 +16729,77 @@
         </p:nvSpPr>
         <p:spPr>
           <a:xfrm>
-            <a:off x="457200" y="411480"/>
-            <a:ext cx="11247120" cy="868680"/>
+            <a:off x="6675120" y="320040"/>
+            <a:ext cx="5074920" cy="548640"/>
+          </a:xfrm>
+          <a:prstGeom prst="rect">
+            <a:avLst/>
+          </a:prstGeom>
+          <a:noFill/>
+        </p:spPr>
+        <p:txBody>
+          <a:bodyPr wrap="square" lIns="45720" rIns="45720" tIns="27432" bIns="27432" anchor="t">
+            <a:spAutoFit/>
+          </a:bodyPr>
+          <a:lstStyle/>
+          <a:p>
+            <a:pPr algn="r"/>
+            <a:r>
+              <a:rPr sz="1000" b="0">
+                <a:solidFill>
+                  <a:srgbClr val="94A3B8"/>
+                </a:solidFill>
+                <a:latin typeface="Inter"/>
+              </a:rPr>
+              <a:t>SECTION 10 · PRIVACY, SECURITY AND GOVERNANCE OF TELEMETRY</a:t>
+            </a:r>
+          </a:p>
+        </p:txBody>
+      </p:sp>
+      <p:sp>
+        <p:nvSpPr>
+          <p:cNvPr id="4" name="TextBox 3"/>
+          <p:cNvSpPr txBox="1"/>
+          <p:nvPr/>
+        </p:nvSpPr>
+        <p:spPr>
+          <a:xfrm>
+            <a:off x="914400" y="1417320"/>
+            <a:ext cx="10332720" cy="457200"/>
+          </a:xfrm>
+          <a:prstGeom prst="rect">
+            <a:avLst/>
+          </a:prstGeom>
+          <a:noFill/>
+        </p:spPr>
+        <p:txBody>
+          <a:bodyPr wrap="square" lIns="45720" rIns="45720" tIns="27432" bIns="27432" anchor="t">
+            <a:spAutoFit/>
+          </a:bodyPr>
+          <a:lstStyle/>
+          <a:p>
+            <a:r>
+              <a:rPr sz="1200" b="1">
+                <a:solidFill>
+                  <a:srgbClr val="00D4AA"/>
+                </a:solidFill>
+                <a:latin typeface="Inter"/>
+              </a:rPr>
+              <a:t>LECTURE 10.2</a:t>
+            </a:r>
+          </a:p>
+        </p:txBody>
+      </p:sp>
+      <p:sp>
+        <p:nvSpPr>
+          <p:cNvPr id="5" name="TextBox 4"/>
+          <p:cNvSpPr txBox="1"/>
+          <p:nvPr/>
+        </p:nvSpPr>
+        <p:spPr>
+          <a:xfrm>
+            <a:off x="914400" y="1874519"/>
+            <a:ext cx="10332720" cy="1645920"/>
           </a:xfrm>
           <a:prstGeom prst="rect">
             <a:avLst/>
@@ -13824,27 +16818,27 @@
               </a:lnSpc>
             </a:pPr>
             <a:r>
-              <a:rPr sz="2600" b="1">
+              <a:rPr sz="3000" b="1">
                 <a:solidFill>
                   <a:srgbClr val="FFFFFF"/>
                 </a:solidFill>
                 <a:latin typeface="Inter"/>
               </a:rPr>
-              <a:t>Masking rules</a:t>
-            </a:r>
-          </a:p>
-        </p:txBody>
-      </p:sp>
-      <p:sp>
-        <p:nvSpPr>
-          <p:cNvPr id="4" name="Rectangle 3"/>
+              <a:t>Code-along: masking in the SDK and the collector</a:t>
+            </a:r>
+          </a:p>
+        </p:txBody>
+      </p:sp>
+      <p:sp>
+        <p:nvSpPr>
+          <p:cNvPr id="6" name="Rectangle 5"/>
           <p:cNvSpPr/>
           <p:nvPr/>
         </p:nvSpPr>
         <p:spPr>
           <a:xfrm>
-            <a:off x="502920" y="1024128"/>
-            <a:ext cx="822960" cy="54864"/>
+            <a:off x="914400" y="3794760"/>
+            <a:ext cx="64008" cy="1143000"/>
           </a:xfrm>
           <a:prstGeom prst="rect">
             <a:avLst/>
@@ -13879,14 +16873,14 @@
       </p:sp>
       <p:sp>
         <p:nvSpPr>
-          <p:cNvPr id="5" name="TextBox 4"/>
+          <p:cNvPr id="7" name="TextBox 6"/>
           <p:cNvSpPr txBox="1"/>
           <p:nvPr/>
         </p:nvSpPr>
         <p:spPr>
           <a:xfrm>
-            <a:off x="457200" y="1325880"/>
-            <a:ext cx="4343400" cy="4983480"/>
+            <a:off x="1188720" y="3749039"/>
+            <a:ext cx="9692640" cy="1280160"/>
           </a:xfrm>
           <a:prstGeom prst="rect">
             <a:avLst/>
@@ -13894,161 +16888,46 @@
           <a:noFill/>
         </p:spPr>
         <p:txBody>
-          <a:bodyPr wrap="square" lIns="45720" rIns="45720" tIns="27432" bIns="27432" anchor="t">
+          <a:bodyPr wrap="square" lIns="45720" rIns="45720" tIns="27432" bIns="27432" anchor="ctr">
             <a:spAutoFit/>
           </a:bodyPr>
           <a:lstStyle/>
           <a:p>
-            <a:pPr marL="292608" indent="-292608">
+            <a:pPr>
               <a:lnSpc>
-                <a:spcPct val="120000"/>
+                <a:spcPct val="130000"/>
               </a:lnSpc>
-              <a:spcAft>
-                <a:spcPts val="1120"/>
-              </a:spcAft>
-              <a:buClr>
-                <a:srgbClr val="00D4AA"/>
-              </a:buClr>
-              <a:buFont typeface="Inter"/>
-              <a:buChar char="•"/>
             </a:pPr>
             <a:r>
               <a:rPr sz="1600" b="0">
                 <a:solidFill>
-                  <a:srgbClr val="FFFFFF"/>
-                </a:solidFill>
-                <a:latin typeface="Inter"/>
-              </a:rPr>
-              <a:t>Mask before export, never after: the SDK hook and the source summary, not a cleanup job</a:t>
-            </a:r>
-          </a:p>
-          <a:p>
-            <a:pPr marL="292608" indent="-292608">
-              <a:lnSpc>
-                <a:spcPct val="120000"/>
-              </a:lnSpc>
-              <a:spcAft>
-                <a:spcPts val="1120"/>
-              </a:spcAft>
-              <a:buClr>
-                <a:srgbClr val="00D4AA"/>
-              </a:buClr>
-              <a:buFont typeface="Inter"/>
-              <a:buChar char="•"/>
-            </a:pPr>
+                  <a:srgbClr val="CBD5E1"/>
+                </a:solidFill>
+                <a:latin typeface="Inter"/>
+              </a:rPr>
+              <a:t>Mask PII in three layers, at the source when a span attribute is set, in the Langfuse SDK with </a:t>
+            </a:r>
+            <a:r>
+              <a:rPr sz="1472" b="0">
+                <a:solidFill>
+                  <a:srgbClr val="00D4AA"/>
+                </a:solidFill>
+                <a:latin typeface="JetBrains Mono"/>
+              </a:rPr>
+              <a:t>mask=</a:t>
+            </a:r>
             <a:r>
               <a:rPr sz="1600" b="0">
                 <a:solidFill>
-                  <a:srgbClr val="FFFFFF"/>
-                </a:solidFill>
-                <a:latin typeface="Inter"/>
-              </a:rPr>
-              <a:t>Hash identifiers you need for joins; placeholder everything else</a:t>
-            </a:r>
-          </a:p>
-          <a:p>
-            <a:pPr marL="292608" indent="-292608">
-              <a:lnSpc>
-                <a:spcPct val="120000"/>
-              </a:lnSpc>
-              <a:spcAft>
-                <a:spcPts val="1120"/>
-              </a:spcAft>
-              <a:buClr>
-                <a:srgbClr val="00D4AA"/>
-              </a:buClr>
-              <a:buFont typeface="Inter"/>
-              <a:buChar char="•"/>
-            </a:pPr>
-            <a:r>
-              <a:rPr sz="1600" b="0">
-                <a:solidFill>
-                  <a:srgbClr val="FFFFFF"/>
-                </a:solidFill>
-                <a:latin typeface="Inter"/>
-              </a:rPr>
-              <a:t>Luhn-check card candidates; don't mask ticket numbers into uselessness</a:t>
-            </a:r>
-          </a:p>
-          <a:p>
-            <a:pPr marL="292608" indent="-292608">
-              <a:lnSpc>
-                <a:spcPct val="120000"/>
-              </a:lnSpc>
-              <a:spcAft>
-                <a:spcPts val="1120"/>
-              </a:spcAft>
-              <a:buClr>
-                <a:srgbClr val="00D4AA"/>
-              </a:buClr>
-              <a:buFont typeface="Inter"/>
-              <a:buChar char="•"/>
-            </a:pPr>
-            <a:r>
-              <a:rPr sz="1600" b="0">
-                <a:solidFill>
-                  <a:srgbClr val="FFFFFF"/>
-                </a:solidFill>
-                <a:latin typeface="Inter"/>
-              </a:rPr>
-              <a:t>Collector processors are the safety net, not the plan</a:t>
-            </a:r>
-          </a:p>
-          <a:p>
-            <a:pPr marL="292608" indent="-292608">
-              <a:lnSpc>
-                <a:spcPct val="120000"/>
-              </a:lnSpc>
-              <a:spcAft>
-                <a:spcPts val="1120"/>
-              </a:spcAft>
-              <a:buClr>
-                <a:srgbClr val="00D4AA"/>
-              </a:buClr>
-              <a:buFont typeface="Inter"/>
-              <a:buChar char="•"/>
-            </a:pPr>
-            <a:r>
-              <a:rPr sz="1600" b="0">
-                <a:solidFill>
-                  <a:srgbClr val="FFFFFF"/>
-                </a:solidFill>
-                <a:latin typeface="Inter"/>
-              </a:rPr>
-              <a:t>One test, in CI, that fails on any raw value</a:t>
-            </a:r>
-          </a:p>
-        </p:txBody>
-      </p:sp>
-      <p:pic>
-        <p:nvPicPr>
-          <p:cNvPr id="6" name="Picture 5" descr="D10-telemetry-threat-model-notitle.png"/>
-          <p:cNvPicPr>
-            <a:picLocks noChangeAspect="1"/>
-          </p:cNvPicPr>
-          <p:nvPr/>
-        </p:nvPicPr>
-        <p:blipFill>
-          <a:blip r:embed="rId3"/>
-          <a:stretch>
-            <a:fillRect/>
-          </a:stretch>
-        </p:blipFill>
-        <p:spPr>
-          <a:xfrm>
-            <a:off x="4983480" y="2231707"/>
-            <a:ext cx="6766560" cy="3171825"/>
-          </a:xfrm>
-          <a:prstGeom prst="rect">
-            <a:avLst/>
-          </a:prstGeom>
-          <a:ln>
-            <a:solidFill>
-              <a:srgbClr val="1A2742"/>
-            </a:solidFill>
-          </a:ln>
-        </p:spPr>
-      </p:pic>
+                  <a:srgbClr val="CBD5E1"/>
+                </a:solidFill>
+                <a:latin typeface="Inter"/>
+              </a:rPr>
+              <a:t>, and in…</a:t>
+            </a:r>
+          </a:p>
+        </p:txBody>
+      </p:sp>
     </p:spTree>
   </p:cSld>
   <p:clrMapOvr>

--- a/agent-observability-course/10-graphics/slides/section-10.pptx
+++ b/agent-observability-course/10-graphics/slides/section-10.pptx
@@ -1477,7 +1477,7 @@
           <a:p/>
           <a:p>
             <a:r>
-              <a:t>When, which trace, which user as a hash, which department, which prompt and model, which tools, what happened, and a fingerprint of the answer. No question text, no answer text, no phone number. A job writes one of these per request to an append-only store with long retention and narrow access. It answers "what did the system do, and could a human have intervened" without containing anyone's data. And remember 10.2: for an audit trail, the user hash should be a keyed HMAC, not this demo's salted hash.</a:t>
+              <a:t>When, which trace, which user as a hash, which department, which prompt and model, which tools, what happened, and a fingerprint of the answer. No question text, no answer text, no phone number. A job writes one of these per request to an append-only store with long retention and narrow access. It answers "what did the system do, and could a human have intervened" without containing anyone's data. And remember 10.2: that user hash is `short_hash`, an HMAC, and it is exactly as secret as `ATLAS_PII_HASH_KEY`; this demo ran with the public demo key, so in production set the key before the first line is written.</a:t>
             </a:r>
           </a:p>
         </p:txBody>
@@ -2043,7 +2043,7 @@
           <a:lstStyle/>
           <a:p>
             <a:r>
-              <a:t>Here's the scale on the replayed day. An employee ID on every one of ten thousand requests. Every question and every answer, in plain text. Six hundred seventy-eight answers flagged by the PII detector from 8.4. Multiply by a month of retention and a few destinations, and a helpdesk is holding over a million identifiers at rest. Masking a value before it leaves the process costs a fraction of a millisecond. No tokens. No dollars. This is the cheapest security control you will ever ship.</a:t>
+              <a:t>Here's the scale on the replayed day. An employee ID on every one of ten thousand requests. Every question and every answer, in plain text. And the six hundred seventy-eight answers the PII detector from 8.4 flagged before it learned which values the knowledge base publishes, a reminder that the detector reads text that is already stored. Multiply by a month of retention and a few destinations, and a helpdesk is holding over a million identifiers at rest. Masking a value before it leaves the process costs a fraction of a millisecond. No tokens. No dollars. This is the cheapest security control you will ever ship.</a:t>
             </a:r>
           </a:p>
         </p:txBody>
@@ -2271,7 +2271,7 @@
           <a:p/>
           <a:p>
             <a:r>
-              <a:t>Layer one is the one that does most of the work. Every helper that puts content on a span calls `_safe` first: mask, then clip to four thousand characters. Tool results are where most of the sensitive data arrives, and this is the line that catches it before the span exists. One deliberate gap: `user.id` goes on the span as-is, because the local store needs the real id for the user showback in 6.3. The collector hashes it on the way out. If you export straight to Langfuse without the collector, hash it yourself before it becomes an attribute.</a:t>
+              <a:t>Layer one is the one that does most of the work. Every helper that puts content on a span calls `_safe` first: mask, then clip to four thousand characters. Tool results are where most of the sensitive data arrives, and this is the line that catches it before the span exists. One deliberate gap: `user.id` goes on the span as-is, because the local store needs the real id for the user showback in 6.3. The collector deletes it on the way out, and deletes rather than hashes because the collector's hash is plain SHA-256 with no key, which for a five-digit ID is the lookup table we just built. If you export straight to Langfuse without the collector, put the HMAC pseudonym on the span yourself before the raw id becomes an attribute.</a:t>
             </a:r>
           </a:p>
           <a:p/>
@@ -2313,7 +2313,7 @@
           <a:p/>
           <a:p>
             <a:r>
-              <a:t>Four processors, in order: `memory_limiter`, `attributes/redact`, `tail_sampling`, `batch`. The redaction step deletes outright what a backend never needs: tool results, message bodies, the system instructions, and the Langfuse input and output copies. It hashes what you still want to group by: tool arguments, `user.id` and `enduser.id`.</a:t>
+              <a:t>Four processors, in order: `memory_limiter`, `attributes/redact`, `tail_sampling`, `batch`. The redaction step deletes outright what a backend never needs: tool results, message bodies, the system instructions, the Langfuse input and output copies, and the raw user ids. It hashes one thing, the tool arguments, and only because Atlas has already masked them at the source, so the digest just groups identical calls and exposes nothing new.</a:t>
             </a:r>
           </a:p>
           <a:p/>
@@ -2349,7 +2349,7 @@
           <a:p/>
           <a:p>
             <a:r>
-              <a:t>[DEMO: `34 passed`]</a:t>
+              <a:t>[DEMO: `38 passed`]</a:t>
             </a:r>
           </a:p>
         </p:txBody>
@@ -2419,7 +2419,7 @@
           <a:lstStyle/>
           <a:p>
             <a:r>
-              <a:t>Rules. Mask before export, never with a cleanup job, because a cleanup job runs after the leak. Delete what nobody needs, hash what you join on, placeholder the rest. Key your hashes for anything with a small value space. Luhn-check cards so you don't blind yourself. And one test in CI that fails on any raw value.</a:t>
+              <a:t>Rules. Mask before export, never with a cleanup job, because a cleanup job runs after the leak. Delete what nobody needs, hash what you join on, placeholder the rest. Key your hashes for anything with a small value space, and keep the key out of the repo. Luhn-check cards so you don't blind yourself. And one test in CI that fails on any raw value.</a:t>
             </a:r>
           </a:p>
         </p:txBody>
@@ -5974,7 +5974,25 @@
                 </a:solidFill>
                 <a:latin typeface="Inter"/>
               </a:rPr>
-              <a:t> is set as-is in-process: the local store needs it for the showback; the collector hashes it on export</a:t>
+              <a:t> is set as-is in-process: the local store needs it for the showback; the collector deletes it on export (its own </a:t>
+            </a:r>
+            <a:r>
+              <a:rPr sz="1656" b="0">
+                <a:solidFill>
+                  <a:srgbClr val="00D4AA"/>
+                </a:solidFill>
+                <a:latin typeface="JetBrains Mono"/>
+              </a:rPr>
+              <a:t>hash</a:t>
+            </a:r>
+            <a:r>
+              <a:rPr sz="1800" b="0">
+                <a:solidFill>
+                  <a:srgbClr val="FFFFFF"/>
+                </a:solidFill>
+                <a:latin typeface="Inter"/>
+              </a:rPr>
+              <a:t> action is unkeyed SHA-256, reversible for a five-digit ID)</a:t>
             </a:r>
           </a:p>
           <a:p>
@@ -5998,25 +6016,7 @@
                 </a:solidFill>
                 <a:latin typeface="Inter"/>
               </a:rPr>
-              <a:t>Exporting straight to Langfuse, without the collector? Hash </a:t>
-            </a:r>
-            <a:r>
-              <a:rPr sz="1656" b="0">
-                <a:solidFill>
-                  <a:srgbClr val="00D4AA"/>
-                </a:solidFill>
-                <a:latin typeface="JetBrains Mono"/>
-              </a:rPr>
-              <a:t>user.id</a:t>
-            </a:r>
-            <a:r>
-              <a:rPr sz="1800" b="0">
-                <a:solidFill>
-                  <a:srgbClr val="FFFFFF"/>
-                </a:solidFill>
-                <a:latin typeface="Inter"/>
-              </a:rPr>
-              <a:t> yourself first</a:t>
+              <a:t>Exporting straight to Langfuse, without the collector? Put the HMAC pseudonym on the span yourself, not the raw id</a:t>
             </a:r>
           </a:p>
         </p:txBody>
@@ -6252,7 +6252,16 @@
                 </a:solidFill>
                 <a:latin typeface="Inter"/>
               </a:rPr>
-              <a:t>Low-entropy ids need a keyed HMAC, not a salted hash</a:t>
+              <a:t>Low-entropy ids need a keyed HMAC, and the key must be a secret: set </a:t>
+            </a:r>
+            <a:r>
+              <a:rPr sz="1472" b="0">
+                <a:solidFill>
+                  <a:srgbClr val="00D4AA"/>
+                </a:solidFill>
+                <a:latin typeface="JetBrains Mono"/>
+              </a:rPr>
+              <a:t>ATLAS_PII_HASH_KEY</a:t>
             </a:r>
           </a:p>
           <a:p>
@@ -15633,7 +15642,7 @@
                 </a:solidFill>
                 <a:latin typeface="Inter"/>
               </a:rPr>
-              <a:t>678 answers flagged by the PII detector in 8.4, before anyone reviewed them</a:t>
+              <a:t>678 answers the PII detector in 8.4 flagged before its allowlist of published values, every one of them policy text</a:t>
             </a:r>
           </a:p>
           <a:p>
